--- a/Reports/ViT_FineTuning_Report_Base.pptx
+++ b/Reports/ViT_FineTuning_Report_Base.pptx
@@ -4,6 +4,9 @@
   <p:sldMasterIdLst>
     <p:sldMasterId id="2147483648" r:id="rId1"/>
   </p:sldMasterIdLst>
+  <p:notesMasterIdLst>
+    <p:notesMasterId r:id="rId14"/>
+  </p:notesMasterIdLst>
   <p:sldIdLst>
     <p:sldId id="256" r:id="rId2"/>
     <p:sldId id="257" r:id="rId3"/>
@@ -18,10 +21,7 @@
     <p:sldId id="266" r:id="rId12"/>
     <p:sldId id="267" r:id="rId13"/>
   </p:sldIdLst>
-  <p:notesMasterIdLst>
-    <p:notesMasterId r:id="rId14"/>
-  </p:notesMasterIdLst>
-  <p:sldSz cx="9144000" cy="5143500"/>
+  <p:sldSz cx="9144000" cy="5143500" type="screen16x9"/>
   <p:notesSz cx="5143500" cy="9144000"/>
   <p:defaultTextStyle>
     <a:lvl1pPr marL="0" algn="l" defTabSz="914400" rtl="0" eaLnBrk="1" latinLnBrk="0" hangingPunct="1">
@@ -115,13 +115,20 @@
       </a:defRPr>
     </a:lvl9pPr>
   </p:defaultTextStyle>
+  <p:extLst>
+    <p:ext uri="{EFAFB233-063F-42B5-8137-9DF3F51BA10A}">
+      <p15:sldGuideLst xmlns:p15="http://schemas.microsoft.com/office/powerpoint/2012/main"/>
+    </p:ext>
+  </p:extLst>
 </p:presentation>
 </file>
 
 <file path=ppt/charts/chart1.xml><?xml version="1.0" encoding="utf-8"?>
-<c:chartSpace xmlns:c="http://schemas.openxmlformats.org/drawingml/2006/chart" xmlns:a="http://schemas.openxmlformats.org/drawingml/2006/main" xmlns:r="http://schemas.openxmlformats.org/officeDocument/2006/relationships">
+<c:chartSpace xmlns:c="http://schemas.openxmlformats.org/drawingml/2006/chart" xmlns:a="http://schemas.openxmlformats.org/drawingml/2006/main" xmlns:r="http://schemas.openxmlformats.org/officeDocument/2006/relationships" xmlns:c16r2="http://schemas.microsoft.com/office/drawing/2015/06/chart">
   <c:date1904 val="0"/>
+  <c:lang val="en-US"/>
   <c:roundedCorners val="1"/>
+  <c:style val="2"/>
   <c:chart>
     <c:autoTitleDeleted val="1"/>
     <c:plotArea>
@@ -151,40 +158,15 @@
             <a:effectLst/>
           </c:spPr>
           <c:invertIfNegative val="0"/>
-          <c:dLbls>
-            <c:numFmt formatCode="#,##0" sourceLinked="0"/>
-            <c:txPr>
-              <a:bodyPr/>
-              <a:lstStyle/>
-              <a:p>
-                <a:pPr>
-                  <a:defRPr b="0" i="0" strike="noStrike" sz="800" u="none">
-                    <a:solidFill>
-                      <a:srgbClr val="1E293B"/>
-                    </a:solidFill>
-                    <a:latin typeface="Arial"/>
-                  </a:defRPr>
-                </a:pPr>
-              </a:p>
-            </c:txPr>
-            <c:showLegendKey val="0"/>
-            <c:showVal val="1"/>
-            <c:showCatName val="0"/>
-            <c:showSerName val="0"/>
-            <c:showPercent val="0"/>
-            <c:showBubbleSize val="0"/>
-            <c:showLeaderLines val="0"/>
-          </c:dLbls>
           <c:dPt>
             <c:idx val="0"/>
             <c:invertIfNegative val="0"/>
             <c:bubble3D val="0"/>
-            <c:spPr>
-              <a:solidFill>
-                <a:srgbClr val="1D4ED8"/>
-              </a:solidFill>
-              <a:effectLst/>
-            </c:spPr>
+            <c:extLst>
+              <c:ext xmlns:c16="http://schemas.microsoft.com/office/drawing/2014/chart" uri="{C3380CC4-5D6E-409C-BE32-E72D297353CC}">
+                <c16:uniqueId val="{00000001-D382-476D-9FEC-6B73077B42C3}"/>
+              </c:ext>
+            </c:extLst>
           </c:dPt>
           <c:dPt>
             <c:idx val="1"/>
@@ -196,6 +178,11 @@
               </a:solidFill>
               <a:effectLst/>
             </c:spPr>
+            <c:extLst>
+              <c:ext xmlns:c16="http://schemas.microsoft.com/office/drawing/2014/chart" uri="{C3380CC4-5D6E-409C-BE32-E72D297353CC}">
+                <c16:uniqueId val="{00000003-D382-476D-9FEC-6B73077B42C3}"/>
+              </c:ext>
+            </c:extLst>
           </c:dPt>
           <c:dPt>
             <c:idx val="2"/>
@@ -207,6 +194,11 @@
               </a:solidFill>
               <a:effectLst/>
             </c:spPr>
+            <c:extLst>
+              <c:ext xmlns:c16="http://schemas.microsoft.com/office/drawing/2014/chart" uri="{C3380CC4-5D6E-409C-BE32-E72D297353CC}">
+                <c16:uniqueId val="{00000005-D382-476D-9FEC-6B73077B42C3}"/>
+              </c:ext>
+            </c:extLst>
           </c:dPt>
           <c:dPt>
             <c:idx val="3"/>
@@ -218,6 +210,11 @@
               </a:solidFill>
               <a:effectLst/>
             </c:spPr>
+            <c:extLst>
+              <c:ext xmlns:c16="http://schemas.microsoft.com/office/drawing/2014/chart" uri="{C3380CC4-5D6E-409C-BE32-E72D297353CC}">
+                <c16:uniqueId val="{00000007-D382-476D-9FEC-6B73077B42C3}"/>
+              </c:ext>
+            </c:extLst>
           </c:dPt>
           <c:dPt>
             <c:idx val="4"/>
@@ -229,6 +226,11 @@
               </a:solidFill>
               <a:effectLst/>
             </c:spPr>
+            <c:extLst>
+              <c:ext xmlns:c16="http://schemas.microsoft.com/office/drawing/2014/chart" uri="{C3380CC4-5D6E-409C-BE32-E72D297353CC}">
+                <c16:uniqueId val="{00000009-D382-476D-9FEC-6B73077B42C3}"/>
+              </c:ext>
+            </c:extLst>
           </c:dPt>
           <c:dPt>
             <c:idx val="5"/>
@@ -240,6 +242,11 @@
               </a:solidFill>
               <a:effectLst/>
             </c:spPr>
+            <c:extLst>
+              <c:ext xmlns:c16="http://schemas.microsoft.com/office/drawing/2014/chart" uri="{C3380CC4-5D6E-409C-BE32-E72D297353CC}">
+                <c16:uniqueId val="{0000000B-D382-476D-9FEC-6B73077B42C3}"/>
+              </c:ext>
+            </c:extLst>
           </c:dPt>
           <c:dPt>
             <c:idx val="6"/>
@@ -251,6 +258,11 @@
               </a:solidFill>
               <a:effectLst/>
             </c:spPr>
+            <c:extLst>
+              <c:ext xmlns:c16="http://schemas.microsoft.com/office/drawing/2014/chart" uri="{C3380CC4-5D6E-409C-BE32-E72D297353CC}">
+                <c16:uniqueId val="{0000000D-D382-476D-9FEC-6B73077B42C3}"/>
+              </c:ext>
+            </c:extLst>
           </c:dPt>
           <c:dPt>
             <c:idx val="7"/>
@@ -262,6 +274,11 @@
               </a:solidFill>
               <a:effectLst/>
             </c:spPr>
+            <c:extLst>
+              <c:ext xmlns:c16="http://schemas.microsoft.com/office/drawing/2014/chart" uri="{C3380CC4-5D6E-409C-BE32-E72D297353CC}">
+                <c16:uniqueId val="{0000000F-D382-476D-9FEC-6B73077B42C3}"/>
+              </c:ext>
+            </c:extLst>
           </c:dPt>
           <c:dPt>
             <c:idx val="8"/>
@@ -273,6 +290,11 @@
               </a:solidFill>
               <a:effectLst/>
             </c:spPr>
+            <c:extLst>
+              <c:ext xmlns:c16="http://schemas.microsoft.com/office/drawing/2014/chart" uri="{C3380CC4-5D6E-409C-BE32-E72D297353CC}">
+                <c16:uniqueId val="{00000011-D382-476D-9FEC-6B73077B42C3}"/>
+              </c:ext>
+            </c:extLst>
           </c:dPt>
           <c:dPt>
             <c:idx val="9"/>
@@ -284,6 +306,11 @@
               </a:solidFill>
               <a:effectLst/>
             </c:spPr>
+            <c:extLst>
+              <c:ext xmlns:c16="http://schemas.microsoft.com/office/drawing/2014/chart" uri="{C3380CC4-5D6E-409C-BE32-E72D297353CC}">
+                <c16:uniqueId val="{00000013-D382-476D-9FEC-6B73077B42C3}"/>
+              </c:ext>
+            </c:extLst>
           </c:dPt>
           <c:dPt>
             <c:idx val="10"/>
@@ -295,6 +322,11 @@
               </a:solidFill>
               <a:effectLst/>
             </c:spPr>
+            <c:extLst>
+              <c:ext xmlns:c16="http://schemas.microsoft.com/office/drawing/2014/chart" uri="{C3380CC4-5D6E-409C-BE32-E72D297353CC}">
+                <c16:uniqueId val="{00000015-D382-476D-9FEC-6B73077B42C3}"/>
+              </c:ext>
+            </c:extLst>
           </c:dPt>
           <c:dPt>
             <c:idx val="11"/>
@@ -306,52 +338,92 @@
               </a:solidFill>
               <a:effectLst/>
             </c:spPr>
+            <c:extLst>
+              <c:ext xmlns:c16="http://schemas.microsoft.com/office/drawing/2014/chart" uri="{C3380CC4-5D6E-409C-BE32-E72D297353CC}">
+                <c16:uniqueId val="{00000017-D382-476D-9FEC-6B73077B42C3}"/>
+              </c:ext>
+            </c:extLst>
           </c:dPt>
+          <c:dLbls>
+            <c:numFmt formatCode="#,##0" sourceLinked="0"/>
+            <c:spPr>
+              <a:noFill/>
+              <a:ln>
+                <a:noFill/>
+              </a:ln>
+              <a:effectLst/>
+            </c:spPr>
+            <c:txPr>
+              <a:bodyPr/>
+              <a:lstStyle/>
+              <a:p>
+                <a:pPr>
+                  <a:defRPr sz="800" b="0" i="0" u="none" strike="noStrike">
+                    <a:solidFill>
+                      <a:srgbClr val="1E293B"/>
+                    </a:solidFill>
+                    <a:latin typeface="Arial"/>
+                  </a:defRPr>
+                </a:pPr>
+                <a:endParaRPr lang="en-US"/>
+              </a:p>
+            </c:txPr>
+            <c:showLegendKey val="0"/>
+            <c:showVal val="1"/>
+            <c:showCatName val="0"/>
+            <c:showSerName val="0"/>
+            <c:showPercent val="0"/>
+            <c:showBubbleSize val="0"/>
+            <c:showLeaderLines val="0"/>
+            <c:extLst>
+              <c:ext xmlns:c15="http://schemas.microsoft.com/office/drawing/2012/chart" uri="{CE6537A1-D6FC-4f65-9D91-7224C49458BB}">
+                <c15:showLeaderLines val="0"/>
+              </c:ext>
+            </c:extLst>
+          </c:dLbls>
           <c:cat>
-            <c:multiLvlStrRef>
+            <c:strRef>
               <c:f>Sheet1!$A$2:$A$13</c:f>
-              <c:multiLvlStrCache>
+              <c:strCache>
                 <c:ptCount val="12"/>
-                <c:lvl>
-                  <c:pt idx="0">
-                    <c:v>erasing+jitter+mix-high</c:v>
-                  </c:pt>
-                  <c:pt idx="1">
-                    <c:v>cutmix_low_alpha</c:v>
-                  </c:pt>
-                  <c:pt idx="2">
-                    <c:v>erasing_high_prob</c:v>
-                  </c:pt>
-                  <c:pt idx="3">
-                    <c:v>cutmix_moderate_alpha</c:v>
-                  </c:pt>
-                  <c:pt idx="4">
-                    <c:v>jitter_only</c:v>
-                  </c:pt>
-                  <c:pt idx="5">
-                    <c:v>mixup_moderate_alpha</c:v>
-                  </c:pt>
-                  <c:pt idx="6">
-                    <c:v>erasing_low_prob</c:v>
-                  </c:pt>
-                  <c:pt idx="7">
-                    <c:v>basic_augs</c:v>
-                  </c:pt>
-                  <c:pt idx="8">
-                    <c:v>erasing+jitter+mix-low</c:v>
-                  </c:pt>
-                  <c:pt idx="9">
-                    <c:v>mixup+cutmix</c:v>
-                  </c:pt>
-                  <c:pt idx="10">
-                    <c:v>mixup_low_alpha</c:v>
-                  </c:pt>
-                  <c:pt idx="11">
-                    <c:v>no_augs</c:v>
-                  </c:pt>
-                </c:lvl>
-              </c:multiLvlStrCache>
-            </c:multiLvlStrRef>
+                <c:pt idx="0">
+                  <c:v>erasing+jitter+mix-high</c:v>
+                </c:pt>
+                <c:pt idx="1">
+                  <c:v>cutmix_low_alpha</c:v>
+                </c:pt>
+                <c:pt idx="2">
+                  <c:v>erasing_high_prob</c:v>
+                </c:pt>
+                <c:pt idx="3">
+                  <c:v>cutmix_moderate_alpha</c:v>
+                </c:pt>
+                <c:pt idx="4">
+                  <c:v>jitter_only</c:v>
+                </c:pt>
+                <c:pt idx="5">
+                  <c:v>mixup_moderate_alpha</c:v>
+                </c:pt>
+                <c:pt idx="6">
+                  <c:v>erasing_low_prob</c:v>
+                </c:pt>
+                <c:pt idx="7">
+                  <c:v>basic_augs</c:v>
+                </c:pt>
+                <c:pt idx="8">
+                  <c:v>erasing+jitter+mix-low</c:v>
+                </c:pt>
+                <c:pt idx="9">
+                  <c:v>mixup+cutmix</c:v>
+                </c:pt>
+                <c:pt idx="10">
+                  <c:v>mixup_low_alpha</c:v>
+                </c:pt>
+                <c:pt idx="11">
+                  <c:v>no_augs</c:v>
+                </c:pt>
+              </c:strCache>
+            </c:strRef>
           </c:cat>
           <c:val>
             <c:numRef>
@@ -398,36 +470,23 @@
               </c:numCache>
             </c:numRef>
           </c:val>
+          <c:extLst>
+            <c:ext xmlns:c16="http://schemas.microsoft.com/office/drawing/2014/chart" uri="{C3380CC4-5D6E-409C-BE32-E72D297353CC}">
+              <c16:uniqueId val="{00000018-D382-476D-9FEC-6B73077B42C3}"/>
+            </c:ext>
+          </c:extLst>
         </c:ser>
         <c:dLbls>
-          <c:numFmt formatCode="#,##0" sourceLinked="0"/>
-          <c:txPr>
-            <a:bodyPr/>
-            <a:lstStyle/>
-            <a:p>
-              <a:pPr>
-                <a:defRPr b="0" i="0" strike="noStrike" sz="800" u="none">
-                  <a:solidFill>
-                    <a:srgbClr val="1E293B"/>
-                  </a:solidFill>
-                  <a:latin typeface="Arial"/>
-                </a:defRPr>
-              </a:pPr>
-            </a:p>
-          </c:txPr>
           <c:showLegendKey val="0"/>
           <c:showVal val="1"/>
           <c:showCatName val="0"/>
           <c:showSerName val="0"/>
           <c:showPercent val="0"/>
           <c:showBubbleSize val="0"/>
-          <c:showLeaderLines val="0"/>
         </c:dLbls>
         <c:gapWidth val="150"/>
-        <c:overlap val="0"/>
         <c:axId val="2094734554"/>
         <c:axId val="2094734552"/>
-        <c:axId val="2094734556"/>
       </c:barChart>
       <c:catAx>
         <c:axId val="2094734554"/>
@@ -468,6 +527,7 @@
         <c:crosses val="autoZero"/>
         <c:auto val="1"/>
         <c:lblAlgn val="ctr"/>
+        <c:lblOffset val="100"/>
         <c:noMultiLvlLbl val="1"/>
       </c:catAx>
       <c:valAx>
@@ -532,6 +592,7 @@
     </c:plotArea>
     <c:plotVisOnly val="1"/>
     <c:dispBlanksAs val="span"/>
+    <c:showDLblsOverMax val="1"/>
   </c:chart>
   <c:spPr>
     <a:solidFill>
@@ -549,9 +610,11 @@
 </file>
 
 <file path=ppt/charts/chart2.xml><?xml version="1.0" encoding="utf-8"?>
-<c:chartSpace xmlns:c="http://schemas.openxmlformats.org/drawingml/2006/chart" xmlns:a="http://schemas.openxmlformats.org/drawingml/2006/main" xmlns:r="http://schemas.openxmlformats.org/officeDocument/2006/relationships">
+<c:chartSpace xmlns:c="http://schemas.openxmlformats.org/drawingml/2006/chart" xmlns:a="http://schemas.openxmlformats.org/drawingml/2006/main" xmlns:r="http://schemas.openxmlformats.org/officeDocument/2006/relationships" xmlns:c16r2="http://schemas.microsoft.com/office/drawing/2015/06/chart">
   <c:date1904 val="0"/>
+  <c:lang val="en-US"/>
   <c:roundedCorners val="1"/>
+  <c:style val="2"/>
   <c:chart>
     <c:autoTitleDeleted val="1"/>
     <c:plotArea>
@@ -581,75 +644,49 @@
             <a:effectLst/>
           </c:spPr>
           <c:invertIfNegative val="0"/>
-          <c:dLbls>
-            <c:numFmt formatCode="#,##0" sourceLinked="0"/>
-            <c:txPr>
-              <a:bodyPr/>
-              <a:lstStyle/>
-              <a:p>
-                <a:pPr>
-                  <a:defRPr b="0" i="0" strike="noStrike" sz="1200" u="none">
-                    <a:solidFill>
-                      <a:srgbClr val="000000"/>
-                    </a:solidFill>
-                    <a:latin typeface="Arial"/>
-                  </a:defRPr>
-                </a:pPr>
-              </a:p>
-            </c:txPr>
-            <c:showLegendKey val="0"/>
-            <c:showVal val="0"/>
-            <c:showCatName val="0"/>
-            <c:showSerName val="0"/>
-            <c:showPercent val="0"/>
-            <c:showBubbleSize val="0"/>
-            <c:showLeaderLines val="0"/>
-          </c:dLbls>
           <c:cat>
-            <c:multiLvlStrRef>
+            <c:strRef>
               <c:f>Sheet1!$A$2:$A$13</c:f>
-              <c:multiLvlStrCache>
+              <c:strCache>
                 <c:ptCount val="12"/>
-                <c:lvl>
-                  <c:pt idx="0">
-                    <c:v>no_augs</c:v>
-                  </c:pt>
-                  <c:pt idx="1">
-                    <c:v>basic_augs</c:v>
-                  </c:pt>
-                  <c:pt idx="2">
-                    <c:v>erasing_low</c:v>
-                  </c:pt>
-                  <c:pt idx="3">
-                    <c:v>erasing_high</c:v>
-                  </c:pt>
-                  <c:pt idx="4">
-                    <c:v>jitter_only</c:v>
-                  </c:pt>
-                  <c:pt idx="5">
-                    <c:v>mixup_low</c:v>
-                  </c:pt>
-                  <c:pt idx="6">
-                    <c:v>mixup_mod</c:v>
-                  </c:pt>
-                  <c:pt idx="7">
-                    <c:v>cutmix_low</c:v>
-                  </c:pt>
-                  <c:pt idx="8">
-                    <c:v>cutmix_mod</c:v>
-                  </c:pt>
-                  <c:pt idx="9">
-                    <c:v>mix+cut</c:v>
-                  </c:pt>
-                  <c:pt idx="10">
-                    <c:v>full_low</c:v>
-                  </c:pt>
-                  <c:pt idx="11">
-                    <c:v>full_high</c:v>
-                  </c:pt>
-                </c:lvl>
-              </c:multiLvlStrCache>
-            </c:multiLvlStrRef>
+                <c:pt idx="0">
+                  <c:v>no_augs</c:v>
+                </c:pt>
+                <c:pt idx="1">
+                  <c:v>basic_augs</c:v>
+                </c:pt>
+                <c:pt idx="2">
+                  <c:v>erasing_low</c:v>
+                </c:pt>
+                <c:pt idx="3">
+                  <c:v>erasing_high</c:v>
+                </c:pt>
+                <c:pt idx="4">
+                  <c:v>jitter_only</c:v>
+                </c:pt>
+                <c:pt idx="5">
+                  <c:v>mixup_low</c:v>
+                </c:pt>
+                <c:pt idx="6">
+                  <c:v>mixup_mod</c:v>
+                </c:pt>
+                <c:pt idx="7">
+                  <c:v>cutmix_low</c:v>
+                </c:pt>
+                <c:pt idx="8">
+                  <c:v>cutmix_mod</c:v>
+                </c:pt>
+                <c:pt idx="9">
+                  <c:v>mix+cut</c:v>
+                </c:pt>
+                <c:pt idx="10">
+                  <c:v>full_low</c:v>
+                </c:pt>
+                <c:pt idx="11">
+                  <c:v>full_high</c:v>
+                </c:pt>
+              </c:strCache>
+            </c:strRef>
           </c:cat>
           <c:val>
             <c:numRef>
@@ -696,6 +733,11 @@
               </c:numCache>
             </c:numRef>
           </c:val>
+          <c:extLst>
+            <c:ext xmlns:c16="http://schemas.microsoft.com/office/drawing/2014/chart" uri="{C3380CC4-5D6E-409C-BE32-E72D297353CC}">
+              <c16:uniqueId val="{00000000-F0E9-4BCE-B601-FD86FC3CB775}"/>
+            </c:ext>
+          </c:extLst>
         </c:ser>
         <c:ser>
           <c:idx val="1"/>
@@ -718,75 +760,49 @@
             <a:effectLst/>
           </c:spPr>
           <c:invertIfNegative val="0"/>
-          <c:dLbls>
-            <c:numFmt formatCode="#,##0" sourceLinked="0"/>
-            <c:txPr>
-              <a:bodyPr/>
-              <a:lstStyle/>
-              <a:p>
-                <a:pPr>
-                  <a:defRPr b="0" i="0" strike="noStrike" sz="1200" u="none">
-                    <a:solidFill>
-                      <a:srgbClr val="000000"/>
-                    </a:solidFill>
-                    <a:latin typeface="Arial"/>
-                  </a:defRPr>
-                </a:pPr>
-              </a:p>
-            </c:txPr>
-            <c:showLegendKey val="0"/>
-            <c:showVal val="0"/>
-            <c:showCatName val="0"/>
-            <c:showSerName val="0"/>
-            <c:showPercent val="0"/>
-            <c:showBubbleSize val="0"/>
-            <c:showLeaderLines val="0"/>
-          </c:dLbls>
           <c:cat>
-            <c:multiLvlStrRef>
+            <c:strRef>
               <c:f>Sheet1!$A$2:$A$13</c:f>
-              <c:multiLvlStrCache>
+              <c:strCache>
                 <c:ptCount val="12"/>
-                <c:lvl>
-                  <c:pt idx="0">
-                    <c:v>no_augs</c:v>
-                  </c:pt>
-                  <c:pt idx="1">
-                    <c:v>basic_augs</c:v>
-                  </c:pt>
-                  <c:pt idx="2">
-                    <c:v>erasing_low</c:v>
-                  </c:pt>
-                  <c:pt idx="3">
-                    <c:v>erasing_high</c:v>
-                  </c:pt>
-                  <c:pt idx="4">
-                    <c:v>jitter_only</c:v>
-                  </c:pt>
-                  <c:pt idx="5">
-                    <c:v>mixup_low</c:v>
-                  </c:pt>
-                  <c:pt idx="6">
-                    <c:v>mixup_mod</c:v>
-                  </c:pt>
-                  <c:pt idx="7">
-                    <c:v>cutmix_low</c:v>
-                  </c:pt>
-                  <c:pt idx="8">
-                    <c:v>cutmix_mod</c:v>
-                  </c:pt>
-                  <c:pt idx="9">
-                    <c:v>mix+cut</c:v>
-                  </c:pt>
-                  <c:pt idx="10">
-                    <c:v>full_low</c:v>
-                  </c:pt>
-                  <c:pt idx="11">
-                    <c:v>full_high</c:v>
-                  </c:pt>
-                </c:lvl>
-              </c:multiLvlStrCache>
-            </c:multiLvlStrRef>
+                <c:pt idx="0">
+                  <c:v>no_augs</c:v>
+                </c:pt>
+                <c:pt idx="1">
+                  <c:v>basic_augs</c:v>
+                </c:pt>
+                <c:pt idx="2">
+                  <c:v>erasing_low</c:v>
+                </c:pt>
+                <c:pt idx="3">
+                  <c:v>erasing_high</c:v>
+                </c:pt>
+                <c:pt idx="4">
+                  <c:v>jitter_only</c:v>
+                </c:pt>
+                <c:pt idx="5">
+                  <c:v>mixup_low</c:v>
+                </c:pt>
+                <c:pt idx="6">
+                  <c:v>mixup_mod</c:v>
+                </c:pt>
+                <c:pt idx="7">
+                  <c:v>cutmix_low</c:v>
+                </c:pt>
+                <c:pt idx="8">
+                  <c:v>cutmix_mod</c:v>
+                </c:pt>
+                <c:pt idx="9">
+                  <c:v>mix+cut</c:v>
+                </c:pt>
+                <c:pt idx="10">
+                  <c:v>full_low</c:v>
+                </c:pt>
+                <c:pt idx="11">
+                  <c:v>full_high</c:v>
+                </c:pt>
+              </c:strCache>
+            </c:strRef>
           </c:cat>
           <c:val>
             <c:numRef>
@@ -833,6 +849,11 @@
               </c:numCache>
             </c:numRef>
           </c:val>
+          <c:extLst>
+            <c:ext xmlns:c16="http://schemas.microsoft.com/office/drawing/2014/chart" uri="{C3380CC4-5D6E-409C-BE32-E72D297353CC}">
+              <c16:uniqueId val="{00000001-F0E9-4BCE-B601-FD86FC3CB775}"/>
+            </c:ext>
+          </c:extLst>
         </c:ser>
         <c:ser>
           <c:idx val="2"/>
@@ -855,75 +876,49 @@
             <a:effectLst/>
           </c:spPr>
           <c:invertIfNegative val="0"/>
-          <c:dLbls>
-            <c:numFmt formatCode="#,##0" sourceLinked="0"/>
-            <c:txPr>
-              <a:bodyPr/>
-              <a:lstStyle/>
-              <a:p>
-                <a:pPr>
-                  <a:defRPr b="0" i="0" strike="noStrike" sz="1200" u="none">
-                    <a:solidFill>
-                      <a:srgbClr val="000000"/>
-                    </a:solidFill>
-                    <a:latin typeface="Arial"/>
-                  </a:defRPr>
-                </a:pPr>
-              </a:p>
-            </c:txPr>
-            <c:showLegendKey val="0"/>
-            <c:showVal val="0"/>
-            <c:showCatName val="0"/>
-            <c:showSerName val="0"/>
-            <c:showPercent val="0"/>
-            <c:showBubbleSize val="0"/>
-            <c:showLeaderLines val="0"/>
-          </c:dLbls>
           <c:cat>
-            <c:multiLvlStrRef>
+            <c:strRef>
               <c:f>Sheet1!$A$2:$A$13</c:f>
-              <c:multiLvlStrCache>
+              <c:strCache>
                 <c:ptCount val="12"/>
-                <c:lvl>
-                  <c:pt idx="0">
-                    <c:v>no_augs</c:v>
-                  </c:pt>
-                  <c:pt idx="1">
-                    <c:v>basic_augs</c:v>
-                  </c:pt>
-                  <c:pt idx="2">
-                    <c:v>erasing_low</c:v>
-                  </c:pt>
-                  <c:pt idx="3">
-                    <c:v>erasing_high</c:v>
-                  </c:pt>
-                  <c:pt idx="4">
-                    <c:v>jitter_only</c:v>
-                  </c:pt>
-                  <c:pt idx="5">
-                    <c:v>mixup_low</c:v>
-                  </c:pt>
-                  <c:pt idx="6">
-                    <c:v>mixup_mod</c:v>
-                  </c:pt>
-                  <c:pt idx="7">
-                    <c:v>cutmix_low</c:v>
-                  </c:pt>
-                  <c:pt idx="8">
-                    <c:v>cutmix_mod</c:v>
-                  </c:pt>
-                  <c:pt idx="9">
-                    <c:v>mix+cut</c:v>
-                  </c:pt>
-                  <c:pt idx="10">
-                    <c:v>full_low</c:v>
-                  </c:pt>
-                  <c:pt idx="11">
-                    <c:v>full_high</c:v>
-                  </c:pt>
-                </c:lvl>
-              </c:multiLvlStrCache>
-            </c:multiLvlStrRef>
+                <c:pt idx="0">
+                  <c:v>no_augs</c:v>
+                </c:pt>
+                <c:pt idx="1">
+                  <c:v>basic_augs</c:v>
+                </c:pt>
+                <c:pt idx="2">
+                  <c:v>erasing_low</c:v>
+                </c:pt>
+                <c:pt idx="3">
+                  <c:v>erasing_high</c:v>
+                </c:pt>
+                <c:pt idx="4">
+                  <c:v>jitter_only</c:v>
+                </c:pt>
+                <c:pt idx="5">
+                  <c:v>mixup_low</c:v>
+                </c:pt>
+                <c:pt idx="6">
+                  <c:v>mixup_mod</c:v>
+                </c:pt>
+                <c:pt idx="7">
+                  <c:v>cutmix_low</c:v>
+                </c:pt>
+                <c:pt idx="8">
+                  <c:v>cutmix_mod</c:v>
+                </c:pt>
+                <c:pt idx="9">
+                  <c:v>mix+cut</c:v>
+                </c:pt>
+                <c:pt idx="10">
+                  <c:v>full_low</c:v>
+                </c:pt>
+                <c:pt idx="11">
+                  <c:v>full_high</c:v>
+                </c:pt>
+              </c:strCache>
+            </c:strRef>
           </c:cat>
           <c:val>
             <c:numRef>
@@ -970,36 +965,23 @@
               </c:numCache>
             </c:numRef>
           </c:val>
+          <c:extLst>
+            <c:ext xmlns:c16="http://schemas.microsoft.com/office/drawing/2014/chart" uri="{C3380CC4-5D6E-409C-BE32-E72D297353CC}">
+              <c16:uniqueId val="{00000002-F0E9-4BCE-B601-FD86FC3CB775}"/>
+            </c:ext>
+          </c:extLst>
         </c:ser>
         <c:dLbls>
-          <c:numFmt formatCode="#,##0" sourceLinked="0"/>
-          <c:txPr>
-            <a:bodyPr/>
-            <a:lstStyle/>
-            <a:p>
-              <a:pPr>
-                <a:defRPr b="0" i="0" strike="noStrike" sz="1200" u="none">
-                  <a:solidFill>
-                    <a:srgbClr val="000000"/>
-                  </a:solidFill>
-                  <a:latin typeface="Arial"/>
-                </a:defRPr>
-              </a:pPr>
-            </a:p>
-          </c:txPr>
           <c:showLegendKey val="0"/>
           <c:showVal val="0"/>
           <c:showCatName val="0"/>
           <c:showSerName val="0"/>
           <c:showPercent val="0"/>
           <c:showBubbleSize val="0"/>
-          <c:showLeaderLines val="0"/>
         </c:dLbls>
         <c:gapWidth val="150"/>
-        <c:overlap val="0"/>
         <c:axId val="2094734554"/>
         <c:axId val="2094734552"/>
-        <c:axId val="2094734556"/>
       </c:barChart>
       <c:catAx>
         <c:axId val="2094734554"/>
@@ -1040,6 +1022,7 @@
         <c:crosses val="autoZero"/>
         <c:auto val="1"/>
         <c:lblAlgn val="ctr"/>
+        <c:lblOffset val="100"/>
         <c:noMultiLvlLbl val="1"/>
       </c:catAx>
       <c:valAx>
@@ -1108,6 +1091,7 @@
     </c:legend>
     <c:plotVisOnly val="1"/>
     <c:dispBlanksAs val="span"/>
+    <c:showDLblsOverMax val="1"/>
   </c:chart>
   <c:spPr>
     <a:solidFill>
@@ -1125,9 +1109,11 @@
 </file>
 
 <file path=ppt/charts/chart3.xml><?xml version="1.0" encoding="utf-8"?>
-<c:chartSpace xmlns:c="http://schemas.openxmlformats.org/drawingml/2006/chart" xmlns:a="http://schemas.openxmlformats.org/drawingml/2006/main" xmlns:r="http://schemas.openxmlformats.org/officeDocument/2006/relationships">
+<c:chartSpace xmlns:c="http://schemas.openxmlformats.org/drawingml/2006/chart" xmlns:a="http://schemas.openxmlformats.org/drawingml/2006/main" xmlns:r="http://schemas.openxmlformats.org/officeDocument/2006/relationships" xmlns:c16r2="http://schemas.microsoft.com/office/drawing/2015/06/chart">
   <c:date1904 val="0"/>
+  <c:lang val="en-US"/>
   <c:roundedCorners val="1"/>
+  <c:style val="2"/>
   <c:chart>
     <c:title>
       <c:tx>
@@ -1155,7 +1141,6 @@
           </a:p>
         </c:rich>
       </c:tx>
-      <c:layout/>
       <c:overlay val="0"/>
     </c:title>
     <c:autoTitleDeleted val="0"/>
@@ -1186,40 +1171,15 @@
             <a:effectLst/>
           </c:spPr>
           <c:invertIfNegative val="0"/>
-          <c:dLbls>
-            <c:numFmt formatCode="#,##0" sourceLinked="0"/>
-            <c:txPr>
-              <a:bodyPr/>
-              <a:lstStyle/>
-              <a:p>
-                <a:pPr>
-                  <a:defRPr b="0" i="0" strike="noStrike" sz="900" u="none">
-                    <a:solidFill>
-                      <a:srgbClr val="0F172A"/>
-                    </a:solidFill>
-                    <a:latin typeface="Arial"/>
-                  </a:defRPr>
-                </a:pPr>
-              </a:p>
-            </c:txPr>
-            <c:showLegendKey val="0"/>
-            <c:showVal val="1"/>
-            <c:showCatName val="0"/>
-            <c:showSerName val="0"/>
-            <c:showPercent val="0"/>
-            <c:showBubbleSize val="0"/>
-            <c:showLeaderLines val="0"/>
-          </c:dLbls>
           <c:dPt>
             <c:idx val="0"/>
             <c:invertIfNegative val="0"/>
             <c:bubble3D val="0"/>
-            <c:spPr>
-              <a:solidFill>
-                <a:srgbClr val="0284C7"/>
-              </a:solidFill>
-              <a:effectLst/>
-            </c:spPr>
+            <c:extLst>
+              <c:ext xmlns:c16="http://schemas.microsoft.com/office/drawing/2014/chart" uri="{C3380CC4-5D6E-409C-BE32-E72D297353CC}">
+                <c16:uniqueId val="{00000001-08C4-42D1-9768-571182258F62}"/>
+              </c:ext>
+            </c:extLst>
           </c:dPt>
           <c:dPt>
             <c:idx val="1"/>
@@ -1231,6 +1191,11 @@
               </a:solidFill>
               <a:effectLst/>
             </c:spPr>
+            <c:extLst>
+              <c:ext xmlns:c16="http://schemas.microsoft.com/office/drawing/2014/chart" uri="{C3380CC4-5D6E-409C-BE32-E72D297353CC}">
+                <c16:uniqueId val="{00000003-08C4-42D1-9768-571182258F62}"/>
+              </c:ext>
+            </c:extLst>
           </c:dPt>
           <c:dPt>
             <c:idx val="2"/>
@@ -1242,25 +1207,65 @@
               </a:solidFill>
               <a:effectLst/>
             </c:spPr>
+            <c:extLst>
+              <c:ext xmlns:c16="http://schemas.microsoft.com/office/drawing/2014/chart" uri="{C3380CC4-5D6E-409C-BE32-E72D297353CC}">
+                <c16:uniqueId val="{00000005-08C4-42D1-9768-571182258F62}"/>
+              </c:ext>
+            </c:extLst>
           </c:dPt>
+          <c:dLbls>
+            <c:numFmt formatCode="#,##0" sourceLinked="0"/>
+            <c:spPr>
+              <a:noFill/>
+              <a:ln>
+                <a:noFill/>
+              </a:ln>
+              <a:effectLst/>
+            </c:spPr>
+            <c:txPr>
+              <a:bodyPr/>
+              <a:lstStyle/>
+              <a:p>
+                <a:pPr>
+                  <a:defRPr sz="900" b="0" i="0" u="none" strike="noStrike">
+                    <a:solidFill>
+                      <a:srgbClr val="0F172A"/>
+                    </a:solidFill>
+                    <a:latin typeface="Arial"/>
+                  </a:defRPr>
+                </a:pPr>
+                <a:endParaRPr lang="en-US"/>
+              </a:p>
+            </c:txPr>
+            <c:showLegendKey val="0"/>
+            <c:showVal val="1"/>
+            <c:showCatName val="0"/>
+            <c:showSerName val="0"/>
+            <c:showPercent val="0"/>
+            <c:showBubbleSize val="0"/>
+            <c:showLeaderLines val="0"/>
+            <c:extLst>
+              <c:ext xmlns:c15="http://schemas.microsoft.com/office/drawing/2012/chart" uri="{CE6537A1-D6FC-4f65-9D91-7224C49458BB}">
+                <c15:showLeaderLines val="0"/>
+              </c:ext>
+            </c:extLst>
+          </c:dLbls>
           <c:cat>
-            <c:multiLvlStrRef>
+            <c:strRef>
               <c:f>Sheet1!$A$2:$A$4</c:f>
-              <c:multiLvlStrCache>
+              <c:strCache>
                 <c:ptCount val="3"/>
-                <c:lvl>
-                  <c:pt idx="0">
-                    <c:v>2 Blocks</c:v>
-                  </c:pt>
-                  <c:pt idx="1">
-                    <c:v>4 Blocks</c:v>
-                  </c:pt>
-                  <c:pt idx="2">
-                    <c:v>6 Blocks</c:v>
-                  </c:pt>
-                </c:lvl>
-              </c:multiLvlStrCache>
-            </c:multiLvlStrRef>
+                <c:pt idx="0">
+                  <c:v>2 Blocks</c:v>
+                </c:pt>
+                <c:pt idx="1">
+                  <c:v>4 Blocks</c:v>
+                </c:pt>
+                <c:pt idx="2">
+                  <c:v>6 Blocks</c:v>
+                </c:pt>
+              </c:strCache>
+            </c:strRef>
           </c:cat>
           <c:val>
             <c:numRef>
@@ -1280,36 +1285,23 @@
               </c:numCache>
             </c:numRef>
           </c:val>
+          <c:extLst>
+            <c:ext xmlns:c16="http://schemas.microsoft.com/office/drawing/2014/chart" uri="{C3380CC4-5D6E-409C-BE32-E72D297353CC}">
+              <c16:uniqueId val="{00000006-08C4-42D1-9768-571182258F62}"/>
+            </c:ext>
+          </c:extLst>
         </c:ser>
         <c:dLbls>
-          <c:numFmt formatCode="#,##0" sourceLinked="0"/>
-          <c:txPr>
-            <a:bodyPr/>
-            <a:lstStyle/>
-            <a:p>
-              <a:pPr>
-                <a:defRPr b="0" i="0" strike="noStrike" sz="900" u="none">
-                  <a:solidFill>
-                    <a:srgbClr val="0F172A"/>
-                  </a:solidFill>
-                  <a:latin typeface="Arial"/>
-                </a:defRPr>
-              </a:pPr>
-            </a:p>
-          </c:txPr>
           <c:showLegendKey val="0"/>
           <c:showVal val="1"/>
           <c:showCatName val="0"/>
           <c:showSerName val="0"/>
           <c:showPercent val="0"/>
           <c:showBubbleSize val="0"/>
-          <c:showLeaderLines val="0"/>
         </c:dLbls>
         <c:gapWidth val="150"/>
-        <c:overlap val="0"/>
         <c:axId val="2094734554"/>
         <c:axId val="2094734552"/>
-        <c:axId val="2094734556"/>
       </c:barChart>
       <c:catAx>
         <c:axId val="2094734554"/>
@@ -1350,6 +1342,7 @@
         <c:crosses val="autoZero"/>
         <c:auto val="1"/>
         <c:lblAlgn val="ctr"/>
+        <c:lblOffset val="100"/>
         <c:noMultiLvlLbl val="1"/>
       </c:catAx>
       <c:valAx>
@@ -1414,6 +1407,7 @@
     </c:plotArea>
     <c:plotVisOnly val="1"/>
     <c:dispBlanksAs val="span"/>
+    <c:showDLblsOverMax val="1"/>
   </c:chart>
   <c:spPr>
     <a:solidFill>
@@ -1431,9 +1425,11 @@
 </file>
 
 <file path=ppt/charts/chart4.xml><?xml version="1.0" encoding="utf-8"?>
-<c:chartSpace xmlns:c="http://schemas.openxmlformats.org/drawingml/2006/chart" xmlns:a="http://schemas.openxmlformats.org/drawingml/2006/main" xmlns:r="http://schemas.openxmlformats.org/officeDocument/2006/relationships">
+<c:chartSpace xmlns:c="http://schemas.openxmlformats.org/drawingml/2006/chart" xmlns:a="http://schemas.openxmlformats.org/drawingml/2006/main" xmlns:r="http://schemas.openxmlformats.org/officeDocument/2006/relationships" xmlns:c16r2="http://schemas.microsoft.com/office/drawing/2015/06/chart">
   <c:date1904 val="0"/>
+  <c:lang val="en-US"/>
   <c:roundedCorners val="1"/>
+  <c:style val="2"/>
   <c:chart>
     <c:title>
       <c:tx>
@@ -1461,13 +1457,13 @@
           </a:p>
         </c:rich>
       </c:tx>
-      <c:layout/>
       <c:overlay val="0"/>
     </c:title>
     <c:autoTitleDeleted val="0"/>
     <c:plotArea>
       <c:layout/>
       <c:lineChart>
+        <c:grouping val="standard"/>
         <c:varyColors val="0"/>
         <c:ser>
           <c:idx val="0"/>
@@ -1484,9 +1480,6 @@
             </c:strRef>
           </c:tx>
           <c:spPr>
-            <a:solidFill>
-              <a:srgbClr val="7C3AED"/>
-            </a:solidFill>
             <a:ln w="38100" cap="flat">
               <a:solidFill>
                 <a:srgbClr val="7C3AED"/>
@@ -1496,21 +1489,45 @@
             </a:ln>
             <a:effectLst/>
           </c:spPr>
-          <c:invertIfNegative val="0"/>
+          <c:marker>
+            <c:symbol val="circle"/>
+            <c:size val="6"/>
+            <c:spPr>
+              <a:solidFill>
+                <a:srgbClr val="7C3AED"/>
+              </a:solidFill>
+              <a:ln w="9525" cap="flat">
+                <a:solidFill>
+                  <a:srgbClr val="7C3AED"/>
+                </a:solidFill>
+                <a:prstDash val="solid"/>
+                <a:round/>
+              </a:ln>
+              <a:effectLst/>
+            </c:spPr>
+          </c:marker>
           <c:dLbls>
             <c:numFmt formatCode="#,##0" sourceLinked="0"/>
+            <c:spPr>
+              <a:noFill/>
+              <a:ln>
+                <a:noFill/>
+              </a:ln>
+              <a:effectLst/>
+            </c:spPr>
             <c:txPr>
               <a:bodyPr/>
               <a:lstStyle/>
               <a:p>
                 <a:pPr>
-                  <a:defRPr b="0" i="0" strike="noStrike" sz="900" u="none">
+                  <a:defRPr sz="900" b="0" i="0" u="none" strike="noStrike">
                     <a:solidFill>
                       <a:srgbClr val="0F172A"/>
                     </a:solidFill>
                     <a:latin typeface="Arial"/>
                   </a:defRPr>
                 </a:pPr>
+                <a:endParaRPr lang="en-US"/>
               </a:p>
             </c:txPr>
             <c:showLegendKey val="0"/>
@@ -1520,48 +1537,34 @@
             <c:showPercent val="0"/>
             <c:showBubbleSize val="0"/>
             <c:showLeaderLines val="0"/>
+            <c:extLst>
+              <c:ext xmlns:c15="http://schemas.microsoft.com/office/drawing/2012/chart" uri="{CE6537A1-D6FC-4f65-9D91-7224C49458BB}">
+                <c15:showLeaderLines val="0"/>
+              </c:ext>
+            </c:extLst>
           </c:dLbls>
-          <c:marker>
-            <c:symbol val="circle"/>
-            <c:size val="6"/>
-            <c:spPr>
-              <a:solidFill>
-                <a:srgbClr val="7C3AED"/>
-              </a:solidFill>
-              <a:ln w="9525" cap="flat">
-                <a:solidFill>
-                  <a:srgbClr val="7C3AED"/>
-                </a:solidFill>
-                <a:prstDash val="solid"/>
-                <a:round/>
-              </a:ln>
-              <a:effectLst/>
-            </c:spPr>
-          </c:marker>
           <c:cat>
-            <c:multiLvlStrRef>
+            <c:strRef>
               <c:f>Sheet1!$A$2:$A$6</c:f>
-              <c:multiLvlStrCache>
+              <c:strCache>
                 <c:ptCount val="5"/>
-                <c:lvl>
-                  <c:pt idx="0">
-                    <c:v>1 block</c:v>
-                  </c:pt>
-                  <c:pt idx="1">
-                    <c:v>2 blocks</c:v>
-                  </c:pt>
-                  <c:pt idx="2">
-                    <c:v>3 blocks</c:v>
-                  </c:pt>
-                  <c:pt idx="3">
-                    <c:v>5 blocks</c:v>
-                  </c:pt>
-                  <c:pt idx="4">
-                    <c:v>6 blocks</c:v>
-                  </c:pt>
-                </c:lvl>
-              </c:multiLvlStrCache>
-            </c:multiLvlStrRef>
+                <c:pt idx="0">
+                  <c:v>1 block</c:v>
+                </c:pt>
+                <c:pt idx="1">
+                  <c:v>2 blocks</c:v>
+                </c:pt>
+                <c:pt idx="2">
+                  <c:v>3 blocks</c:v>
+                </c:pt>
+                <c:pt idx="3">
+                  <c:v>5 blocks</c:v>
+                </c:pt>
+                <c:pt idx="4">
+                  <c:v>6 blocks</c:v>
+                </c:pt>
+              </c:strCache>
+            </c:strRef>
           </c:cat>
           <c:val>
             <c:numRef>
@@ -1588,35 +1591,24 @@
             </c:numRef>
           </c:val>
           <c:smooth val="1"/>
+          <c:extLst>
+            <c:ext xmlns:c16="http://schemas.microsoft.com/office/drawing/2014/chart" uri="{C3380CC4-5D6E-409C-BE32-E72D297353CC}">
+              <c16:uniqueId val="{00000000-D0E9-41BD-9ECE-F56C01D01EC7}"/>
+            </c:ext>
+          </c:extLst>
         </c:ser>
         <c:dLbls>
-          <c:numFmt formatCode="#,##0" sourceLinked="0"/>
-          <c:txPr>
-            <a:bodyPr/>
-            <a:lstStyle/>
-            <a:p>
-              <a:pPr>
-                <a:defRPr b="0" i="0" strike="noStrike" sz="900" u="none">
-                  <a:solidFill>
-                    <a:srgbClr val="0F172A"/>
-                  </a:solidFill>
-                  <a:latin typeface="Arial"/>
-                </a:defRPr>
-              </a:pPr>
-            </a:p>
-          </c:txPr>
           <c:showLegendKey val="0"/>
           <c:showVal val="1"/>
           <c:showCatName val="0"/>
           <c:showSerName val="0"/>
           <c:showPercent val="0"/>
           <c:showBubbleSize val="0"/>
-          <c:showLeaderLines val="0"/>
         </c:dLbls>
         <c:marker val="1"/>
+        <c:smooth val="0"/>
         <c:axId val="2094734554"/>
         <c:axId val="2094734552"/>
-        <c:axId val="2094734556"/>
       </c:lineChart>
       <c:catAx>
         <c:axId val="2094734554"/>
@@ -1657,6 +1649,7 @@
         <c:crosses val="autoZero"/>
         <c:auto val="1"/>
         <c:lblAlgn val="ctr"/>
+        <c:lblOffset val="100"/>
         <c:noMultiLvlLbl val="1"/>
       </c:catAx>
       <c:valAx>
@@ -1721,6 +1714,7 @@
     </c:plotArea>
     <c:plotVisOnly val="1"/>
     <c:dispBlanksAs val="span"/>
+    <c:showDLblsOverMax val="1"/>
   </c:chart>
   <c:spPr>
     <a:solidFill>
@@ -1738,9 +1732,11 @@
 </file>
 
 <file path=ppt/charts/chart5.xml><?xml version="1.0" encoding="utf-8"?>
-<c:chartSpace xmlns:c="http://schemas.openxmlformats.org/drawingml/2006/chart" xmlns:a="http://schemas.openxmlformats.org/drawingml/2006/main" xmlns:r="http://schemas.openxmlformats.org/officeDocument/2006/relationships">
+<c:chartSpace xmlns:c="http://schemas.openxmlformats.org/drawingml/2006/chart" xmlns:a="http://schemas.openxmlformats.org/drawingml/2006/main" xmlns:r="http://schemas.openxmlformats.org/officeDocument/2006/relationships" xmlns:c16r2="http://schemas.microsoft.com/office/drawing/2015/06/chart">
   <c:date1904 val="0"/>
+  <c:lang val="en-US"/>
   <c:roundedCorners val="1"/>
+  <c:style val="2"/>
   <c:chart>
     <c:title>
       <c:tx>
@@ -1768,7 +1764,6 @@
           </a:p>
         </c:rich>
       </c:tx>
-      <c:layout/>
       <c:overlay val="0"/>
     </c:title>
     <c:autoTitleDeleted val="0"/>
@@ -1799,51 +1794,25 @@
             <a:effectLst/>
           </c:spPr>
           <c:invertIfNegative val="0"/>
-          <c:dLbls>
-            <c:numFmt formatCode="#,##0" sourceLinked="0"/>
-            <c:txPr>
-              <a:bodyPr/>
-              <a:lstStyle/>
-              <a:p>
-                <a:pPr>
-                  <a:defRPr b="0" i="0" strike="noStrike" sz="700" u="none">
-                    <a:solidFill>
-                      <a:srgbClr val="0F172A"/>
-                    </a:solidFill>
-                    <a:latin typeface="Arial"/>
-                  </a:defRPr>
-                </a:pPr>
-              </a:p>
-            </c:txPr>
-            <c:showLegendKey val="0"/>
-            <c:showVal val="1"/>
-            <c:showCatName val="0"/>
-            <c:showSerName val="0"/>
-            <c:showPercent val="0"/>
-            <c:showBubbleSize val="0"/>
-            <c:showLeaderLines val="0"/>
-          </c:dLbls>
           <c:dPt>
             <c:idx val="0"/>
             <c:invertIfNegative val="0"/>
             <c:bubble3D val="0"/>
-            <c:spPr>
-              <a:solidFill>
-                <a:srgbClr val="6D28D9"/>
-              </a:solidFill>
-              <a:effectLst/>
-            </c:spPr>
+            <c:extLst>
+              <c:ext xmlns:c16="http://schemas.microsoft.com/office/drawing/2014/chart" uri="{C3380CC4-5D6E-409C-BE32-E72D297353CC}">
+                <c16:uniqueId val="{00000001-5495-45B6-87F6-893166EACBD4}"/>
+              </c:ext>
+            </c:extLst>
           </c:dPt>
           <c:dPt>
             <c:idx val="1"/>
             <c:invertIfNegative val="0"/>
             <c:bubble3D val="0"/>
-            <c:spPr>
-              <a:solidFill>
-                <a:srgbClr val="6D28D9"/>
-              </a:solidFill>
-              <a:effectLst/>
-            </c:spPr>
+            <c:extLst>
+              <c:ext xmlns:c16="http://schemas.microsoft.com/office/drawing/2014/chart" uri="{C3380CC4-5D6E-409C-BE32-E72D297353CC}">
+                <c16:uniqueId val="{00000003-5495-45B6-87F6-893166EACBD4}"/>
+              </c:ext>
+            </c:extLst>
           </c:dPt>
           <c:dPt>
             <c:idx val="2"/>
@@ -1855,6 +1824,11 @@
               </a:solidFill>
               <a:effectLst/>
             </c:spPr>
+            <c:extLst>
+              <c:ext xmlns:c16="http://schemas.microsoft.com/office/drawing/2014/chart" uri="{C3380CC4-5D6E-409C-BE32-E72D297353CC}">
+                <c16:uniqueId val="{00000005-5495-45B6-87F6-893166EACBD4}"/>
+              </c:ext>
+            </c:extLst>
           </c:dPt>
           <c:dPt>
             <c:idx val="3"/>
@@ -1866,6 +1840,11 @@
               </a:solidFill>
               <a:effectLst/>
             </c:spPr>
+            <c:extLst>
+              <c:ext xmlns:c16="http://schemas.microsoft.com/office/drawing/2014/chart" uri="{C3380CC4-5D6E-409C-BE32-E72D297353CC}">
+                <c16:uniqueId val="{00000007-5495-45B6-87F6-893166EACBD4}"/>
+              </c:ext>
+            </c:extLst>
           </c:dPt>
           <c:dPt>
             <c:idx val="4"/>
@@ -1877,6 +1856,11 @@
               </a:solidFill>
               <a:effectLst/>
             </c:spPr>
+            <c:extLst>
+              <c:ext xmlns:c16="http://schemas.microsoft.com/office/drawing/2014/chart" uri="{C3380CC4-5D6E-409C-BE32-E72D297353CC}">
+                <c16:uniqueId val="{00000009-5495-45B6-87F6-893166EACBD4}"/>
+              </c:ext>
+            </c:extLst>
           </c:dPt>
           <c:dPt>
             <c:idx val="5"/>
@@ -1888,6 +1872,11 @@
               </a:solidFill>
               <a:effectLst/>
             </c:spPr>
+            <c:extLst>
+              <c:ext xmlns:c16="http://schemas.microsoft.com/office/drawing/2014/chart" uri="{C3380CC4-5D6E-409C-BE32-E72D297353CC}">
+                <c16:uniqueId val="{0000000B-5495-45B6-87F6-893166EACBD4}"/>
+              </c:ext>
+            </c:extLst>
           </c:dPt>
           <c:dPt>
             <c:idx val="6"/>
@@ -1899,6 +1888,11 @@
               </a:solidFill>
               <a:effectLst/>
             </c:spPr>
+            <c:extLst>
+              <c:ext xmlns:c16="http://schemas.microsoft.com/office/drawing/2014/chart" uri="{C3380CC4-5D6E-409C-BE32-E72D297353CC}">
+                <c16:uniqueId val="{0000000D-5495-45B6-87F6-893166EACBD4}"/>
+              </c:ext>
+            </c:extLst>
           </c:dPt>
           <c:dPt>
             <c:idx val="7"/>
@@ -1910,6 +1904,11 @@
               </a:solidFill>
               <a:effectLst/>
             </c:spPr>
+            <c:extLst>
+              <c:ext xmlns:c16="http://schemas.microsoft.com/office/drawing/2014/chart" uri="{C3380CC4-5D6E-409C-BE32-E72D297353CC}">
+                <c16:uniqueId val="{0000000F-5495-45B6-87F6-893166EACBD4}"/>
+              </c:ext>
+            </c:extLst>
           </c:dPt>
           <c:dPt>
             <c:idx val="8"/>
@@ -1921,6 +1920,11 @@
               </a:solidFill>
               <a:effectLst/>
             </c:spPr>
+            <c:extLst>
+              <c:ext xmlns:c16="http://schemas.microsoft.com/office/drawing/2014/chart" uri="{C3380CC4-5D6E-409C-BE32-E72D297353CC}">
+                <c16:uniqueId val="{00000011-5495-45B6-87F6-893166EACBD4}"/>
+              </c:ext>
+            </c:extLst>
           </c:dPt>
           <c:dPt>
             <c:idx val="9"/>
@@ -1932,6 +1936,11 @@
               </a:solidFill>
               <a:effectLst/>
             </c:spPr>
+            <c:extLst>
+              <c:ext xmlns:c16="http://schemas.microsoft.com/office/drawing/2014/chart" uri="{C3380CC4-5D6E-409C-BE32-E72D297353CC}">
+                <c16:uniqueId val="{00000013-5495-45B6-87F6-893166EACBD4}"/>
+              </c:ext>
+            </c:extLst>
           </c:dPt>
           <c:dPt>
             <c:idx val="10"/>
@@ -1943,6 +1952,11 @@
               </a:solidFill>
               <a:effectLst/>
             </c:spPr>
+            <c:extLst>
+              <c:ext xmlns:c16="http://schemas.microsoft.com/office/drawing/2014/chart" uri="{C3380CC4-5D6E-409C-BE32-E72D297353CC}">
+                <c16:uniqueId val="{00000015-5495-45B6-87F6-893166EACBD4}"/>
+              </c:ext>
+            </c:extLst>
           </c:dPt>
           <c:dPt>
             <c:idx val="11"/>
@@ -1954,52 +1968,92 @@
               </a:solidFill>
               <a:effectLst/>
             </c:spPr>
+            <c:extLst>
+              <c:ext xmlns:c16="http://schemas.microsoft.com/office/drawing/2014/chart" uri="{C3380CC4-5D6E-409C-BE32-E72D297353CC}">
+                <c16:uniqueId val="{00000017-5495-45B6-87F6-893166EACBD4}"/>
+              </c:ext>
+            </c:extLst>
           </c:dPt>
+          <c:dLbls>
+            <c:numFmt formatCode="#,##0" sourceLinked="0"/>
+            <c:spPr>
+              <a:noFill/>
+              <a:ln>
+                <a:noFill/>
+              </a:ln>
+              <a:effectLst/>
+            </c:spPr>
+            <c:txPr>
+              <a:bodyPr/>
+              <a:lstStyle/>
+              <a:p>
+                <a:pPr>
+                  <a:defRPr sz="700" b="0" i="0" u="none" strike="noStrike">
+                    <a:solidFill>
+                      <a:srgbClr val="0F172A"/>
+                    </a:solidFill>
+                    <a:latin typeface="Arial"/>
+                  </a:defRPr>
+                </a:pPr>
+                <a:endParaRPr lang="en-US"/>
+              </a:p>
+            </c:txPr>
+            <c:showLegendKey val="0"/>
+            <c:showVal val="1"/>
+            <c:showCatName val="0"/>
+            <c:showSerName val="0"/>
+            <c:showPercent val="0"/>
+            <c:showBubbleSize val="0"/>
+            <c:showLeaderLines val="0"/>
+            <c:extLst>
+              <c:ext xmlns:c15="http://schemas.microsoft.com/office/drawing/2012/chart" uri="{CE6537A1-D6FC-4f65-9D91-7224C49458BB}">
+                <c15:showLeaderLines val="0"/>
+              </c:ext>
+            </c:extLst>
+          </c:dLbls>
           <c:cat>
-            <c:multiLvlStrRef>
+            <c:strRef>
               <c:f>Sheet1!$A$2:$A$13</c:f>
-              <c:multiLvlStrCache>
+              <c:strCache>
                 <c:ptCount val="12"/>
-                <c:lvl>
-                  <c:pt idx="0">
-                    <c:v>no_augs</c:v>
-                  </c:pt>
-                  <c:pt idx="1">
-                    <c:v>erasing+jitter+low</c:v>
-                  </c:pt>
-                  <c:pt idx="2">
-                    <c:v>mixup+cutmix</c:v>
-                  </c:pt>
-                  <c:pt idx="3">
-                    <c:v>jitter_only</c:v>
-                  </c:pt>
-                  <c:pt idx="4">
-                    <c:v>erasing+jitter+high</c:v>
-                  </c:pt>
-                  <c:pt idx="5">
-                    <c:v>basic_augs</c:v>
-                  </c:pt>
-                  <c:pt idx="6">
-                    <c:v>erasing_low_prob</c:v>
-                  </c:pt>
-                  <c:pt idx="7">
-                    <c:v>cutmix_moderate</c:v>
-                  </c:pt>
-                  <c:pt idx="8">
-                    <c:v>erasing_high_prob</c:v>
-                  </c:pt>
-                  <c:pt idx="9">
-                    <c:v>mixup_moderate</c:v>
-                  </c:pt>
-                  <c:pt idx="10">
-                    <c:v>cutmix_low</c:v>
-                  </c:pt>
-                  <c:pt idx="11">
-                    <c:v>mixup_low</c:v>
-                  </c:pt>
-                </c:lvl>
-              </c:multiLvlStrCache>
-            </c:multiLvlStrRef>
+                <c:pt idx="0">
+                  <c:v>no_augs</c:v>
+                </c:pt>
+                <c:pt idx="1">
+                  <c:v>erasing+jitter+low</c:v>
+                </c:pt>
+                <c:pt idx="2">
+                  <c:v>mixup+cutmix</c:v>
+                </c:pt>
+                <c:pt idx="3">
+                  <c:v>jitter_only</c:v>
+                </c:pt>
+                <c:pt idx="4">
+                  <c:v>erasing+jitter+high</c:v>
+                </c:pt>
+                <c:pt idx="5">
+                  <c:v>basic_augs</c:v>
+                </c:pt>
+                <c:pt idx="6">
+                  <c:v>erasing_low_prob</c:v>
+                </c:pt>
+                <c:pt idx="7">
+                  <c:v>cutmix_moderate</c:v>
+                </c:pt>
+                <c:pt idx="8">
+                  <c:v>erasing_high_prob</c:v>
+                </c:pt>
+                <c:pt idx="9">
+                  <c:v>mixup_moderate</c:v>
+                </c:pt>
+                <c:pt idx="10">
+                  <c:v>cutmix_low</c:v>
+                </c:pt>
+                <c:pt idx="11">
+                  <c:v>mixup_low</c:v>
+                </c:pt>
+              </c:strCache>
+            </c:strRef>
           </c:cat>
           <c:val>
             <c:numRef>
@@ -2046,36 +2100,23 @@
               </c:numCache>
             </c:numRef>
           </c:val>
+          <c:extLst>
+            <c:ext xmlns:c16="http://schemas.microsoft.com/office/drawing/2014/chart" uri="{C3380CC4-5D6E-409C-BE32-E72D297353CC}">
+              <c16:uniqueId val="{00000018-5495-45B6-87F6-893166EACBD4}"/>
+            </c:ext>
+          </c:extLst>
         </c:ser>
         <c:dLbls>
-          <c:numFmt formatCode="#,##0" sourceLinked="0"/>
-          <c:txPr>
-            <a:bodyPr/>
-            <a:lstStyle/>
-            <a:p>
-              <a:pPr>
-                <a:defRPr b="0" i="0" strike="noStrike" sz="700" u="none">
-                  <a:solidFill>
-                    <a:srgbClr val="0F172A"/>
-                  </a:solidFill>
-                  <a:latin typeface="Arial"/>
-                </a:defRPr>
-              </a:pPr>
-            </a:p>
-          </c:txPr>
           <c:showLegendKey val="0"/>
           <c:showVal val="1"/>
           <c:showCatName val="0"/>
           <c:showSerName val="0"/>
           <c:showPercent val="0"/>
           <c:showBubbleSize val="0"/>
-          <c:showLeaderLines val="0"/>
         </c:dLbls>
         <c:gapWidth val="150"/>
-        <c:overlap val="0"/>
         <c:axId val="2094734554"/>
         <c:axId val="2094734552"/>
-        <c:axId val="2094734556"/>
       </c:barChart>
       <c:catAx>
         <c:axId val="2094734554"/>
@@ -2116,6 +2157,7 @@
         <c:crosses val="autoZero"/>
         <c:auto val="1"/>
         <c:lblAlgn val="ctr"/>
+        <c:lblOffset val="100"/>
         <c:noMultiLvlLbl val="1"/>
       </c:catAx>
       <c:valAx>
@@ -2180,6 +2222,7 @@
     </c:plotArea>
     <c:plotVisOnly val="1"/>
     <c:dispBlanksAs val="span"/>
+    <c:showDLblsOverMax val="1"/>
   </c:chart>
   <c:spPr>
     <a:solidFill>
@@ -2197,9 +2240,11 @@
 </file>
 
 <file path=ppt/charts/chart6.xml><?xml version="1.0" encoding="utf-8"?>
-<c:chartSpace xmlns:c="http://schemas.openxmlformats.org/drawingml/2006/chart" xmlns:a="http://schemas.openxmlformats.org/drawingml/2006/main" xmlns:r="http://schemas.openxmlformats.org/officeDocument/2006/relationships">
+<c:chartSpace xmlns:c="http://schemas.openxmlformats.org/drawingml/2006/chart" xmlns:a="http://schemas.openxmlformats.org/drawingml/2006/main" xmlns:r="http://schemas.openxmlformats.org/officeDocument/2006/relationships" xmlns:c16r2="http://schemas.microsoft.com/office/drawing/2015/06/chart">
   <c:date1904 val="0"/>
+  <c:lang val="en-US"/>
   <c:roundedCorners val="1"/>
+  <c:style val="2"/>
   <c:chart>
     <c:autoTitleDeleted val="1"/>
     <c:plotArea>
@@ -2231,18 +2276,26 @@
           <c:invertIfNegative val="0"/>
           <c:dLbls>
             <c:numFmt formatCode="#,##0" sourceLinked="0"/>
+            <c:spPr>
+              <a:noFill/>
+              <a:ln>
+                <a:noFill/>
+              </a:ln>
+              <a:effectLst/>
+            </c:spPr>
             <c:txPr>
               <a:bodyPr/>
               <a:lstStyle/>
               <a:p>
                 <a:pPr>
-                  <a:defRPr b="0" i="0" strike="noStrike" sz="800" u="none">
+                  <a:defRPr sz="800" b="0" i="0" u="none" strike="noStrike">
                     <a:solidFill>
                       <a:srgbClr val="0F172A"/>
                     </a:solidFill>
                     <a:latin typeface="Arial"/>
                   </a:defRPr>
                 </a:pPr>
+                <a:endParaRPr lang="en-US"/>
               </a:p>
             </c:txPr>
             <c:showLegendKey val="0"/>
@@ -2252,43 +2305,46 @@
             <c:showPercent val="0"/>
             <c:showBubbleSize val="0"/>
             <c:showLeaderLines val="0"/>
+            <c:extLst>
+              <c:ext xmlns:c15="http://schemas.microsoft.com/office/drawing/2012/chart" uri="{CE6537A1-D6FC-4f65-9D91-7224C49458BB}">
+                <c15:showLeaderLines val="0"/>
+              </c:ext>
+            </c:extLst>
           </c:dLbls>
           <c:cat>
-            <c:multiLvlStrRef>
+            <c:strRef>
               <c:f>Sheet1!$A$2:$A$10</c:f>
-              <c:multiLvlStrCache>
+              <c:strCache>
                 <c:ptCount val="9"/>
-                <c:lvl>
-                  <c:pt idx="0">
-                    <c:v>Linear Probe</c:v>
-                  </c:pt>
-                  <c:pt idx="1">
-                    <c:v>Sim Unfreeze (L=2)</c:v>
-                  </c:pt>
-                  <c:pt idx="2">
-                    <c:v>Sim Unfreeze (L=4)</c:v>
-                  </c:pt>
-                  <c:pt idx="3">
-                    <c:v>Sim Unfreeze (L=6)</c:v>
-                  </c:pt>
-                  <c:pt idx="4">
-                    <c:v>Gradual (1 blk)</c:v>
-                  </c:pt>
-                  <c:pt idx="5">
-                    <c:v>Gradual (2 blk)</c:v>
-                  </c:pt>
-                  <c:pt idx="6">
-                    <c:v>Gradual (3 blk)</c:v>
-                  </c:pt>
-                  <c:pt idx="7">
-                    <c:v>Gradual (5 blk)</c:v>
-                  </c:pt>
-                  <c:pt idx="8">
-                    <c:v>Gradual (6 blk)</c:v>
-                  </c:pt>
-                </c:lvl>
-              </c:multiLvlStrCache>
-            </c:multiLvlStrRef>
+                <c:pt idx="0">
+                  <c:v>Linear Probe</c:v>
+                </c:pt>
+                <c:pt idx="1">
+                  <c:v>Sim Unfreeze (L=2)</c:v>
+                </c:pt>
+                <c:pt idx="2">
+                  <c:v>Sim Unfreeze (L=4)</c:v>
+                </c:pt>
+                <c:pt idx="3">
+                  <c:v>Sim Unfreeze (L=6)</c:v>
+                </c:pt>
+                <c:pt idx="4">
+                  <c:v>Gradual (1 blk)</c:v>
+                </c:pt>
+                <c:pt idx="5">
+                  <c:v>Gradual (2 blk)</c:v>
+                </c:pt>
+                <c:pt idx="6">
+                  <c:v>Gradual (3 blk)</c:v>
+                </c:pt>
+                <c:pt idx="7">
+                  <c:v>Gradual (5 blk)</c:v>
+                </c:pt>
+                <c:pt idx="8">
+                  <c:v>Gradual (6 blk)</c:v>
+                </c:pt>
+              </c:strCache>
+            </c:strRef>
           </c:cat>
           <c:val>
             <c:numRef>
@@ -2326,6 +2382,11 @@
               </c:numCache>
             </c:numRef>
           </c:val>
+          <c:extLst>
+            <c:ext xmlns:c16="http://schemas.microsoft.com/office/drawing/2014/chart" uri="{C3380CC4-5D6E-409C-BE32-E72D297353CC}">
+              <c16:uniqueId val="{00000000-3B8E-4891-BBB7-43CC79B903DF}"/>
+            </c:ext>
+          </c:extLst>
         </c:ser>
         <c:ser>
           <c:idx val="1"/>
@@ -2350,18 +2411,26 @@
           <c:invertIfNegative val="0"/>
           <c:dLbls>
             <c:numFmt formatCode="#,##0" sourceLinked="0"/>
+            <c:spPr>
+              <a:noFill/>
+              <a:ln>
+                <a:noFill/>
+              </a:ln>
+              <a:effectLst/>
+            </c:spPr>
             <c:txPr>
               <a:bodyPr/>
               <a:lstStyle/>
               <a:p>
                 <a:pPr>
-                  <a:defRPr b="0" i="0" strike="noStrike" sz="800" u="none">
+                  <a:defRPr sz="800" b="0" i="0" u="none" strike="noStrike">
                     <a:solidFill>
                       <a:srgbClr val="0F172A"/>
                     </a:solidFill>
                     <a:latin typeface="Arial"/>
                   </a:defRPr>
                 </a:pPr>
+                <a:endParaRPr lang="en-US"/>
               </a:p>
             </c:txPr>
             <c:showLegendKey val="0"/>
@@ -2371,43 +2440,46 @@
             <c:showPercent val="0"/>
             <c:showBubbleSize val="0"/>
             <c:showLeaderLines val="0"/>
+            <c:extLst>
+              <c:ext xmlns:c15="http://schemas.microsoft.com/office/drawing/2012/chart" uri="{CE6537A1-D6FC-4f65-9D91-7224C49458BB}">
+                <c15:showLeaderLines val="0"/>
+              </c:ext>
+            </c:extLst>
           </c:dLbls>
           <c:cat>
-            <c:multiLvlStrRef>
+            <c:strRef>
               <c:f>Sheet1!$A$2:$A$10</c:f>
-              <c:multiLvlStrCache>
+              <c:strCache>
                 <c:ptCount val="9"/>
-                <c:lvl>
-                  <c:pt idx="0">
-                    <c:v>Linear Probe</c:v>
-                  </c:pt>
-                  <c:pt idx="1">
-                    <c:v>Sim Unfreeze (L=2)</c:v>
-                  </c:pt>
-                  <c:pt idx="2">
-                    <c:v>Sim Unfreeze (L=4)</c:v>
-                  </c:pt>
-                  <c:pt idx="3">
-                    <c:v>Sim Unfreeze (L=6)</c:v>
-                  </c:pt>
-                  <c:pt idx="4">
-                    <c:v>Gradual (1 blk)</c:v>
-                  </c:pt>
-                  <c:pt idx="5">
-                    <c:v>Gradual (2 blk)</c:v>
-                  </c:pt>
-                  <c:pt idx="6">
-                    <c:v>Gradual (3 blk)</c:v>
-                  </c:pt>
-                  <c:pt idx="7">
-                    <c:v>Gradual (5 blk)</c:v>
-                  </c:pt>
-                  <c:pt idx="8">
-                    <c:v>Gradual (6 blk)</c:v>
-                  </c:pt>
-                </c:lvl>
-              </c:multiLvlStrCache>
-            </c:multiLvlStrRef>
+                <c:pt idx="0">
+                  <c:v>Linear Probe</c:v>
+                </c:pt>
+                <c:pt idx="1">
+                  <c:v>Sim Unfreeze (L=2)</c:v>
+                </c:pt>
+                <c:pt idx="2">
+                  <c:v>Sim Unfreeze (L=4)</c:v>
+                </c:pt>
+                <c:pt idx="3">
+                  <c:v>Sim Unfreeze (L=6)</c:v>
+                </c:pt>
+                <c:pt idx="4">
+                  <c:v>Gradual (1 blk)</c:v>
+                </c:pt>
+                <c:pt idx="5">
+                  <c:v>Gradual (2 blk)</c:v>
+                </c:pt>
+                <c:pt idx="6">
+                  <c:v>Gradual (3 blk)</c:v>
+                </c:pt>
+                <c:pt idx="7">
+                  <c:v>Gradual (5 blk)</c:v>
+                </c:pt>
+                <c:pt idx="8">
+                  <c:v>Gradual (6 blk)</c:v>
+                </c:pt>
+              </c:strCache>
+            </c:strRef>
           </c:cat>
           <c:val>
             <c:numRef>
@@ -2445,36 +2517,23 @@
               </c:numCache>
             </c:numRef>
           </c:val>
+          <c:extLst>
+            <c:ext xmlns:c16="http://schemas.microsoft.com/office/drawing/2014/chart" uri="{C3380CC4-5D6E-409C-BE32-E72D297353CC}">
+              <c16:uniqueId val="{00000001-3B8E-4891-BBB7-43CC79B903DF}"/>
+            </c:ext>
+          </c:extLst>
         </c:ser>
         <c:dLbls>
-          <c:numFmt formatCode="#,##0" sourceLinked="0"/>
-          <c:txPr>
-            <a:bodyPr/>
-            <a:lstStyle/>
-            <a:p>
-              <a:pPr>
-                <a:defRPr b="0" i="0" strike="noStrike" sz="800" u="none">
-                  <a:solidFill>
-                    <a:srgbClr val="0F172A"/>
-                  </a:solidFill>
-                  <a:latin typeface="Arial"/>
-                </a:defRPr>
-              </a:pPr>
-            </a:p>
-          </c:txPr>
           <c:showLegendKey val="0"/>
           <c:showVal val="1"/>
           <c:showCatName val="0"/>
           <c:showSerName val="0"/>
           <c:showPercent val="0"/>
           <c:showBubbleSize val="0"/>
-          <c:showLeaderLines val="0"/>
         </c:dLbls>
         <c:gapWidth val="150"/>
-        <c:overlap val="0"/>
         <c:axId val="2094734554"/>
         <c:axId val="2094734552"/>
-        <c:axId val="2094734556"/>
       </c:barChart>
       <c:catAx>
         <c:axId val="2094734554"/>
@@ -2515,6 +2574,7 @@
         <c:crosses val="autoZero"/>
         <c:auto val="1"/>
         <c:lblAlgn val="ctr"/>
+        <c:lblOffset val="100"/>
         <c:noMultiLvlLbl val="1"/>
       </c:catAx>
       <c:valAx>
@@ -2583,6 +2643,7 @@
     </c:legend>
     <c:plotVisOnly val="1"/>
     <c:dispBlanksAs val="span"/>
+    <c:showDLblsOverMax val="1"/>
   </c:chart>
   <c:spPr>
     <a:solidFill>
@@ -2600,9 +2661,11 @@
 </file>
 
 <file path=ppt/charts/chart7.xml><?xml version="1.0" encoding="utf-8"?>
-<c:chartSpace xmlns:c="http://schemas.openxmlformats.org/drawingml/2006/chart" xmlns:a="http://schemas.openxmlformats.org/drawingml/2006/main" xmlns:r="http://schemas.openxmlformats.org/officeDocument/2006/relationships">
+<c:chartSpace xmlns:c="http://schemas.openxmlformats.org/drawingml/2006/chart" xmlns:a="http://schemas.openxmlformats.org/drawingml/2006/main" xmlns:r="http://schemas.openxmlformats.org/officeDocument/2006/relationships" xmlns:c16r2="http://schemas.microsoft.com/office/drawing/2015/06/chart">
   <c:date1904 val="0"/>
+  <c:lang val="en-US"/>
   <c:roundedCorners val="1"/>
+  <c:style val="2"/>
   <c:chart>
     <c:title>
       <c:tx>
@@ -2630,13 +2693,13 @@
           </a:p>
         </c:rich>
       </c:tx>
-      <c:layout/>
       <c:overlay val="0"/>
     </c:title>
     <c:autoTitleDeleted val="0"/>
     <c:plotArea>
       <c:layout/>
       <c:lineChart>
+        <c:grouping val="standard"/>
         <c:varyColors val="0"/>
         <c:ser>
           <c:idx val="0"/>
@@ -2653,9 +2716,6 @@
             </c:strRef>
           </c:tx>
           <c:spPr>
-            <a:solidFill>
-              <a:srgbClr val="2563EB"/>
-            </a:solidFill>
             <a:ln w="31750" cap="flat">
               <a:solidFill>
                 <a:srgbClr val="2563EB"/>
@@ -2665,31 +2725,6 @@
             </a:ln>
             <a:effectLst/>
           </c:spPr>
-          <c:invertIfNegative val="0"/>
-          <c:dLbls>
-            <c:numFmt formatCode="#,##0" sourceLinked="0"/>
-            <c:txPr>
-              <a:bodyPr/>
-              <a:lstStyle/>
-              <a:p>
-                <a:pPr>
-                  <a:defRPr b="0" i="0" strike="noStrike" sz="1200" u="none">
-                    <a:solidFill>
-                      <a:srgbClr val="000000"/>
-                    </a:solidFill>
-                    <a:latin typeface="Arial"/>
-                  </a:defRPr>
-                </a:pPr>
-              </a:p>
-            </c:txPr>
-            <c:showLegendKey val="0"/>
-            <c:showVal val="0"/>
-            <c:showCatName val="0"/>
-            <c:showSerName val="0"/>
-            <c:showPercent val="0"/>
-            <c:showBubbleSize val="0"/>
-            <c:showLeaderLines val="0"/>
-          </c:dLbls>
           <c:marker>
             <c:symbol val="circle"/>
             <c:size val="6"/>
@@ -2708,50 +2743,48 @@
             </c:spPr>
           </c:marker>
           <c:cat>
-            <c:multiLvlStrRef>
+            <c:strRef>
               <c:f>Sheet1!$A$2:$A$13</c:f>
-              <c:multiLvlStrCache>
+              <c:strCache>
                 <c:ptCount val="12"/>
-                <c:lvl>
-                  <c:pt idx="0">
-                    <c:v>No Aug</c:v>
-                  </c:pt>
-                  <c:pt idx="1">
-                    <c:v>Basic</c:v>
-                  </c:pt>
-                  <c:pt idx="2">
-                    <c:v>Erasing Low</c:v>
-                  </c:pt>
-                  <c:pt idx="3">
-                    <c:v>Erasing High</c:v>
-                  </c:pt>
-                  <c:pt idx="4">
-                    <c:v>Jitter Only</c:v>
-                  </c:pt>
-                  <c:pt idx="5">
-                    <c:v>MixUp Low</c:v>
-                  </c:pt>
-                  <c:pt idx="6">
-                    <c:v>MixUp Mod</c:v>
-                  </c:pt>
-                  <c:pt idx="7">
-                    <c:v>CutMix Low</c:v>
-                  </c:pt>
-                  <c:pt idx="8">
-                    <c:v>CutMix Mod</c:v>
-                  </c:pt>
-                  <c:pt idx="9">
-                    <c:v>Mix+Cut</c:v>
-                  </c:pt>
-                  <c:pt idx="10">
-                    <c:v>Full (low)</c:v>
-                  </c:pt>
-                  <c:pt idx="11">
-                    <c:v>Full (high)</c:v>
-                  </c:pt>
-                </c:lvl>
-              </c:multiLvlStrCache>
-            </c:multiLvlStrRef>
+                <c:pt idx="0">
+                  <c:v>No Aug</c:v>
+                </c:pt>
+                <c:pt idx="1">
+                  <c:v>Basic</c:v>
+                </c:pt>
+                <c:pt idx="2">
+                  <c:v>Erasing Low</c:v>
+                </c:pt>
+                <c:pt idx="3">
+                  <c:v>Erasing High</c:v>
+                </c:pt>
+                <c:pt idx="4">
+                  <c:v>Jitter Only</c:v>
+                </c:pt>
+                <c:pt idx="5">
+                  <c:v>MixUp Low</c:v>
+                </c:pt>
+                <c:pt idx="6">
+                  <c:v>MixUp Mod</c:v>
+                </c:pt>
+                <c:pt idx="7">
+                  <c:v>CutMix Low</c:v>
+                </c:pt>
+                <c:pt idx="8">
+                  <c:v>CutMix Mod</c:v>
+                </c:pt>
+                <c:pt idx="9">
+                  <c:v>Mix+Cut</c:v>
+                </c:pt>
+                <c:pt idx="10">
+                  <c:v>Full (low)</c:v>
+                </c:pt>
+                <c:pt idx="11">
+                  <c:v>Full (high)</c:v>
+                </c:pt>
+              </c:strCache>
+            </c:strRef>
           </c:cat>
           <c:val>
             <c:numRef>
@@ -2799,6 +2832,11 @@
             </c:numRef>
           </c:val>
           <c:smooth val="1"/>
+          <c:extLst>
+            <c:ext xmlns:c16="http://schemas.microsoft.com/office/drawing/2014/chart" uri="{C3380CC4-5D6E-409C-BE32-E72D297353CC}">
+              <c16:uniqueId val="{00000000-D86B-4E45-A131-C3EAE2E2CC2D}"/>
+            </c:ext>
+          </c:extLst>
         </c:ser>
         <c:ser>
           <c:idx val="1"/>
@@ -2815,9 +2853,6 @@
             </c:strRef>
           </c:tx>
           <c:spPr>
-            <a:solidFill>
-              <a:srgbClr val="0D9488"/>
-            </a:solidFill>
             <a:ln w="31750" cap="flat">
               <a:solidFill>
                 <a:srgbClr val="0D9488"/>
@@ -2827,31 +2862,6 @@
             </a:ln>
             <a:effectLst/>
           </c:spPr>
-          <c:invertIfNegative val="0"/>
-          <c:dLbls>
-            <c:numFmt formatCode="#,##0" sourceLinked="0"/>
-            <c:txPr>
-              <a:bodyPr/>
-              <a:lstStyle/>
-              <a:p>
-                <a:pPr>
-                  <a:defRPr b="0" i="0" strike="noStrike" sz="1200" u="none">
-                    <a:solidFill>
-                      <a:srgbClr val="000000"/>
-                    </a:solidFill>
-                    <a:latin typeface="Arial"/>
-                  </a:defRPr>
-                </a:pPr>
-              </a:p>
-            </c:txPr>
-            <c:showLegendKey val="0"/>
-            <c:showVal val="0"/>
-            <c:showCatName val="0"/>
-            <c:showSerName val="0"/>
-            <c:showPercent val="0"/>
-            <c:showBubbleSize val="0"/>
-            <c:showLeaderLines val="0"/>
-          </c:dLbls>
           <c:marker>
             <c:symbol val="circle"/>
             <c:size val="6"/>
@@ -2870,50 +2880,48 @@
             </c:spPr>
           </c:marker>
           <c:cat>
-            <c:multiLvlStrRef>
+            <c:strRef>
               <c:f>Sheet1!$A$2:$A$13</c:f>
-              <c:multiLvlStrCache>
+              <c:strCache>
                 <c:ptCount val="12"/>
-                <c:lvl>
-                  <c:pt idx="0">
-                    <c:v>No Aug</c:v>
-                  </c:pt>
-                  <c:pt idx="1">
-                    <c:v>Basic</c:v>
-                  </c:pt>
-                  <c:pt idx="2">
-                    <c:v>Erasing Low</c:v>
-                  </c:pt>
-                  <c:pt idx="3">
-                    <c:v>Erasing High</c:v>
-                  </c:pt>
-                  <c:pt idx="4">
-                    <c:v>Jitter Only</c:v>
-                  </c:pt>
-                  <c:pt idx="5">
-                    <c:v>MixUp Low</c:v>
-                  </c:pt>
-                  <c:pt idx="6">
-                    <c:v>MixUp Mod</c:v>
-                  </c:pt>
-                  <c:pt idx="7">
-                    <c:v>CutMix Low</c:v>
-                  </c:pt>
-                  <c:pt idx="8">
-                    <c:v>CutMix Mod</c:v>
-                  </c:pt>
-                  <c:pt idx="9">
-                    <c:v>Mix+Cut</c:v>
-                  </c:pt>
-                  <c:pt idx="10">
-                    <c:v>Full (low)</c:v>
-                  </c:pt>
-                  <c:pt idx="11">
-                    <c:v>Full (high)</c:v>
-                  </c:pt>
-                </c:lvl>
-              </c:multiLvlStrCache>
-            </c:multiLvlStrRef>
+                <c:pt idx="0">
+                  <c:v>No Aug</c:v>
+                </c:pt>
+                <c:pt idx="1">
+                  <c:v>Basic</c:v>
+                </c:pt>
+                <c:pt idx="2">
+                  <c:v>Erasing Low</c:v>
+                </c:pt>
+                <c:pt idx="3">
+                  <c:v>Erasing High</c:v>
+                </c:pt>
+                <c:pt idx="4">
+                  <c:v>Jitter Only</c:v>
+                </c:pt>
+                <c:pt idx="5">
+                  <c:v>MixUp Low</c:v>
+                </c:pt>
+                <c:pt idx="6">
+                  <c:v>MixUp Mod</c:v>
+                </c:pt>
+                <c:pt idx="7">
+                  <c:v>CutMix Low</c:v>
+                </c:pt>
+                <c:pt idx="8">
+                  <c:v>CutMix Mod</c:v>
+                </c:pt>
+                <c:pt idx="9">
+                  <c:v>Mix+Cut</c:v>
+                </c:pt>
+                <c:pt idx="10">
+                  <c:v>Full (low)</c:v>
+                </c:pt>
+                <c:pt idx="11">
+                  <c:v>Full (high)</c:v>
+                </c:pt>
+              </c:strCache>
+            </c:strRef>
           </c:cat>
           <c:val>
             <c:numRef>
@@ -2961,6 +2969,11 @@
             </c:numRef>
           </c:val>
           <c:smooth val="1"/>
+          <c:extLst>
+            <c:ext xmlns:c16="http://schemas.microsoft.com/office/drawing/2014/chart" uri="{C3380CC4-5D6E-409C-BE32-E72D297353CC}">
+              <c16:uniqueId val="{00000001-D86B-4E45-A131-C3EAE2E2CC2D}"/>
+            </c:ext>
+          </c:extLst>
         </c:ser>
         <c:ser>
           <c:idx val="2"/>
@@ -2977,9 +2990,6 @@
             </c:strRef>
           </c:tx>
           <c:spPr>
-            <a:solidFill>
-              <a:srgbClr val="7C3AED"/>
-            </a:solidFill>
             <a:ln w="31750" cap="flat">
               <a:solidFill>
                 <a:srgbClr val="7C3AED"/>
@@ -2989,31 +2999,6 @@
             </a:ln>
             <a:effectLst/>
           </c:spPr>
-          <c:invertIfNegative val="0"/>
-          <c:dLbls>
-            <c:numFmt formatCode="#,##0" sourceLinked="0"/>
-            <c:txPr>
-              <a:bodyPr/>
-              <a:lstStyle/>
-              <a:p>
-                <a:pPr>
-                  <a:defRPr b="0" i="0" strike="noStrike" sz="1200" u="none">
-                    <a:solidFill>
-                      <a:srgbClr val="000000"/>
-                    </a:solidFill>
-                    <a:latin typeface="Arial"/>
-                  </a:defRPr>
-                </a:pPr>
-              </a:p>
-            </c:txPr>
-            <c:showLegendKey val="0"/>
-            <c:showVal val="0"/>
-            <c:showCatName val="0"/>
-            <c:showSerName val="0"/>
-            <c:showPercent val="0"/>
-            <c:showBubbleSize val="0"/>
-            <c:showLeaderLines val="0"/>
-          </c:dLbls>
           <c:marker>
             <c:symbol val="circle"/>
             <c:size val="6"/>
@@ -3032,50 +3017,48 @@
             </c:spPr>
           </c:marker>
           <c:cat>
-            <c:multiLvlStrRef>
+            <c:strRef>
               <c:f>Sheet1!$A$2:$A$13</c:f>
-              <c:multiLvlStrCache>
+              <c:strCache>
                 <c:ptCount val="12"/>
-                <c:lvl>
-                  <c:pt idx="0">
-                    <c:v>No Aug</c:v>
-                  </c:pt>
-                  <c:pt idx="1">
-                    <c:v>Basic</c:v>
-                  </c:pt>
-                  <c:pt idx="2">
-                    <c:v>Erasing Low</c:v>
-                  </c:pt>
-                  <c:pt idx="3">
-                    <c:v>Erasing High</c:v>
-                  </c:pt>
-                  <c:pt idx="4">
-                    <c:v>Jitter Only</c:v>
-                  </c:pt>
-                  <c:pt idx="5">
-                    <c:v>MixUp Low</c:v>
-                  </c:pt>
-                  <c:pt idx="6">
-                    <c:v>MixUp Mod</c:v>
-                  </c:pt>
-                  <c:pt idx="7">
-                    <c:v>CutMix Low</c:v>
-                  </c:pt>
-                  <c:pt idx="8">
-                    <c:v>CutMix Mod</c:v>
-                  </c:pt>
-                  <c:pt idx="9">
-                    <c:v>Mix+Cut</c:v>
-                  </c:pt>
-                  <c:pt idx="10">
-                    <c:v>Full (low)</c:v>
-                  </c:pt>
-                  <c:pt idx="11">
-                    <c:v>Full (high)</c:v>
-                  </c:pt>
-                </c:lvl>
-              </c:multiLvlStrCache>
-            </c:multiLvlStrRef>
+                <c:pt idx="0">
+                  <c:v>No Aug</c:v>
+                </c:pt>
+                <c:pt idx="1">
+                  <c:v>Basic</c:v>
+                </c:pt>
+                <c:pt idx="2">
+                  <c:v>Erasing Low</c:v>
+                </c:pt>
+                <c:pt idx="3">
+                  <c:v>Erasing High</c:v>
+                </c:pt>
+                <c:pt idx="4">
+                  <c:v>Jitter Only</c:v>
+                </c:pt>
+                <c:pt idx="5">
+                  <c:v>MixUp Low</c:v>
+                </c:pt>
+                <c:pt idx="6">
+                  <c:v>MixUp Mod</c:v>
+                </c:pt>
+                <c:pt idx="7">
+                  <c:v>CutMix Low</c:v>
+                </c:pt>
+                <c:pt idx="8">
+                  <c:v>CutMix Mod</c:v>
+                </c:pt>
+                <c:pt idx="9">
+                  <c:v>Mix+Cut</c:v>
+                </c:pt>
+                <c:pt idx="10">
+                  <c:v>Full (low)</c:v>
+                </c:pt>
+                <c:pt idx="11">
+                  <c:v>Full (high)</c:v>
+                </c:pt>
+              </c:strCache>
+            </c:strRef>
           </c:cat>
           <c:val>
             <c:numRef>
@@ -3123,35 +3106,24 @@
             </c:numRef>
           </c:val>
           <c:smooth val="1"/>
+          <c:extLst>
+            <c:ext xmlns:c16="http://schemas.microsoft.com/office/drawing/2014/chart" uri="{C3380CC4-5D6E-409C-BE32-E72D297353CC}">
+              <c16:uniqueId val="{00000002-D86B-4E45-A131-C3EAE2E2CC2D}"/>
+            </c:ext>
+          </c:extLst>
         </c:ser>
         <c:dLbls>
-          <c:numFmt formatCode="#,##0" sourceLinked="0"/>
-          <c:txPr>
-            <a:bodyPr/>
-            <a:lstStyle/>
-            <a:p>
-              <a:pPr>
-                <a:defRPr b="0" i="0" strike="noStrike" sz="1200" u="none">
-                  <a:solidFill>
-                    <a:srgbClr val="000000"/>
-                  </a:solidFill>
-                  <a:latin typeface="Arial"/>
-                </a:defRPr>
-              </a:pPr>
-            </a:p>
-          </c:txPr>
           <c:showLegendKey val="0"/>
           <c:showVal val="0"/>
           <c:showCatName val="0"/>
           <c:showSerName val="0"/>
           <c:showPercent val="0"/>
           <c:showBubbleSize val="0"/>
-          <c:showLeaderLines val="0"/>
         </c:dLbls>
         <c:marker val="1"/>
+        <c:smooth val="0"/>
         <c:axId val="2094734554"/>
         <c:axId val="2094734552"/>
-        <c:axId val="2094734556"/>
       </c:lineChart>
       <c:catAx>
         <c:axId val="2094734554"/>
@@ -3192,6 +3164,7 @@
         <c:crosses val="autoZero"/>
         <c:auto val="1"/>
         <c:lblAlgn val="ctr"/>
+        <c:lblOffset val="100"/>
         <c:noMultiLvlLbl val="1"/>
       </c:catAx>
       <c:valAx>
@@ -3260,6 +3233,7 @@
     </c:legend>
     <c:plotVisOnly val="1"/>
     <c:dispBlanksAs val="span"/>
+    <c:showDLblsOverMax val="1"/>
   </c:chart>
   <c:spPr>
     <a:solidFill>
@@ -3298,234 +3272,10 @@
           <a:chExt cx="0" cy="0"/>
         </a:xfrm>
       </p:grpSpPr>
-      <p:sp>
-        <p:nvSpPr>
-          <p:cNvPr id="2" name="Header Placeholder 1"/>
-          <p:cNvSpPr>
-            <a:spLocks noGrp="1"/>
-          </p:cNvSpPr>
-          <p:nvPr>
-            <p:ph type="hdr" sz="quarter"/>
-          </p:nvPr>
-        </p:nvSpPr>
-        <p:spPr>
-          <a:xfrm>
-            <a:off x="0" y="0"/>
-            <a:ext cx="2971800" cy="458788"/>
-          </a:xfrm>
-          <a:prstGeom prst="rect">
-            <a:avLst/>
-          </a:prstGeom>
-        </p:spPr>
-        <p:txBody>
-          <a:bodyPr vert="horz" lIns="91440" tIns="45720" rIns="91440" bIns="45720" rtlCol="0"/>
-          <a:lstStyle>
-            <a:lvl1pPr algn="l">
-              <a:defRPr sz="1200"/>
-            </a:lvl1pPr>
-          </a:lstStyle>
-          <a:p>
-            <a:endParaRPr lang="en-US"/>
-          </a:p>
-        </p:txBody>
-      </p:sp>
-      <p:sp>
-        <p:nvSpPr>
-          <p:cNvPr id="3" name="Date Placeholder 2"/>
-          <p:cNvSpPr>
-            <a:spLocks noGrp="1"/>
-          </p:cNvSpPr>
-          <p:nvPr>
-            <p:ph type="dt" idx="1"/>
-          </p:nvPr>
-        </p:nvSpPr>
-        <p:spPr>
-          <a:xfrm>
-            <a:off x="3884613" y="0"/>
-            <a:ext cx="2971800" cy="458788"/>
-          </a:xfrm>
-          <a:prstGeom prst="rect">
-            <a:avLst/>
-          </a:prstGeom>
-        </p:spPr>
-        <p:txBody>
-          <a:bodyPr vert="horz" lIns="91440" tIns="45720" rIns="91440" bIns="45720" rtlCol="0"/>
-          <a:lstStyle>
-            <a:lvl1pPr algn="r">
-              <a:defRPr sz="1200"/>
-            </a:lvl1pPr>
-          </a:lstStyle>
-          <a:p>
-            <a:fld id="{5282F153-3F37-0F45-9E97-73ACFA13230C}" type="datetimeFigureOut">
-              <a:rPr lang="en-US"/>
-              <a:t>7/23/19</a:t>
-            </a:fld>
-            <a:endParaRPr lang="en-US"/>
-          </a:p>
-        </p:txBody>
-      </p:sp>
-      <p:sp>
-        <p:nvSpPr>
-          <p:cNvPr id="4" name="Slide Image Placeholder 3"/>
-          <p:cNvSpPr>
-            <a:spLocks noGrp="1" noRot="1" noChangeAspect="1"/>
-          </p:cNvSpPr>
-          <p:nvPr>
-            <p:ph type="sldImg" idx="2"/>
-          </p:nvPr>
-        </p:nvSpPr>
-        <p:spPr>
-          <a:xfrm>
-            <a:off x="685800" y="1143000"/>
-            <a:ext cx="5486400" cy="3086100"/>
-          </a:xfrm>
-          <a:prstGeom prst="rect">
-            <a:avLst/>
-          </a:prstGeom>
-          <a:noFill/>
-          <a:ln w="12700">
-            <a:solidFill>
-              <a:prstClr val="black"/>
-            </a:solidFill>
-          </a:ln>
-        </p:spPr>
-        <p:txBody>
-          <a:bodyPr vert="horz" lIns="91440" tIns="45720" rIns="91440" bIns="45720" rtlCol="0" anchor="ctr"/>
-          <a:lstStyle/>
-          <a:p>
-            <a:endParaRPr lang="en-US"/>
-          </a:p>
-        </p:txBody>
-      </p:sp>
-      <p:sp>
-        <p:nvSpPr>
-          <p:cNvPr id="5" name="Notes Placeholder 4"/>
-          <p:cNvSpPr>
-            <a:spLocks noGrp="1"/>
-          </p:cNvSpPr>
-          <p:nvPr>
-            <p:ph type="body" sz="quarter" idx="3"/>
-          </p:nvPr>
-        </p:nvSpPr>
-        <p:spPr>
-          <a:xfrm>
-            <a:off x="685800" y="4400550"/>
-            <a:ext cx="5486400" cy="3600450"/>
-          </a:xfrm>
-          <a:prstGeom prst="rect">
-            <a:avLst/>
-          </a:prstGeom>
-        </p:spPr>
-        <p:txBody>
-          <a:bodyPr vert="horz" lIns="91440" tIns="45720" rIns="91440" bIns="45720" rtlCol="0"/>
-          <a:lstStyle/>
-          <a:p>
-            <a:pPr lvl="0"/>
-            <a:r>
-              <a:rPr lang="en-US"/>
-              <a:t>Click to edit Master text styles</a:t>
-            </a:r>
-          </a:p>
-          <a:p>
-            <a:pPr lvl="1"/>
-            <a:r>
-              <a:rPr lang="en-US"/>
-              <a:t>Second level</a:t>
-            </a:r>
-          </a:p>
-          <a:p>
-            <a:pPr lvl="2"/>
-            <a:r>
-              <a:rPr lang="en-US"/>
-              <a:t>Third level</a:t>
-            </a:r>
-          </a:p>
-          <a:p>
-            <a:pPr lvl="3"/>
-            <a:r>
-              <a:rPr lang="en-US"/>
-              <a:t>Fourth level</a:t>
-            </a:r>
-          </a:p>
-          <a:p>
-            <a:pPr lvl="4"/>
-            <a:r>
-              <a:rPr lang="en-US"/>
-              <a:t>Fifth level</a:t>
-            </a:r>
-          </a:p>
-        </p:txBody>
-      </p:sp>
-      <p:sp>
-        <p:nvSpPr>
-          <p:cNvPr id="6" name="Footer Placeholder 5"/>
-          <p:cNvSpPr>
-            <a:spLocks noGrp="1"/>
-          </p:cNvSpPr>
-          <p:nvPr>
-            <p:ph type="ftr" sz="quarter" idx="4"/>
-          </p:nvPr>
-        </p:nvSpPr>
-        <p:spPr>
-          <a:xfrm>
-            <a:off x="0" y="8685213"/>
-            <a:ext cx="2971800" cy="458787"/>
-          </a:xfrm>
-          <a:prstGeom prst="rect">
-            <a:avLst/>
-          </a:prstGeom>
-        </p:spPr>
-        <p:txBody>
-          <a:bodyPr vert="horz" lIns="91440" tIns="45720" rIns="91440" bIns="45720" rtlCol="0" anchor="b"/>
-          <a:lstStyle>
-            <a:lvl1pPr algn="l">
-              <a:defRPr sz="1200"/>
-            </a:lvl1pPr>
-          </a:lstStyle>
-          <a:p>
-            <a:endParaRPr lang="en-US"/>
-          </a:p>
-        </p:txBody>
-      </p:sp>
-      <p:sp>
-        <p:nvSpPr>
-          <p:cNvPr id="7" name="Slide Number Placeholder 6"/>
-          <p:cNvSpPr>
-            <a:spLocks noGrp="1"/>
-          </p:cNvSpPr>
-          <p:nvPr>
-            <p:ph type="sldNum" sz="quarter" idx="5"/>
-          </p:nvPr>
-        </p:nvSpPr>
-        <p:spPr>
-          <a:xfrm>
-            <a:off x="3884613" y="8685213"/>
-            <a:ext cx="2971800" cy="458787"/>
-          </a:xfrm>
-          <a:prstGeom prst="rect">
-            <a:avLst/>
-          </a:prstGeom>
-        </p:spPr>
-        <p:txBody>
-          <a:bodyPr vert="horz" lIns="91440" tIns="45720" rIns="91440" bIns="45720" rtlCol="0" anchor="b"/>
-          <a:lstStyle>
-            <a:lvl1pPr algn="r">
-              <a:defRPr sz="1200"/>
-            </a:lvl1pPr>
-          </a:lstStyle>
-          <a:p>
-            <a:fld id="{CE5E9CC1-C706-0F49-92D6-E571CC5EEA8F}" type="slidenum">
-              <a:rPr lang="en-US"/>
-              <a:t>‹#›</a:t>
-            </a:fld>
-            <a:endParaRPr lang="en-US"/>
-          </a:p>
-        </p:txBody>
-      </p:sp>
     </p:spTree>
     <p:extLst>
       <p:ext uri="{BB962C8B-B14F-4D97-AF65-F5344CB8AC3E}">
-        <p14:creationId xmlns:p14="http://schemas.microsoft.com/office/powerpoint/2010/main" val="1024086991"/>
+        <p14:creationId xmlns:p14="http://schemas.microsoft.com/office/powerpoint/2010/main" val="1849548930"/>
       </p:ext>
     </p:extLst>
   </p:cSld>
@@ -3669,10 +3419,6 @@
           <a:bodyPr/>
           <a:lstStyle/>
           <a:p>
-            <a:r>
-              <a:rPr lang="en-US" dirty="0"/>
-              <a:t/>
-            </a:r>
             <a:endParaRPr lang="en-US" dirty="0"/>
           </a:p>
         </p:txBody>
@@ -3757,10 +3503,6 @@
           <a:bodyPr/>
           <a:lstStyle/>
           <a:p>
-            <a:r>
-              <a:rPr lang="en-US" dirty="0"/>
-              <a:t/>
-            </a:r>
             <a:endParaRPr lang="en-US" dirty="0"/>
           </a:p>
         </p:txBody>
@@ -3845,10 +3587,6 @@
           <a:bodyPr/>
           <a:lstStyle/>
           <a:p>
-            <a:r>
-              <a:rPr lang="en-US" dirty="0"/>
-              <a:t/>
-            </a:r>
             <a:endParaRPr lang="en-US" dirty="0"/>
           </a:p>
         </p:txBody>
@@ -3933,10 +3671,6 @@
           <a:bodyPr/>
           <a:lstStyle/>
           <a:p>
-            <a:r>
-              <a:rPr lang="en-US" dirty="0"/>
-              <a:t/>
-            </a:r>
             <a:endParaRPr lang="en-US" dirty="0"/>
           </a:p>
         </p:txBody>
@@ -4021,10 +3755,6 @@
           <a:bodyPr/>
           <a:lstStyle/>
           <a:p>
-            <a:r>
-              <a:rPr lang="en-US" dirty="0"/>
-              <a:t/>
-            </a:r>
             <a:endParaRPr lang="en-US" dirty="0"/>
           </a:p>
         </p:txBody>
@@ -4109,10 +3839,6 @@
           <a:bodyPr/>
           <a:lstStyle/>
           <a:p>
-            <a:r>
-              <a:rPr lang="en-US" dirty="0"/>
-              <a:t/>
-            </a:r>
             <a:endParaRPr lang="en-US" dirty="0"/>
           </a:p>
         </p:txBody>
@@ -4197,10 +3923,6 @@
           <a:bodyPr/>
           <a:lstStyle/>
           <a:p>
-            <a:r>
-              <a:rPr lang="en-US" dirty="0"/>
-              <a:t/>
-            </a:r>
             <a:endParaRPr lang="en-US" dirty="0"/>
           </a:p>
         </p:txBody>
@@ -4285,10 +4007,6 @@
           <a:bodyPr/>
           <a:lstStyle/>
           <a:p>
-            <a:r>
-              <a:rPr lang="en-US" dirty="0"/>
-              <a:t/>
-            </a:r>
             <a:endParaRPr lang="en-US" dirty="0"/>
           </a:p>
         </p:txBody>
@@ -4373,10 +4091,6 @@
           <a:bodyPr/>
           <a:lstStyle/>
           <a:p>
-            <a:r>
-              <a:rPr lang="en-US" dirty="0"/>
-              <a:t/>
-            </a:r>
             <a:endParaRPr lang="en-US" dirty="0"/>
           </a:p>
         </p:txBody>
@@ -4461,10 +4175,6 @@
           <a:bodyPr/>
           <a:lstStyle/>
           <a:p>
-            <a:r>
-              <a:rPr lang="en-US" dirty="0"/>
-              <a:t/>
-            </a:r>
             <a:endParaRPr lang="en-US" dirty="0"/>
           </a:p>
         </p:txBody>
@@ -4549,10 +4259,6 @@
           <a:bodyPr/>
           <a:lstStyle/>
           <a:p>
-            <a:r>
-              <a:rPr lang="en-US" dirty="0"/>
-              <a:t/>
-            </a:r>
             <a:endParaRPr lang="en-US" dirty="0"/>
           </a:p>
         </p:txBody>
@@ -4637,10 +4343,6 @@
           <a:bodyPr/>
           <a:lstStyle/>
           <a:p>
-            <a:r>
-              <a:rPr lang="en-US" dirty="0"/>
-              <a:t/>
-            </a:r>
             <a:endParaRPr lang="en-US" dirty="0"/>
           </a:p>
         </p:txBody>
@@ -4714,6 +4416,11 @@
 <file path=ppt/slideMasters/slideMaster1.xml><?xml version="1.0" encoding="utf-8"?>
 <p:sldMaster xmlns:a="http://schemas.openxmlformats.org/drawingml/2006/main" xmlns:r="http://schemas.openxmlformats.org/officeDocument/2006/relationships" xmlns:p="http://schemas.openxmlformats.org/presentationml/2006/main">
   <p:cSld>
+    <p:bg>
+      <p:bgRef idx="1001">
+        <a:schemeClr val="bg1"/>
+      </p:bgRef>
+    </p:bg>
     <p:spTree>
       <p:nvGrpSpPr>
         <p:cNvPr id="1" name=""/>
@@ -4996,6 +4703,7 @@
         <a:solidFill>
           <a:srgbClr val="1A2B4A"/>
         </a:solidFill>
+        <a:effectLst/>
       </p:bgPr>
     </p:bg>
     <p:spTree>
@@ -6268,7 +5976,7 @@
           <a:bodyPr wrap="square" rtlCol="0" anchor="ctr"/>
           <a:lstStyle/>
           <a:p>
-            <a:pPr indent="0" marL="0">
+            <a:pPr marL="0" indent="0">
               <a:buNone/>
             </a:pPr>
             <a:r>
@@ -6304,7 +6012,7 @@
           <a:bodyPr wrap="square" rtlCol="0" anchor="ctr"/>
           <a:lstStyle/>
           <a:p>
-            <a:pPr indent="0" marL="0">
+            <a:pPr marL="0" indent="0">
               <a:buNone/>
             </a:pPr>
             <a:r>
@@ -6365,7 +6073,7 @@
           <a:bodyPr wrap="square" rtlCol="0" anchor="ctr"/>
           <a:lstStyle/>
           <a:p>
-            <a:pPr indent="0" marL="0">
+            <a:pPr marL="0" indent="0">
               <a:lnSpc>
                 <a:spcPct val="130000"/>
               </a:lnSpc>
@@ -6382,7 +6090,7 @@
             <a:endParaRPr lang="en-US" sz="1400" dirty="0"/>
           </a:p>
           <a:p>
-            <a:pPr indent="0" marL="0">
+            <a:pPr marL="0" indent="0">
               <a:lnSpc>
                 <a:spcPct val="130000"/>
               </a:lnSpc>
@@ -6450,7 +6158,7 @@
           <a:bodyPr wrap="square" rtlCol="0" anchor="ctr"/>
           <a:lstStyle/>
           <a:p>
-            <a:pPr algn="ctr" indent="0" marL="0">
+            <a:pPr marL="0" indent="0" algn="ctr">
               <a:buNone/>
             </a:pPr>
             <a:r>
@@ -6515,7 +6223,7 @@
           <a:bodyPr wrap="square" rtlCol="0" anchor="ctr"/>
           <a:lstStyle/>
           <a:p>
-            <a:pPr algn="ctr" indent="0" marL="0">
+            <a:pPr marL="0" indent="0" algn="ctr">
               <a:buNone/>
             </a:pPr>
             <a:r>
@@ -6580,7 +6288,7 @@
           <a:bodyPr wrap="square" rtlCol="0" anchor="ctr"/>
           <a:lstStyle/>
           <a:p>
-            <a:pPr algn="ctr" indent="0" marL="0">
+            <a:pPr marL="0" indent="0" algn="ctr">
               <a:buNone/>
             </a:pPr>
             <a:r>
@@ -6616,7 +6324,7 @@
           <a:bodyPr wrap="square" rtlCol="0" anchor="ctr"/>
           <a:lstStyle/>
           <a:p>
-            <a:pPr indent="0" marL="0">
+            <a:pPr marL="0" indent="0">
               <a:buNone/>
             </a:pPr>
             <a:r>
@@ -6647,6 +6355,7 @@
         <a:solidFill>
           <a:srgbClr val="F1F5F9"/>
         </a:solidFill>
+        <a:effectLst/>
       </p:bgPr>
     </p:bg>
     <p:spTree>
@@ -6709,7 +6418,7 @@
           <a:bodyPr wrap="square" lIns="0" tIns="0" rIns="0" bIns="0" rtlCol="0" anchor="ctr"/>
           <a:lstStyle/>
           <a:p>
-            <a:pPr indent="0" marL="0">
+            <a:pPr marL="0" indent="0">
               <a:buNone/>
             </a:pPr>
             <a:r>
@@ -6745,7 +6454,7 @@
           <a:bodyPr wrap="square" lIns="0" tIns="0" rIns="0" bIns="0" rtlCol="0" anchor="ctr"/>
           <a:lstStyle/>
           <a:p>
-            <a:pPr algn="r" indent="0" marL="0">
+            <a:pPr marL="0" indent="0" algn="r">
               <a:buNone/>
             </a:pPr>
             <a:r>
@@ -6762,7 +6471,7 @@
       </p:sp>
       <p:graphicFrame>
         <p:nvGraphicFramePr>
-          <p:cNvPr id="5" name="Chart 0" descr=""/>
+          <p:cNvPr id="5" name="Chart 0"/>
           <p:cNvGraphicFramePr/>
           <p:nvPr/>
         </p:nvGraphicFramePr>
@@ -6770,9 +6479,9 @@
           <a:off x="182880" y="804672"/>
           <a:ext cx="8778240" cy="3200400"/>
         </p:xfrm>
-        <a:graphic xmlns:a="http://schemas.openxmlformats.org/drawingml/2006/main">
+        <a:graphic>
           <a:graphicData uri="http://schemas.openxmlformats.org/drawingml/2006/chart">
-            <c:chart xmlns:c="http://schemas.openxmlformats.org/drawingml/2006/chart" r:id="rId1"/>
+            <c:chart xmlns:c="http://schemas.openxmlformats.org/drawingml/2006/chart" xmlns:r="http://schemas.openxmlformats.org/officeDocument/2006/relationships" r:id="rId3"/>
           </a:graphicData>
         </a:graphic>
       </p:graphicFrame>
@@ -6800,7 +6509,7 @@
             <a:prstDash val="solid"/>
           </a:ln>
           <a:effectLst>
-            <a:outerShdw sx="100000" sy="100000" kx="0" ky="0" algn="bl" rotWithShape="0" blurRad="101600" dist="38100" dir="8100000">
+            <a:outerShdw blurRad="101600" dist="38100" dir="8100000" algn="bl" rotWithShape="0">
               <a:srgbClr val="000000">
                 <a:alpha val="12000"/>
               </a:srgbClr>
@@ -6829,7 +6538,7 @@
           <a:bodyPr wrap="square" rtlCol="0" anchor="ctr"/>
           <a:lstStyle/>
           <a:p>
-            <a:pPr algn="ctr" indent="0" marL="0">
+            <a:pPr marL="0" indent="0" algn="ctr">
               <a:buNone/>
             </a:pPr>
             <a:r>
@@ -6865,7 +6574,7 @@
           <a:bodyPr wrap="square" rtlCol="0" anchor="ctr"/>
           <a:lstStyle/>
           <a:p>
-            <a:pPr algn="ctr" indent="0" marL="0">
+            <a:pPr marL="0" indent="0" algn="ctr">
               <a:buNone/>
             </a:pPr>
             <a:r>
@@ -6901,7 +6610,7 @@
           <a:bodyPr wrap="square" rtlCol="0" anchor="ctr"/>
           <a:lstStyle/>
           <a:p>
-            <a:pPr algn="ctr" indent="0" marL="0">
+            <a:pPr marL="0" indent="0" algn="ctr">
               <a:buNone/>
             </a:pPr>
             <a:r>
@@ -6940,7 +6649,7 @@
             <a:prstDash val="solid"/>
           </a:ln>
           <a:effectLst>
-            <a:outerShdw sx="100000" sy="100000" kx="0" ky="0" algn="bl" rotWithShape="0" blurRad="101600" dist="38100" dir="8100000">
+            <a:outerShdw blurRad="101600" dist="38100" dir="8100000" algn="bl" rotWithShape="0">
               <a:srgbClr val="000000">
                 <a:alpha val="12000"/>
               </a:srgbClr>
@@ -6969,7 +6678,7 @@
           <a:bodyPr wrap="square" rtlCol="0" anchor="ctr"/>
           <a:lstStyle/>
           <a:p>
-            <a:pPr algn="ctr" indent="0" marL="0">
+            <a:pPr marL="0" indent="0" algn="ctr">
               <a:buNone/>
             </a:pPr>
             <a:r>
@@ -7005,7 +6714,7 @@
           <a:bodyPr wrap="square" rtlCol="0" anchor="ctr"/>
           <a:lstStyle/>
           <a:p>
-            <a:pPr algn="ctr" indent="0" marL="0">
+            <a:pPr marL="0" indent="0" algn="ctr">
               <a:buNone/>
             </a:pPr>
             <a:r>
@@ -7041,7 +6750,7 @@
           <a:bodyPr wrap="square" rtlCol="0" anchor="ctr"/>
           <a:lstStyle/>
           <a:p>
-            <a:pPr algn="ctr" indent="0" marL="0">
+            <a:pPr marL="0" indent="0" algn="ctr">
               <a:buNone/>
             </a:pPr>
             <a:r>
@@ -7080,7 +6789,7 @@
             <a:prstDash val="solid"/>
           </a:ln>
           <a:effectLst>
-            <a:outerShdw sx="100000" sy="100000" kx="0" ky="0" algn="bl" rotWithShape="0" blurRad="101600" dist="38100" dir="8100000">
+            <a:outerShdw blurRad="101600" dist="38100" dir="8100000" algn="bl" rotWithShape="0">
               <a:srgbClr val="000000">
                 <a:alpha val="12000"/>
               </a:srgbClr>
@@ -7109,7 +6818,7 @@
           <a:bodyPr wrap="square" rtlCol="0" anchor="ctr"/>
           <a:lstStyle/>
           <a:p>
-            <a:pPr algn="ctr" indent="0" marL="0">
+            <a:pPr marL="0" indent="0" algn="ctr">
               <a:buNone/>
             </a:pPr>
             <a:r>
@@ -7145,7 +6854,7 @@
           <a:bodyPr wrap="square" rtlCol="0" anchor="ctr"/>
           <a:lstStyle/>
           <a:p>
-            <a:pPr algn="ctr" indent="0" marL="0">
+            <a:pPr marL="0" indent="0" algn="ctr">
               <a:buNone/>
             </a:pPr>
             <a:r>
@@ -7181,7 +6890,7 @@
           <a:bodyPr wrap="square" rtlCol="0" anchor="ctr"/>
           <a:lstStyle/>
           <a:p>
-            <a:pPr algn="ctr" indent="0" marL="0">
+            <a:pPr marL="0" indent="0" algn="ctr">
               <a:buNone/>
             </a:pPr>
             <a:r>
@@ -7212,6 +6921,7 @@
         <a:solidFill>
           <a:srgbClr val="F1F5F9"/>
         </a:solidFill>
+        <a:effectLst/>
       </p:bgPr>
     </p:bg>
     <p:spTree>
@@ -7274,7 +6984,7 @@
           <a:bodyPr wrap="square" lIns="0" tIns="0" rIns="0" bIns="0" rtlCol="0" anchor="ctr"/>
           <a:lstStyle/>
           <a:p>
-            <a:pPr indent="0" marL="0">
+            <a:pPr marL="0" indent="0">
               <a:buNone/>
             </a:pPr>
             <a:r>
@@ -7310,7 +7020,7 @@
           <a:bodyPr wrap="square" lIns="0" tIns="0" rIns="0" bIns="0" rtlCol="0" anchor="ctr"/>
           <a:lstStyle/>
           <a:p>
-            <a:pPr algn="r" indent="0" marL="0">
+            <a:pPr marL="0" indent="0" algn="r">
               <a:buNone/>
             </a:pPr>
             <a:r>
@@ -7327,7 +7037,7 @@
       </p:sp>
       <p:graphicFrame>
         <p:nvGraphicFramePr>
-          <p:cNvPr id="5" name="Chart 0" descr=""/>
+          <p:cNvPr id="5" name="Chart 0"/>
           <p:cNvGraphicFramePr/>
           <p:nvPr/>
         </p:nvGraphicFramePr>
@@ -7335,9 +7045,9 @@
           <a:off x="182880" y="804672"/>
           <a:ext cx="8778240" cy="3200400"/>
         </p:xfrm>
-        <a:graphic xmlns:a="http://schemas.openxmlformats.org/drawingml/2006/main">
+        <a:graphic>
           <a:graphicData uri="http://schemas.openxmlformats.org/drawingml/2006/chart">
-            <c:chart xmlns:c="http://schemas.openxmlformats.org/drawingml/2006/chart" r:id="rId1"/>
+            <c:chart xmlns:c="http://schemas.openxmlformats.org/drawingml/2006/chart" xmlns:r="http://schemas.openxmlformats.org/officeDocument/2006/relationships" r:id="rId3"/>
           </a:graphicData>
         </a:graphic>
       </p:graphicFrame>
@@ -7365,7 +7075,7 @@
             <a:prstDash val="solid"/>
           </a:ln>
           <a:effectLst>
-            <a:outerShdw sx="100000" sy="100000" kx="0" ky="0" algn="bl" rotWithShape="0" blurRad="101600" dist="38100" dir="8100000">
+            <a:outerShdw blurRad="101600" dist="38100" dir="8100000" algn="bl" rotWithShape="0">
               <a:srgbClr val="000000">
                 <a:alpha val="12000"/>
               </a:srgbClr>
@@ -7394,7 +7104,7 @@
           <a:bodyPr wrap="square" rtlCol="0" anchor="ctr"/>
           <a:lstStyle/>
           <a:p>
-            <a:pPr indent="0" marL="0">
+            <a:pPr marL="0" indent="0">
               <a:buNone/>
             </a:pPr>
             <a:r>
@@ -7458,7 +7168,7 @@
             <a:prstDash val="solid"/>
           </a:ln>
           <a:effectLst>
-            <a:outerShdw sx="100000" sy="100000" kx="0" ky="0" algn="bl" rotWithShape="0" blurRad="101600" dist="38100" dir="8100000">
+            <a:outerShdw blurRad="101600" dist="38100" dir="8100000" algn="bl" rotWithShape="0">
               <a:srgbClr val="000000">
                 <a:alpha val="12000"/>
               </a:srgbClr>
@@ -7487,7 +7197,7 @@
           <a:bodyPr wrap="square" rtlCol="0" anchor="ctr"/>
           <a:lstStyle/>
           <a:p>
-            <a:pPr indent="0" marL="0">
+            <a:pPr marL="0" indent="0">
               <a:buNone/>
             </a:pPr>
             <a:r>
@@ -7551,7 +7261,7 @@
             <a:prstDash val="solid"/>
           </a:ln>
           <a:effectLst>
-            <a:outerShdw sx="100000" sy="100000" kx="0" ky="0" algn="bl" rotWithShape="0" blurRad="101600" dist="38100" dir="8100000">
+            <a:outerShdw blurRad="101600" dist="38100" dir="8100000" algn="bl" rotWithShape="0">
               <a:srgbClr val="000000">
                 <a:alpha val="12000"/>
               </a:srgbClr>
@@ -7580,7 +7290,7 @@
           <a:bodyPr wrap="square" rtlCol="0" anchor="ctr"/>
           <a:lstStyle/>
           <a:p>
-            <a:pPr indent="0" marL="0">
+            <a:pPr marL="0" indent="0">
               <a:buNone/>
             </a:pPr>
             <a:r>
@@ -7644,7 +7354,7 @@
             <a:prstDash val="solid"/>
           </a:ln>
           <a:effectLst>
-            <a:outerShdw sx="100000" sy="100000" kx="0" ky="0" algn="bl" rotWithShape="0" blurRad="101600" dist="38100" dir="8100000">
+            <a:outerShdw blurRad="101600" dist="38100" dir="8100000" algn="bl" rotWithShape="0">
               <a:srgbClr val="000000">
                 <a:alpha val="12000"/>
               </a:srgbClr>
@@ -7673,7 +7383,7 @@
           <a:bodyPr wrap="square" rtlCol="0" anchor="ctr"/>
           <a:lstStyle/>
           <a:p>
-            <a:pPr indent="0" marL="0">
+            <a:pPr marL="0" indent="0">
               <a:buNone/>
             </a:pPr>
             <a:r>
@@ -7729,6 +7439,7 @@
         <a:solidFill>
           <a:srgbClr val="1A2B4A"/>
         </a:solidFill>
+        <a:effectLst/>
       </p:bgPr>
     </p:bg>
     <p:spTree>
@@ -7791,7 +7502,7 @@
           <a:bodyPr wrap="square" rtlCol="0" anchor="ctr"/>
           <a:lstStyle/>
           <a:p>
-            <a:pPr indent="0" marL="0">
+            <a:pPr marL="0" indent="0">
               <a:buNone/>
             </a:pPr>
             <a:r>
@@ -7877,7 +7588,7 @@
           <a:bodyPr wrap="square" rtlCol="0" anchor="ctr"/>
           <a:lstStyle/>
           <a:p>
-            <a:pPr algn="ctr" indent="0" marL="0">
+            <a:pPr marL="0" indent="0" algn="ctr">
               <a:buNone/>
             </a:pPr>
             <a:r>
@@ -7913,7 +7624,7 @@
           <a:bodyPr wrap="square" rtlCol="0" anchor="ctr"/>
           <a:lstStyle/>
           <a:p>
-            <a:pPr indent="0" marL="0">
+            <a:pPr marL="0" indent="0">
               <a:buNone/>
             </a:pPr>
             <a:r>
@@ -7949,7 +7660,7 @@
           <a:bodyPr wrap="square" rtlCol="0" anchor="ctr"/>
           <a:lstStyle/>
           <a:p>
-            <a:pPr indent="0" marL="0">
+            <a:pPr marL="0" indent="0">
               <a:lnSpc>
                 <a:spcPct val="120000"/>
               </a:lnSpc>
@@ -8038,7 +7749,7 @@
           <a:bodyPr wrap="square" rtlCol="0" anchor="ctr"/>
           <a:lstStyle/>
           <a:p>
-            <a:pPr algn="ctr" indent="0" marL="0">
+            <a:pPr marL="0" indent="0" algn="ctr">
               <a:buNone/>
             </a:pPr>
             <a:r>
@@ -8074,7 +7785,7 @@
           <a:bodyPr wrap="square" rtlCol="0" anchor="ctr"/>
           <a:lstStyle/>
           <a:p>
-            <a:pPr indent="0" marL="0">
+            <a:pPr marL="0" indent="0">
               <a:buNone/>
             </a:pPr>
             <a:r>
@@ -8110,7 +7821,7 @@
           <a:bodyPr wrap="square" rtlCol="0" anchor="ctr"/>
           <a:lstStyle/>
           <a:p>
-            <a:pPr indent="0" marL="0">
+            <a:pPr marL="0" indent="0">
               <a:lnSpc>
                 <a:spcPct val="120000"/>
               </a:lnSpc>
@@ -8199,7 +7910,7 @@
           <a:bodyPr wrap="square" rtlCol="0" anchor="ctr"/>
           <a:lstStyle/>
           <a:p>
-            <a:pPr algn="ctr" indent="0" marL="0">
+            <a:pPr marL="0" indent="0" algn="ctr">
               <a:buNone/>
             </a:pPr>
             <a:r>
@@ -8235,7 +7946,7 @@
           <a:bodyPr wrap="square" rtlCol="0" anchor="ctr"/>
           <a:lstStyle/>
           <a:p>
-            <a:pPr indent="0" marL="0">
+            <a:pPr marL="0" indent="0">
               <a:buNone/>
             </a:pPr>
             <a:r>
@@ -8271,7 +7982,7 @@
           <a:bodyPr wrap="square" rtlCol="0" anchor="ctr"/>
           <a:lstStyle/>
           <a:p>
-            <a:pPr indent="0" marL="0">
+            <a:pPr marL="0" indent="0">
               <a:lnSpc>
                 <a:spcPct val="120000"/>
               </a:lnSpc>
@@ -8360,7 +8071,7 @@
           <a:bodyPr wrap="square" rtlCol="0" anchor="ctr"/>
           <a:lstStyle/>
           <a:p>
-            <a:pPr algn="ctr" indent="0" marL="0">
+            <a:pPr marL="0" indent="0" algn="ctr">
               <a:buNone/>
             </a:pPr>
             <a:r>
@@ -8396,7 +8107,7 @@
           <a:bodyPr wrap="square" rtlCol="0" anchor="ctr"/>
           <a:lstStyle/>
           <a:p>
-            <a:pPr indent="0" marL="0">
+            <a:pPr marL="0" indent="0">
               <a:buNone/>
             </a:pPr>
             <a:r>
@@ -8432,7 +8143,7 @@
           <a:bodyPr wrap="square" rtlCol="0" anchor="ctr"/>
           <a:lstStyle/>
           <a:p>
-            <a:pPr indent="0" marL="0">
+            <a:pPr marL="0" indent="0">
               <a:lnSpc>
                 <a:spcPct val="120000"/>
               </a:lnSpc>
@@ -8521,7 +8232,7 @@
           <a:bodyPr wrap="square" rtlCol="0" anchor="ctr"/>
           <a:lstStyle/>
           <a:p>
-            <a:pPr algn="ctr" indent="0" marL="0">
+            <a:pPr marL="0" indent="0" algn="ctr">
               <a:buNone/>
             </a:pPr>
             <a:r>
@@ -8557,7 +8268,7 @@
           <a:bodyPr wrap="square" rtlCol="0" anchor="ctr"/>
           <a:lstStyle/>
           <a:p>
-            <a:pPr indent="0" marL="0">
+            <a:pPr marL="0" indent="0">
               <a:buNone/>
             </a:pPr>
             <a:r>
@@ -8593,7 +8304,7 @@
           <a:bodyPr wrap="square" rtlCol="0" anchor="ctr"/>
           <a:lstStyle/>
           <a:p>
-            <a:pPr indent="0" marL="0">
+            <a:pPr marL="0" indent="0">
               <a:lnSpc>
                 <a:spcPct val="120000"/>
               </a:lnSpc>
@@ -8627,6 +8338,7 @@
         <a:solidFill>
           <a:srgbClr val="F1F5F9"/>
         </a:solidFill>
+        <a:effectLst/>
       </p:bgPr>
     </p:bg>
     <p:spTree>
@@ -8689,7 +8401,7 @@
           <a:bodyPr wrap="square" lIns="0" tIns="0" rIns="0" bIns="0" rtlCol="0" anchor="ctr"/>
           <a:lstStyle/>
           <a:p>
-            <a:pPr indent="0" marL="0">
+            <a:pPr marL="0" indent="0">
               <a:buNone/>
             </a:pPr>
             <a:r>
@@ -8725,7 +8437,7 @@
           <a:bodyPr wrap="square" lIns="0" tIns="0" rIns="0" bIns="0" rtlCol="0" anchor="ctr"/>
           <a:lstStyle/>
           <a:p>
-            <a:pPr algn="r" indent="0" marL="0">
+            <a:pPr marL="0" indent="0" algn="r">
               <a:buNone/>
             </a:pPr>
             <a:r>
@@ -8764,7 +8476,7 @@
             <a:prstDash val="solid"/>
           </a:ln>
           <a:effectLst>
-            <a:outerShdw sx="100000" sy="100000" kx="0" ky="0" algn="bl" rotWithShape="0" blurRad="101600" dist="38100" dir="8100000">
+            <a:outerShdw blurRad="101600" dist="38100" dir="8100000" algn="bl" rotWithShape="0">
               <a:srgbClr val="000000">
                 <a:alpha val="12000"/>
               </a:srgbClr>
@@ -8818,7 +8530,7 @@
           <a:bodyPr wrap="square" rtlCol="0" anchor="ctr"/>
           <a:lstStyle/>
           <a:p>
-            <a:pPr indent="0" marL="0">
+            <a:pPr marL="0" indent="0">
               <a:buNone/>
             </a:pPr>
             <a:r>
@@ -8879,7 +8591,7 @@
           <a:bodyPr wrap="square" rtlCol="0" anchor="ctr"/>
           <a:lstStyle/>
           <a:p>
-            <a:pPr algn="ctr" indent="0" marL="0">
+            <a:pPr marL="0" indent="0" algn="ctr">
               <a:buNone/>
             </a:pPr>
             <a:r>
@@ -8915,7 +8627,7 @@
           <a:bodyPr wrap="square" rtlCol="0" anchor="ctr"/>
           <a:lstStyle/>
           <a:p>
-            <a:pPr indent="0" marL="0">
+            <a:pPr marL="0" indent="0">
               <a:buNone/>
             </a:pPr>
             <a:r>
@@ -8976,7 +8688,7 @@
           <a:bodyPr wrap="square" rtlCol="0" anchor="ctr"/>
           <a:lstStyle/>
           <a:p>
-            <a:pPr algn="ctr" indent="0" marL="0">
+            <a:pPr marL="0" indent="0" algn="ctr">
               <a:buNone/>
             </a:pPr>
             <a:r>
@@ -9012,7 +8724,7 @@
           <a:bodyPr wrap="square" rtlCol="0" anchor="ctr"/>
           <a:lstStyle/>
           <a:p>
-            <a:pPr indent="0" marL="0">
+            <a:pPr marL="0" indent="0">
               <a:buNone/>
             </a:pPr>
             <a:r>
@@ -9073,7 +8785,7 @@
           <a:bodyPr wrap="square" rtlCol="0" anchor="ctr"/>
           <a:lstStyle/>
           <a:p>
-            <a:pPr algn="ctr" indent="0" marL="0">
+            <a:pPr marL="0" indent="0" algn="ctr">
               <a:buNone/>
             </a:pPr>
             <a:r>
@@ -9109,7 +8821,7 @@
           <a:bodyPr wrap="square" rtlCol="0" anchor="ctr"/>
           <a:lstStyle/>
           <a:p>
-            <a:pPr indent="0" marL="0">
+            <a:pPr marL="0" indent="0">
               <a:buNone/>
             </a:pPr>
             <a:r>
@@ -9170,7 +8882,7 @@
           <a:bodyPr wrap="square" rtlCol="0" anchor="ctr"/>
           <a:lstStyle/>
           <a:p>
-            <a:pPr algn="ctr" indent="0" marL="0">
+            <a:pPr marL="0" indent="0" algn="ctr">
               <a:buNone/>
             </a:pPr>
             <a:r>
@@ -9206,7 +8918,7 @@
           <a:bodyPr wrap="square" rtlCol="0" anchor="ctr"/>
           <a:lstStyle/>
           <a:p>
-            <a:pPr indent="0" marL="0">
+            <a:pPr marL="0" indent="0">
               <a:buNone/>
             </a:pPr>
             <a:r>
@@ -9267,7 +8979,7 @@
           <a:bodyPr wrap="square" rtlCol="0" anchor="ctr"/>
           <a:lstStyle/>
           <a:p>
-            <a:pPr algn="ctr" indent="0" marL="0">
+            <a:pPr marL="0" indent="0" algn="ctr">
               <a:buNone/>
             </a:pPr>
             <a:r>
@@ -9303,7 +9015,7 @@
           <a:bodyPr wrap="square" rtlCol="0" anchor="ctr"/>
           <a:lstStyle/>
           <a:p>
-            <a:pPr indent="0" marL="0">
+            <a:pPr marL="0" indent="0">
               <a:buNone/>
             </a:pPr>
             <a:r>
@@ -9364,7 +9076,7 @@
           <a:bodyPr wrap="square" rtlCol="0" anchor="ctr"/>
           <a:lstStyle/>
           <a:p>
-            <a:pPr algn="ctr" indent="0" marL="0">
+            <a:pPr marL="0" indent="0" algn="ctr">
               <a:buNone/>
             </a:pPr>
             <a:r>
@@ -9400,7 +9112,7 @@
           <a:bodyPr wrap="square" rtlCol="0" anchor="ctr"/>
           <a:lstStyle/>
           <a:p>
-            <a:pPr indent="0" marL="0">
+            <a:pPr marL="0" indent="0">
               <a:buNone/>
             </a:pPr>
             <a:r>
@@ -9439,7 +9151,7 @@
             <a:prstDash val="solid"/>
           </a:ln>
           <a:effectLst>
-            <a:outerShdw sx="100000" sy="100000" kx="0" ky="0" algn="bl" rotWithShape="0" blurRad="101600" dist="38100" dir="8100000">
+            <a:outerShdw blurRad="101600" dist="38100" dir="8100000" algn="bl" rotWithShape="0">
               <a:srgbClr val="000000">
                 <a:alpha val="12000"/>
               </a:srgbClr>
@@ -9493,7 +9205,7 @@
           <a:bodyPr wrap="square" rtlCol="0" anchor="ctr"/>
           <a:lstStyle/>
           <a:p>
-            <a:pPr indent="0" marL="0">
+            <a:pPr marL="0" indent="0">
               <a:buNone/>
             </a:pPr>
             <a:r>
@@ -9554,7 +9266,7 @@
           <a:bodyPr wrap="square" rtlCol="0" anchor="ctr"/>
           <a:lstStyle/>
           <a:p>
-            <a:pPr indent="0" marL="0">
+            <a:pPr marL="0" indent="0">
               <a:buNone/>
             </a:pPr>
             <a:r>
@@ -9590,7 +9302,7 @@
           <a:bodyPr wrap="square" rtlCol="0" anchor="ctr"/>
           <a:lstStyle/>
           <a:p>
-            <a:pPr indent="0" marL="0">
+            <a:pPr marL="0" indent="0">
               <a:buNone/>
             </a:pPr>
             <a:r>
@@ -9651,7 +9363,7 @@
           <a:bodyPr wrap="square" rtlCol="0" anchor="ctr"/>
           <a:lstStyle/>
           <a:p>
-            <a:pPr indent="0" marL="0">
+            <a:pPr marL="0" indent="0">
               <a:buNone/>
             </a:pPr>
             <a:r>
@@ -9687,7 +9399,7 @@
           <a:bodyPr wrap="square" rtlCol="0" anchor="ctr"/>
           <a:lstStyle/>
           <a:p>
-            <a:pPr indent="0" marL="0">
+            <a:pPr marL="0" indent="0">
               <a:buNone/>
             </a:pPr>
             <a:r>
@@ -9748,7 +9460,7 @@
           <a:bodyPr wrap="square" rtlCol="0" anchor="ctr"/>
           <a:lstStyle/>
           <a:p>
-            <a:pPr indent="0" marL="0">
+            <a:pPr marL="0" indent="0">
               <a:buNone/>
             </a:pPr>
             <a:r>
@@ -9784,7 +9496,7 @@
           <a:bodyPr wrap="square" rtlCol="0" anchor="ctr"/>
           <a:lstStyle/>
           <a:p>
-            <a:pPr indent="0" marL="0">
+            <a:pPr marL="0" indent="0">
               <a:buNone/>
             </a:pPr>
             <a:r>
@@ -9845,7 +9557,7 @@
           <a:bodyPr wrap="square" rtlCol="0" anchor="ctr"/>
           <a:lstStyle/>
           <a:p>
-            <a:pPr indent="0" marL="0">
+            <a:pPr marL="0" indent="0">
               <a:buNone/>
             </a:pPr>
             <a:r>
@@ -9881,7 +9593,7 @@
           <a:bodyPr wrap="square" rtlCol="0" anchor="ctr"/>
           <a:lstStyle/>
           <a:p>
-            <a:pPr indent="0" marL="0">
+            <a:pPr marL="0" indent="0">
               <a:buNone/>
             </a:pPr>
             <a:r>
@@ -9942,7 +9654,7 @@
           <a:bodyPr wrap="square" rtlCol="0" anchor="ctr"/>
           <a:lstStyle/>
           <a:p>
-            <a:pPr indent="0" marL="0">
+            <a:pPr marL="0" indent="0">
               <a:buNone/>
             </a:pPr>
             <a:r>
@@ -9978,7 +9690,7 @@
           <a:bodyPr wrap="square" rtlCol="0" anchor="ctr"/>
           <a:lstStyle/>
           <a:p>
-            <a:pPr indent="0" marL="0">
+            <a:pPr marL="0" indent="0">
               <a:buNone/>
             </a:pPr>
             <a:r>
@@ -10039,7 +9751,7 @@
           <a:bodyPr wrap="square" rtlCol="0" anchor="ctr"/>
           <a:lstStyle/>
           <a:p>
-            <a:pPr indent="0" marL="0">
+            <a:pPr marL="0" indent="0">
               <a:buNone/>
             </a:pPr>
             <a:r>
@@ -10075,7 +9787,7 @@
           <a:bodyPr wrap="square" rtlCol="0" anchor="ctr"/>
           <a:lstStyle/>
           <a:p>
-            <a:pPr indent="0" marL="0">
+            <a:pPr marL="0" indent="0">
               <a:buNone/>
             </a:pPr>
             <a:r>
@@ -10136,7 +9848,7 @@
           <a:bodyPr wrap="square" rtlCol="0" anchor="ctr"/>
           <a:lstStyle/>
           <a:p>
-            <a:pPr indent="0" marL="0">
+            <a:pPr marL="0" indent="0">
               <a:buNone/>
             </a:pPr>
             <a:r>
@@ -10172,7 +9884,7 @@
           <a:bodyPr wrap="square" rtlCol="0" anchor="ctr"/>
           <a:lstStyle/>
           <a:p>
-            <a:pPr indent="0" marL="0">
+            <a:pPr marL="0" indent="0">
               <a:buNone/>
             </a:pPr>
             <a:r>
@@ -10233,7 +9945,7 @@
           <a:bodyPr wrap="square" rtlCol="0" anchor="ctr"/>
           <a:lstStyle/>
           <a:p>
-            <a:pPr indent="0" marL="0">
+            <a:pPr marL="0" indent="0">
               <a:buNone/>
             </a:pPr>
             <a:r>
@@ -10269,7 +9981,7 @@
           <a:bodyPr wrap="square" rtlCol="0" anchor="ctr"/>
           <a:lstStyle/>
           <a:p>
-            <a:pPr indent="0" marL="0">
+            <a:pPr marL="0" indent="0">
               <a:buNone/>
             </a:pPr>
             <a:r>
@@ -10300,6 +10012,7 @@
         <a:solidFill>
           <a:srgbClr val="F1F5F9"/>
         </a:solidFill>
+        <a:effectLst/>
       </p:bgPr>
     </p:bg>
     <p:spTree>
@@ -10362,7 +10075,7 @@
           <a:bodyPr wrap="square" lIns="0" tIns="0" rIns="0" bIns="0" rtlCol="0" anchor="ctr"/>
           <a:lstStyle/>
           <a:p>
-            <a:pPr indent="0" marL="0">
+            <a:pPr marL="0" indent="0">
               <a:buNone/>
             </a:pPr>
             <a:r>
@@ -10398,7 +10111,7 @@
           <a:bodyPr wrap="square" lIns="0" tIns="0" rIns="0" bIns="0" rtlCol="0" anchor="ctr"/>
           <a:lstStyle/>
           <a:p>
-            <a:pPr algn="r" indent="0" marL="0">
+            <a:pPr marL="0" indent="0" algn="r">
               <a:buNone/>
             </a:pPr>
             <a:r>
@@ -10437,7 +10150,7 @@
             <a:prstDash val="solid"/>
           </a:ln>
           <a:effectLst>
-            <a:outerShdw sx="100000" sy="100000" kx="0" ky="0" algn="bl" rotWithShape="0" blurRad="101600" dist="38100" dir="8100000">
+            <a:outerShdw blurRad="101600" dist="38100" dir="8100000" algn="bl" rotWithShape="0">
               <a:srgbClr val="000000">
                 <a:alpha val="12000"/>
               </a:srgbClr>
@@ -10491,7 +10204,7 @@
           <a:bodyPr wrap="square" rtlCol="0" anchor="ctr"/>
           <a:lstStyle/>
           <a:p>
-            <a:pPr indent="0" marL="0">
+            <a:pPr marL="0" indent="0">
               <a:buNone/>
             </a:pPr>
             <a:r>
@@ -10527,7 +10240,7 @@
           <a:bodyPr wrap="square" rtlCol="0" anchor="ctr"/>
           <a:lstStyle/>
           <a:p>
-            <a:pPr algn="r" indent="0" marL="0">
+            <a:pPr marL="0" indent="0" algn="r">
               <a:buNone/>
             </a:pPr>
             <a:r>
@@ -10563,7 +10276,7 @@
           <a:bodyPr wrap="square" rtlCol="0" anchor="ctr"/>
           <a:lstStyle/>
           <a:p>
-            <a:pPr indent="0" marL="0">
+            <a:pPr marL="0" indent="0">
               <a:lnSpc>
                 <a:spcPct val="130000"/>
               </a:lnSpc>
@@ -10627,7 +10340,7 @@
           <a:bodyPr wrap="square" rtlCol="0" anchor="ctr"/>
           <a:lstStyle/>
           <a:p>
-            <a:pPr indent="0" marL="0">
+            <a:pPr marL="0" indent="0">
               <a:buNone/>
             </a:pPr>
             <a:r>
@@ -10688,7 +10401,7 @@
           <a:bodyPr wrap="square" rtlCol="0" anchor="ctr"/>
           <a:lstStyle/>
           <a:p>
-            <a:pPr indent="0" marL="0">
+            <a:pPr marL="0" indent="0">
               <a:buNone/>
             </a:pPr>
             <a:r>
@@ -10749,7 +10462,7 @@
           <a:bodyPr wrap="square" rtlCol="0" anchor="ctr"/>
           <a:lstStyle/>
           <a:p>
-            <a:pPr indent="0" marL="0">
+            <a:pPr marL="0" indent="0">
               <a:buNone/>
             </a:pPr>
             <a:r>
@@ -10810,7 +10523,7 @@
           <a:bodyPr wrap="square" rtlCol="0" anchor="ctr"/>
           <a:lstStyle/>
           <a:p>
-            <a:pPr indent="0" marL="0">
+            <a:pPr marL="0" indent="0">
               <a:buNone/>
             </a:pPr>
             <a:r>
@@ -10849,7 +10562,7 @@
             <a:prstDash val="solid"/>
           </a:ln>
           <a:effectLst>
-            <a:outerShdw sx="100000" sy="100000" kx="0" ky="0" algn="bl" rotWithShape="0" blurRad="101600" dist="38100" dir="8100000">
+            <a:outerShdw blurRad="101600" dist="38100" dir="8100000" algn="bl" rotWithShape="0">
               <a:srgbClr val="000000">
                 <a:alpha val="12000"/>
               </a:srgbClr>
@@ -10903,7 +10616,7 @@
           <a:bodyPr wrap="square" rtlCol="0" anchor="ctr"/>
           <a:lstStyle/>
           <a:p>
-            <a:pPr indent="0" marL="0">
+            <a:pPr marL="0" indent="0">
               <a:buNone/>
             </a:pPr>
             <a:r>
@@ -10939,7 +10652,7 @@
           <a:bodyPr wrap="square" rtlCol="0" anchor="ctr"/>
           <a:lstStyle/>
           <a:p>
-            <a:pPr algn="r" indent="0" marL="0">
+            <a:pPr marL="0" indent="0" algn="r">
               <a:buNone/>
             </a:pPr>
             <a:r>
@@ -10975,7 +10688,7 @@
           <a:bodyPr wrap="square" rtlCol="0" anchor="ctr"/>
           <a:lstStyle/>
           <a:p>
-            <a:pPr indent="0" marL="0">
+            <a:pPr marL="0" indent="0">
               <a:lnSpc>
                 <a:spcPct val="130000"/>
               </a:lnSpc>
@@ -11039,7 +10752,7 @@
           <a:bodyPr wrap="square" rtlCol="0" anchor="ctr"/>
           <a:lstStyle/>
           <a:p>
-            <a:pPr indent="0" marL="0">
+            <a:pPr marL="0" indent="0">
               <a:buNone/>
             </a:pPr>
             <a:r>
@@ -11100,7 +10813,7 @@
           <a:bodyPr wrap="square" rtlCol="0" anchor="ctr"/>
           <a:lstStyle/>
           <a:p>
-            <a:pPr indent="0" marL="0">
+            <a:pPr marL="0" indent="0">
               <a:buNone/>
             </a:pPr>
             <a:r>
@@ -11161,7 +10874,7 @@
           <a:bodyPr wrap="square" rtlCol="0" anchor="ctr"/>
           <a:lstStyle/>
           <a:p>
-            <a:pPr indent="0" marL="0">
+            <a:pPr marL="0" indent="0">
               <a:buNone/>
             </a:pPr>
             <a:r>
@@ -11222,7 +10935,7 @@
           <a:bodyPr wrap="square" rtlCol="0" anchor="ctr"/>
           <a:lstStyle/>
           <a:p>
-            <a:pPr indent="0" marL="0">
+            <a:pPr marL="0" indent="0">
               <a:buNone/>
             </a:pPr>
             <a:r>
@@ -11261,7 +10974,7 @@
             <a:prstDash val="solid"/>
           </a:ln>
           <a:effectLst>
-            <a:outerShdw sx="100000" sy="100000" kx="0" ky="0" algn="bl" rotWithShape="0" blurRad="101600" dist="38100" dir="8100000">
+            <a:outerShdw blurRad="101600" dist="38100" dir="8100000" algn="bl" rotWithShape="0">
               <a:srgbClr val="000000">
                 <a:alpha val="12000"/>
               </a:srgbClr>
@@ -11315,7 +11028,7 @@
           <a:bodyPr wrap="square" rtlCol="0" anchor="ctr"/>
           <a:lstStyle/>
           <a:p>
-            <a:pPr indent="0" marL="0">
+            <a:pPr marL="0" indent="0">
               <a:buNone/>
             </a:pPr>
             <a:r>
@@ -11351,7 +11064,7 @@
           <a:bodyPr wrap="square" rtlCol="0" anchor="ctr"/>
           <a:lstStyle/>
           <a:p>
-            <a:pPr algn="r" indent="0" marL="0">
+            <a:pPr marL="0" indent="0" algn="r">
               <a:buNone/>
             </a:pPr>
             <a:r>
@@ -11387,7 +11100,7 @@
           <a:bodyPr wrap="square" rtlCol="0" anchor="ctr"/>
           <a:lstStyle/>
           <a:p>
-            <a:pPr indent="0" marL="0">
+            <a:pPr marL="0" indent="0">
               <a:lnSpc>
                 <a:spcPct val="130000"/>
               </a:lnSpc>
@@ -11451,7 +11164,7 @@
           <a:bodyPr wrap="square" rtlCol="0" anchor="ctr"/>
           <a:lstStyle/>
           <a:p>
-            <a:pPr indent="0" marL="0">
+            <a:pPr marL="0" indent="0">
               <a:buNone/>
             </a:pPr>
             <a:r>
@@ -11512,7 +11225,7 @@
           <a:bodyPr wrap="square" rtlCol="0" anchor="ctr"/>
           <a:lstStyle/>
           <a:p>
-            <a:pPr indent="0" marL="0">
+            <a:pPr marL="0" indent="0">
               <a:buNone/>
             </a:pPr>
             <a:r>
@@ -11573,7 +11286,7 @@
           <a:bodyPr wrap="square" rtlCol="0" anchor="ctr"/>
           <a:lstStyle/>
           <a:p>
-            <a:pPr indent="0" marL="0">
+            <a:pPr marL="0" indent="0">
               <a:buNone/>
             </a:pPr>
             <a:r>
@@ -11634,7 +11347,7 @@
           <a:bodyPr wrap="square" rtlCol="0" anchor="ctr"/>
           <a:lstStyle/>
           <a:p>
-            <a:pPr indent="0" marL="0">
+            <a:pPr marL="0" indent="0">
               <a:buNone/>
             </a:pPr>
             <a:r>
@@ -11665,6 +11378,7 @@
         <a:solidFill>
           <a:srgbClr val="F1F5F9"/>
         </a:solidFill>
+        <a:effectLst/>
       </p:bgPr>
     </p:bg>
     <p:spTree>
@@ -11727,7 +11441,7 @@
           <a:bodyPr wrap="square" lIns="0" tIns="0" rIns="0" bIns="0" rtlCol="0" anchor="ctr"/>
           <a:lstStyle/>
           <a:p>
-            <a:pPr indent="0" marL="0">
+            <a:pPr marL="0" indent="0">
               <a:buNone/>
             </a:pPr>
             <a:r>
@@ -11763,7 +11477,7 @@
           <a:bodyPr wrap="square" lIns="0" tIns="0" rIns="0" bIns="0" rtlCol="0" anchor="ctr"/>
           <a:lstStyle/>
           <a:p>
-            <a:pPr algn="r" indent="0" marL="0">
+            <a:pPr marL="0" indent="0" algn="r">
               <a:buNone/>
             </a:pPr>
             <a:r>
@@ -11802,7 +11516,7 @@
             <a:prstDash val="solid"/>
           </a:ln>
           <a:effectLst>
-            <a:outerShdw sx="100000" sy="100000" kx="0" ky="0" algn="bl" rotWithShape="0" blurRad="101600" dist="38100" dir="8100000">
+            <a:outerShdw blurRad="101600" dist="38100" dir="8100000" algn="bl" rotWithShape="0">
               <a:srgbClr val="000000">
                 <a:alpha val="12000"/>
               </a:srgbClr>
@@ -11831,7 +11545,7 @@
           <a:bodyPr wrap="square" rtlCol="0" anchor="ctr"/>
           <a:lstStyle/>
           <a:p>
-            <a:pPr indent="0" marL="0">
+            <a:pPr marL="0" indent="0">
               <a:buNone/>
             </a:pPr>
             <a:r>
@@ -11917,7 +11631,7 @@
           <a:bodyPr wrap="square" rtlCol="0" anchor="ctr"/>
           <a:lstStyle/>
           <a:p>
-            <a:pPr algn="ctr" indent="0" marL="0">
+            <a:pPr marL="0" indent="0" algn="ctr">
               <a:buNone/>
             </a:pPr>
             <a:r>
@@ -11953,7 +11667,7 @@
           <a:bodyPr wrap="square" rtlCol="0" anchor="ctr"/>
           <a:lstStyle/>
           <a:p>
-            <a:pPr indent="0" marL="0">
+            <a:pPr marL="0" indent="0">
               <a:buNone/>
             </a:pPr>
             <a:r>
@@ -11989,7 +11703,7 @@
           <a:bodyPr wrap="square" rtlCol="0" anchor="ctr"/>
           <a:lstStyle/>
           <a:p>
-            <a:pPr indent="0" marL="0">
+            <a:pPr marL="0" indent="0">
               <a:buNone/>
             </a:pPr>
             <a:r>
@@ -12075,7 +11789,7 @@
           <a:bodyPr wrap="square" rtlCol="0" anchor="ctr"/>
           <a:lstStyle/>
           <a:p>
-            <a:pPr algn="ctr" indent="0" marL="0">
+            <a:pPr marL="0" indent="0" algn="ctr">
               <a:buNone/>
             </a:pPr>
             <a:r>
@@ -12111,7 +11825,7 @@
           <a:bodyPr wrap="square" rtlCol="0" anchor="ctr"/>
           <a:lstStyle/>
           <a:p>
-            <a:pPr indent="0" marL="0">
+            <a:pPr marL="0" indent="0">
               <a:buNone/>
             </a:pPr>
             <a:r>
@@ -12147,7 +11861,7 @@
           <a:bodyPr wrap="square" rtlCol="0" anchor="ctr"/>
           <a:lstStyle/>
           <a:p>
-            <a:pPr indent="0" marL="0">
+            <a:pPr marL="0" indent="0">
               <a:buNone/>
             </a:pPr>
             <a:r>
@@ -12233,7 +11947,7 @@
           <a:bodyPr wrap="square" rtlCol="0" anchor="ctr"/>
           <a:lstStyle/>
           <a:p>
-            <a:pPr algn="ctr" indent="0" marL="0">
+            <a:pPr marL="0" indent="0" algn="ctr">
               <a:buNone/>
             </a:pPr>
             <a:r>
@@ -12269,7 +11983,7 @@
           <a:bodyPr wrap="square" rtlCol="0" anchor="ctr"/>
           <a:lstStyle/>
           <a:p>
-            <a:pPr indent="0" marL="0">
+            <a:pPr marL="0" indent="0">
               <a:buNone/>
             </a:pPr>
             <a:r>
@@ -12305,7 +12019,7 @@
           <a:bodyPr wrap="square" rtlCol="0" anchor="ctr"/>
           <a:lstStyle/>
           <a:p>
-            <a:pPr indent="0" marL="0">
+            <a:pPr marL="0" indent="0">
               <a:buNone/>
             </a:pPr>
             <a:r>
@@ -12391,7 +12105,7 @@
           <a:bodyPr wrap="square" rtlCol="0" anchor="ctr"/>
           <a:lstStyle/>
           <a:p>
-            <a:pPr algn="ctr" indent="0" marL="0">
+            <a:pPr marL="0" indent="0" algn="ctr">
               <a:buNone/>
             </a:pPr>
             <a:r>
@@ -12427,7 +12141,7 @@
           <a:bodyPr wrap="square" rtlCol="0" anchor="ctr"/>
           <a:lstStyle/>
           <a:p>
-            <a:pPr indent="0" marL="0">
+            <a:pPr marL="0" indent="0">
               <a:buNone/>
             </a:pPr>
             <a:r>
@@ -12463,7 +12177,7 @@
           <a:bodyPr wrap="square" rtlCol="0" anchor="ctr"/>
           <a:lstStyle/>
           <a:p>
-            <a:pPr indent="0" marL="0">
+            <a:pPr marL="0" indent="0">
               <a:buNone/>
             </a:pPr>
             <a:r>
@@ -12549,7 +12263,7 @@
           <a:bodyPr wrap="square" rtlCol="0" anchor="ctr"/>
           <a:lstStyle/>
           <a:p>
-            <a:pPr algn="ctr" indent="0" marL="0">
+            <a:pPr marL="0" indent="0" algn="ctr">
               <a:buNone/>
             </a:pPr>
             <a:r>
@@ -12585,7 +12299,7 @@
           <a:bodyPr wrap="square" rtlCol="0" anchor="ctr"/>
           <a:lstStyle/>
           <a:p>
-            <a:pPr indent="0" marL="0">
+            <a:pPr marL="0" indent="0">
               <a:buNone/>
             </a:pPr>
             <a:r>
@@ -12621,7 +12335,7 @@
           <a:bodyPr wrap="square" rtlCol="0" anchor="ctr"/>
           <a:lstStyle/>
           <a:p>
-            <a:pPr indent="0" marL="0">
+            <a:pPr marL="0" indent="0">
               <a:buNone/>
             </a:pPr>
             <a:r>
@@ -12707,7 +12421,7 @@
           <a:bodyPr wrap="square" rtlCol="0" anchor="ctr"/>
           <a:lstStyle/>
           <a:p>
-            <a:pPr algn="ctr" indent="0" marL="0">
+            <a:pPr marL="0" indent="0" algn="ctr">
               <a:buNone/>
             </a:pPr>
             <a:r>
@@ -12743,7 +12457,7 @@
           <a:bodyPr wrap="square" rtlCol="0" anchor="ctr"/>
           <a:lstStyle/>
           <a:p>
-            <a:pPr indent="0" marL="0">
+            <a:pPr marL="0" indent="0">
               <a:buNone/>
             </a:pPr>
             <a:r>
@@ -12779,7 +12493,7 @@
           <a:bodyPr wrap="square" rtlCol="0" anchor="ctr"/>
           <a:lstStyle/>
           <a:p>
-            <a:pPr indent="0" marL="0">
+            <a:pPr marL="0" indent="0">
               <a:buNone/>
             </a:pPr>
             <a:r>
@@ -12865,7 +12579,7 @@
           <a:bodyPr wrap="square" rtlCol="0" anchor="ctr"/>
           <a:lstStyle/>
           <a:p>
-            <a:pPr algn="ctr" indent="0" marL="0">
+            <a:pPr marL="0" indent="0" algn="ctr">
               <a:buNone/>
             </a:pPr>
             <a:r>
@@ -12901,7 +12615,7 @@
           <a:bodyPr wrap="square" rtlCol="0" anchor="ctr"/>
           <a:lstStyle/>
           <a:p>
-            <a:pPr indent="0" marL="0">
+            <a:pPr marL="0" indent="0">
               <a:buNone/>
             </a:pPr>
             <a:r>
@@ -12937,7 +12651,7 @@
           <a:bodyPr wrap="square" rtlCol="0" anchor="ctr"/>
           <a:lstStyle/>
           <a:p>
-            <a:pPr indent="0" marL="0">
+            <a:pPr marL="0" indent="0">
               <a:buNone/>
             </a:pPr>
             <a:r>
@@ -13023,7 +12737,7 @@
           <a:bodyPr wrap="square" rtlCol="0" anchor="ctr"/>
           <a:lstStyle/>
           <a:p>
-            <a:pPr algn="ctr" indent="0" marL="0">
+            <a:pPr marL="0" indent="0" algn="ctr">
               <a:buNone/>
             </a:pPr>
             <a:r>
@@ -13059,7 +12773,7 @@
           <a:bodyPr wrap="square" rtlCol="0" anchor="ctr"/>
           <a:lstStyle/>
           <a:p>
-            <a:pPr indent="0" marL="0">
+            <a:pPr marL="0" indent="0">
               <a:buNone/>
             </a:pPr>
             <a:r>
@@ -13095,7 +12809,7 @@
           <a:bodyPr wrap="square" rtlCol="0" anchor="ctr"/>
           <a:lstStyle/>
           <a:p>
-            <a:pPr indent="0" marL="0">
+            <a:pPr marL="0" indent="0">
               <a:buNone/>
             </a:pPr>
             <a:r>
@@ -13134,7 +12848,7 @@
             <a:prstDash val="solid"/>
           </a:ln>
           <a:effectLst>
-            <a:outerShdw sx="100000" sy="100000" kx="0" ky="0" algn="bl" rotWithShape="0" blurRad="101600" dist="38100" dir="8100000">
+            <a:outerShdw blurRad="101600" dist="38100" dir="8100000" algn="bl" rotWithShape="0">
               <a:srgbClr val="000000">
                 <a:alpha val="12000"/>
               </a:srgbClr>
@@ -13188,7 +12902,7 @@
           <a:bodyPr wrap="square" rtlCol="0" anchor="ctr"/>
           <a:lstStyle/>
           <a:p>
-            <a:pPr indent="0" marL="0">
+            <a:pPr marL="0" indent="0">
               <a:buNone/>
             </a:pPr>
             <a:r>
@@ -13249,7 +12963,7 @@
           <a:bodyPr wrap="square" rtlCol="0" anchor="ctr"/>
           <a:lstStyle/>
           <a:p>
-            <a:pPr indent="0" marL="0">
+            <a:pPr marL="0" indent="0">
               <a:buNone/>
             </a:pPr>
             <a:r>
@@ -13285,7 +12999,7 @@
           <a:bodyPr wrap="square" rtlCol="0" anchor="ctr"/>
           <a:lstStyle/>
           <a:p>
-            <a:pPr algn="r" indent="0" marL="0">
+            <a:pPr marL="0" indent="0" algn="r">
               <a:buNone/>
             </a:pPr>
             <a:r>
@@ -13321,7 +13035,7 @@
           <a:bodyPr wrap="square" rtlCol="0" anchor="ctr"/>
           <a:lstStyle/>
           <a:p>
-            <a:pPr indent="0" marL="0">
+            <a:pPr marL="0" indent="0">
               <a:lnSpc>
                 <a:spcPct val="125000"/>
               </a:lnSpc>
@@ -13385,7 +13099,7 @@
           <a:bodyPr wrap="square" rtlCol="0" anchor="ctr"/>
           <a:lstStyle/>
           <a:p>
-            <a:pPr indent="0" marL="0">
+            <a:pPr marL="0" indent="0">
               <a:buNone/>
             </a:pPr>
             <a:r>
@@ -13421,7 +13135,7 @@
           <a:bodyPr wrap="square" rtlCol="0" anchor="ctr"/>
           <a:lstStyle/>
           <a:p>
-            <a:pPr algn="r" indent="0" marL="0">
+            <a:pPr marL="0" indent="0" algn="r">
               <a:buNone/>
             </a:pPr>
             <a:r>
@@ -13457,7 +13171,7 @@
           <a:bodyPr wrap="square" rtlCol="0" anchor="ctr"/>
           <a:lstStyle/>
           <a:p>
-            <a:pPr indent="0" marL="0">
+            <a:pPr marL="0" indent="0">
               <a:lnSpc>
                 <a:spcPct val="125000"/>
               </a:lnSpc>
@@ -13521,7 +13235,7 @@
           <a:bodyPr wrap="square" rtlCol="0" anchor="ctr"/>
           <a:lstStyle/>
           <a:p>
-            <a:pPr indent="0" marL="0">
+            <a:pPr marL="0" indent="0">
               <a:buNone/>
             </a:pPr>
             <a:r>
@@ -13557,7 +13271,7 @@
           <a:bodyPr wrap="square" rtlCol="0" anchor="ctr"/>
           <a:lstStyle/>
           <a:p>
-            <a:pPr algn="r" indent="0" marL="0">
+            <a:pPr marL="0" indent="0" algn="r">
               <a:buNone/>
             </a:pPr>
             <a:r>
@@ -13593,7 +13307,7 @@
           <a:bodyPr wrap="square" rtlCol="0" anchor="ctr"/>
           <a:lstStyle/>
           <a:p>
-            <a:pPr indent="0" marL="0">
+            <a:pPr marL="0" indent="0">
               <a:lnSpc>
                 <a:spcPct val="125000"/>
               </a:lnSpc>
@@ -13632,7 +13346,7 @@
           <a:bodyPr wrap="square" rtlCol="0" anchor="ctr"/>
           <a:lstStyle/>
           <a:p>
-            <a:pPr indent="0" marL="0">
+            <a:pPr marL="0" indent="0">
               <a:buNone/>
             </a:pPr>
             <a:r>
@@ -13663,6 +13377,7 @@
         <a:solidFill>
           <a:srgbClr val="F1F5F9"/>
         </a:solidFill>
+        <a:effectLst/>
       </p:bgPr>
     </p:bg>
     <p:spTree>
@@ -13725,7 +13440,7 @@
           <a:bodyPr wrap="square" lIns="0" tIns="0" rIns="0" bIns="0" rtlCol="0" anchor="ctr"/>
           <a:lstStyle/>
           <a:p>
-            <a:pPr indent="0" marL="0">
+            <a:pPr marL="0" indent="0">
               <a:buNone/>
             </a:pPr>
             <a:r>
@@ -13761,7 +13476,7 @@
           <a:bodyPr wrap="square" lIns="0" tIns="0" rIns="0" bIns="0" rtlCol="0" anchor="ctr"/>
           <a:lstStyle/>
           <a:p>
-            <a:pPr algn="r" indent="0" marL="0">
+            <a:pPr marL="0" indent="0" algn="r">
               <a:buNone/>
             </a:pPr>
             <a:r>
@@ -13784,7 +13499,7 @@
         </p:nvSpPr>
         <p:spPr>
           <a:xfrm>
-            <a:off x="182880" y="804672"/>
+            <a:off x="320040" y="682752"/>
             <a:ext cx="2743200" cy="347472"/>
           </a:xfrm>
           <a:prstGeom prst="rect">
@@ -13809,7 +13524,7 @@
         </p:nvSpPr>
         <p:spPr>
           <a:xfrm>
-            <a:off x="228600" y="804672"/>
+            <a:off x="365760" y="682752"/>
             <a:ext cx="2651760" cy="347472"/>
           </a:xfrm>
           <a:prstGeom prst="rect">
@@ -13822,7 +13537,7 @@
           <a:bodyPr wrap="square" rtlCol="0" anchor="ctr"/>
           <a:lstStyle/>
           <a:p>
-            <a:pPr indent="0" marL="0">
+            <a:pPr marL="0" indent="0">
               <a:buNone/>
             </a:pPr>
             <a:r>
@@ -13845,7 +13560,7 @@
         </p:nvSpPr>
         <p:spPr>
           <a:xfrm>
-            <a:off x="2962656" y="804672"/>
+            <a:off x="3099816" y="682752"/>
             <a:ext cx="2103120" cy="347472"/>
           </a:xfrm>
           <a:prstGeom prst="rect">
@@ -13870,7 +13585,7 @@
         </p:nvSpPr>
         <p:spPr>
           <a:xfrm>
-            <a:off x="3008376" y="804672"/>
+            <a:off x="3145536" y="682752"/>
             <a:ext cx="2011680" cy="347472"/>
           </a:xfrm>
           <a:prstGeom prst="rect">
@@ -13883,7 +13598,7 @@
           <a:bodyPr wrap="square" rtlCol="0" anchor="ctr"/>
           <a:lstStyle/>
           <a:p>
-            <a:pPr indent="0" marL="0">
+            <a:pPr marL="0" indent="0">
               <a:buNone/>
             </a:pPr>
             <a:r>
@@ -13906,7 +13621,7 @@
         </p:nvSpPr>
         <p:spPr>
           <a:xfrm>
-            <a:off x="5102352" y="804672"/>
+            <a:off x="5239512" y="682752"/>
             <a:ext cx="914400" cy="347472"/>
           </a:xfrm>
           <a:prstGeom prst="rect">
@@ -13931,7 +13646,7 @@
         </p:nvSpPr>
         <p:spPr>
           <a:xfrm>
-            <a:off x="5148072" y="804672"/>
+            <a:off x="5285232" y="682752"/>
             <a:ext cx="822960" cy="347472"/>
           </a:xfrm>
           <a:prstGeom prst="rect">
@@ -13944,7 +13659,7 @@
           <a:bodyPr wrap="square" rtlCol="0" anchor="ctr"/>
           <a:lstStyle/>
           <a:p>
-            <a:pPr indent="0" marL="0">
+            <a:pPr marL="0" indent="0">
               <a:buNone/>
             </a:pPr>
             <a:r>
@@ -13967,7 +13682,7 @@
         </p:nvSpPr>
         <p:spPr>
           <a:xfrm>
-            <a:off x="6053328" y="804672"/>
+            <a:off x="6190488" y="682752"/>
             <a:ext cx="822960" cy="347472"/>
           </a:xfrm>
           <a:prstGeom prst="rect">
@@ -13992,7 +13707,7 @@
         </p:nvSpPr>
         <p:spPr>
           <a:xfrm>
-            <a:off x="6099048" y="804672"/>
+            <a:off x="6236208" y="682752"/>
             <a:ext cx="731520" cy="347472"/>
           </a:xfrm>
           <a:prstGeom prst="rect">
@@ -14005,7 +13720,7 @@
           <a:bodyPr wrap="square" rtlCol="0" anchor="ctr"/>
           <a:lstStyle/>
           <a:p>
-            <a:pPr indent="0" marL="0">
+            <a:pPr marL="0" indent="0">
               <a:buNone/>
             </a:pPr>
             <a:r>
@@ -14028,7 +13743,7 @@
         </p:nvSpPr>
         <p:spPr>
           <a:xfrm>
-            <a:off x="6912864" y="804672"/>
+            <a:off x="7050024" y="682752"/>
             <a:ext cx="1554480" cy="347472"/>
           </a:xfrm>
           <a:prstGeom prst="rect">
@@ -14053,7 +13768,7 @@
         </p:nvSpPr>
         <p:spPr>
           <a:xfrm>
-            <a:off x="6958584" y="804672"/>
+            <a:off x="7095744" y="682752"/>
             <a:ext cx="1463040" cy="347472"/>
           </a:xfrm>
           <a:prstGeom prst="rect">
@@ -14066,7 +13781,7 @@
           <a:bodyPr wrap="square" rtlCol="0" anchor="ctr"/>
           <a:lstStyle/>
           <a:p>
-            <a:pPr indent="0" marL="0">
+            <a:pPr marL="0" indent="0">
               <a:buNone/>
             </a:pPr>
             <a:r>
@@ -14089,7 +13804,7 @@
         </p:nvSpPr>
         <p:spPr>
           <a:xfrm>
-            <a:off x="182880" y="1207008"/>
+            <a:off x="320040" y="1085088"/>
             <a:ext cx="2743200" cy="320040"/>
           </a:xfrm>
           <a:prstGeom prst="rect">
@@ -14114,7 +13829,7 @@
         </p:nvSpPr>
         <p:spPr>
           <a:xfrm>
-            <a:off x="228600" y="1207008"/>
+            <a:off x="365760" y="1085088"/>
             <a:ext cx="2651760" cy="320040"/>
           </a:xfrm>
           <a:prstGeom prst="rect">
@@ -14127,7 +13842,7 @@
           <a:bodyPr wrap="square" rtlCol="0" anchor="ctr"/>
           <a:lstStyle/>
           <a:p>
-            <a:pPr indent="0" marL="0">
+            <a:pPr marL="0" indent="0">
               <a:buNone/>
             </a:pPr>
             <a:r>
@@ -14150,7 +13865,7 @@
         </p:nvSpPr>
         <p:spPr>
           <a:xfrm>
-            <a:off x="2962656" y="1207008"/>
+            <a:off x="3099816" y="1085088"/>
             <a:ext cx="2103120" cy="320040"/>
           </a:xfrm>
           <a:prstGeom prst="rect">
@@ -14175,7 +13890,7 @@
         </p:nvSpPr>
         <p:spPr>
           <a:xfrm>
-            <a:off x="3008376" y="1207008"/>
+            <a:off x="3145536" y="1085088"/>
             <a:ext cx="2011680" cy="320040"/>
           </a:xfrm>
           <a:prstGeom prst="rect">
@@ -14188,7 +13903,7 @@
           <a:bodyPr wrap="square" rtlCol="0" anchor="ctr"/>
           <a:lstStyle/>
           <a:p>
-            <a:pPr indent="0" marL="0">
+            <a:pPr marL="0" indent="0">
               <a:buNone/>
             </a:pPr>
             <a:r>
@@ -14211,7 +13926,7 @@
         </p:nvSpPr>
         <p:spPr>
           <a:xfrm>
-            <a:off x="5102352" y="1207008"/>
+            <a:off x="5239512" y="1085088"/>
             <a:ext cx="914400" cy="320040"/>
           </a:xfrm>
           <a:prstGeom prst="rect">
@@ -14236,7 +13951,7 @@
         </p:nvSpPr>
         <p:spPr>
           <a:xfrm>
-            <a:off x="5148072" y="1207008"/>
+            <a:off x="5285232" y="1085088"/>
             <a:ext cx="822960" cy="320040"/>
           </a:xfrm>
           <a:prstGeom prst="rect">
@@ -14249,7 +13964,7 @@
           <a:bodyPr wrap="square" rtlCol="0" anchor="ctr"/>
           <a:lstStyle/>
           <a:p>
-            <a:pPr indent="0" marL="0">
+            <a:pPr marL="0" indent="0">
               <a:buNone/>
             </a:pPr>
             <a:r>
@@ -14272,7 +13987,7 @@
         </p:nvSpPr>
         <p:spPr>
           <a:xfrm>
-            <a:off x="6053328" y="1207008"/>
+            <a:off x="6190488" y="1085088"/>
             <a:ext cx="822960" cy="320040"/>
           </a:xfrm>
           <a:prstGeom prst="rect">
@@ -14297,7 +14012,7 @@
         </p:nvSpPr>
         <p:spPr>
           <a:xfrm>
-            <a:off x="6099048" y="1207008"/>
+            <a:off x="6236208" y="1085088"/>
             <a:ext cx="731520" cy="320040"/>
           </a:xfrm>
           <a:prstGeom prst="rect">
@@ -14310,7 +14025,7 @@
           <a:bodyPr wrap="square" rtlCol="0" anchor="ctr"/>
           <a:lstStyle/>
           <a:p>
-            <a:pPr indent="0" marL="0">
+            <a:pPr marL="0" indent="0">
               <a:buNone/>
             </a:pPr>
             <a:r>
@@ -14333,7 +14048,7 @@
         </p:nvSpPr>
         <p:spPr>
           <a:xfrm>
-            <a:off x="6912864" y="1207008"/>
+            <a:off x="7050024" y="1085088"/>
             <a:ext cx="1554480" cy="320040"/>
           </a:xfrm>
           <a:prstGeom prst="rect">
@@ -14358,7 +14073,7 @@
         </p:nvSpPr>
         <p:spPr>
           <a:xfrm>
-            <a:off x="6958584" y="1207008"/>
+            <a:off x="7095744" y="1085088"/>
             <a:ext cx="1463040" cy="320040"/>
           </a:xfrm>
           <a:prstGeom prst="rect">
@@ -14371,7 +14086,7 @@
           <a:bodyPr wrap="square" rtlCol="0" anchor="ctr"/>
           <a:lstStyle/>
           <a:p>
-            <a:pPr indent="0" marL="0">
+            <a:pPr marL="0" indent="0">
               <a:buNone/>
             </a:pPr>
             <a:r>
@@ -14394,7 +14109,7 @@
         </p:nvSpPr>
         <p:spPr>
           <a:xfrm>
-            <a:off x="182880" y="1545336"/>
+            <a:off x="320040" y="1423416"/>
             <a:ext cx="2743200" cy="320040"/>
           </a:xfrm>
           <a:prstGeom prst="rect">
@@ -14419,7 +14134,7 @@
         </p:nvSpPr>
         <p:spPr>
           <a:xfrm>
-            <a:off x="228600" y="1545336"/>
+            <a:off x="365760" y="1423416"/>
             <a:ext cx="2651760" cy="320040"/>
           </a:xfrm>
           <a:prstGeom prst="rect">
@@ -14432,7 +14147,7 @@
           <a:bodyPr wrap="square" rtlCol="0" anchor="ctr"/>
           <a:lstStyle/>
           <a:p>
-            <a:pPr indent="0" marL="0">
+            <a:pPr marL="0" indent="0">
               <a:buNone/>
             </a:pPr>
             <a:r>
@@ -14455,7 +14170,7 @@
         </p:nvSpPr>
         <p:spPr>
           <a:xfrm>
-            <a:off x="2962656" y="1545336"/>
+            <a:off x="3099816" y="1423416"/>
             <a:ext cx="2103120" cy="320040"/>
           </a:xfrm>
           <a:prstGeom prst="rect">
@@ -14480,7 +14195,7 @@
         </p:nvSpPr>
         <p:spPr>
           <a:xfrm>
-            <a:off x="3008376" y="1545336"/>
+            <a:off x="3145536" y="1423416"/>
             <a:ext cx="2011680" cy="320040"/>
           </a:xfrm>
           <a:prstGeom prst="rect">
@@ -14493,7 +14208,7 @@
           <a:bodyPr wrap="square" rtlCol="0" anchor="ctr"/>
           <a:lstStyle/>
           <a:p>
-            <a:pPr indent="0" marL="0">
+            <a:pPr marL="0" indent="0">
               <a:buNone/>
             </a:pPr>
             <a:r>
@@ -14516,7 +14231,7 @@
         </p:nvSpPr>
         <p:spPr>
           <a:xfrm>
-            <a:off x="5102352" y="1545336"/>
+            <a:off x="5239512" y="1423416"/>
             <a:ext cx="914400" cy="320040"/>
           </a:xfrm>
           <a:prstGeom prst="rect">
@@ -14541,7 +14256,7 @@
         </p:nvSpPr>
         <p:spPr>
           <a:xfrm>
-            <a:off x="5148072" y="1545336"/>
+            <a:off x="5285232" y="1423416"/>
             <a:ext cx="822960" cy="320040"/>
           </a:xfrm>
           <a:prstGeom prst="rect">
@@ -14554,7 +14269,7 @@
           <a:bodyPr wrap="square" rtlCol="0" anchor="ctr"/>
           <a:lstStyle/>
           <a:p>
-            <a:pPr indent="0" marL="0">
+            <a:pPr marL="0" indent="0">
               <a:buNone/>
             </a:pPr>
             <a:r>
@@ -14577,7 +14292,7 @@
         </p:nvSpPr>
         <p:spPr>
           <a:xfrm>
-            <a:off x="6053328" y="1545336"/>
+            <a:off x="6190488" y="1423416"/>
             <a:ext cx="822960" cy="320040"/>
           </a:xfrm>
           <a:prstGeom prst="rect">
@@ -14602,7 +14317,7 @@
         </p:nvSpPr>
         <p:spPr>
           <a:xfrm>
-            <a:off x="6099048" y="1545336"/>
+            <a:off x="6236208" y="1423416"/>
             <a:ext cx="731520" cy="320040"/>
           </a:xfrm>
           <a:prstGeom prst="rect">
@@ -14615,7 +14330,7 @@
           <a:bodyPr wrap="square" rtlCol="0" anchor="ctr"/>
           <a:lstStyle/>
           <a:p>
-            <a:pPr indent="0" marL="0">
+            <a:pPr marL="0" indent="0">
               <a:buNone/>
             </a:pPr>
             <a:r>
@@ -14638,7 +14353,7 @@
         </p:nvSpPr>
         <p:spPr>
           <a:xfrm>
-            <a:off x="6912864" y="1545336"/>
+            <a:off x="7050024" y="1423416"/>
             <a:ext cx="1554480" cy="320040"/>
           </a:xfrm>
           <a:prstGeom prst="rect">
@@ -14663,7 +14378,7 @@
         </p:nvSpPr>
         <p:spPr>
           <a:xfrm>
-            <a:off x="6958584" y="1545336"/>
+            <a:off x="7095744" y="1423416"/>
             <a:ext cx="1463040" cy="320040"/>
           </a:xfrm>
           <a:prstGeom prst="rect">
@@ -14676,7 +14391,7 @@
           <a:bodyPr wrap="square" rtlCol="0" anchor="ctr"/>
           <a:lstStyle/>
           <a:p>
-            <a:pPr indent="0" marL="0">
+            <a:pPr marL="0" indent="0">
               <a:buNone/>
             </a:pPr>
             <a:r>
@@ -14699,7 +14414,7 @@
         </p:nvSpPr>
         <p:spPr>
           <a:xfrm>
-            <a:off x="182880" y="1883664"/>
+            <a:off x="320040" y="1761744"/>
             <a:ext cx="2743200" cy="320040"/>
           </a:xfrm>
           <a:prstGeom prst="rect">
@@ -14724,7 +14439,7 @@
         </p:nvSpPr>
         <p:spPr>
           <a:xfrm>
-            <a:off x="228600" y="1883664"/>
+            <a:off x="365760" y="1761744"/>
             <a:ext cx="2651760" cy="320040"/>
           </a:xfrm>
           <a:prstGeom prst="rect">
@@ -14737,7 +14452,7 @@
           <a:bodyPr wrap="square" rtlCol="0" anchor="ctr"/>
           <a:lstStyle/>
           <a:p>
-            <a:pPr indent="0" marL="0">
+            <a:pPr marL="0" indent="0">
               <a:buNone/>
             </a:pPr>
             <a:r>
@@ -14760,7 +14475,7 @@
         </p:nvSpPr>
         <p:spPr>
           <a:xfrm>
-            <a:off x="2962656" y="1883664"/>
+            <a:off x="3099816" y="1761744"/>
             <a:ext cx="2103120" cy="320040"/>
           </a:xfrm>
           <a:prstGeom prst="rect">
@@ -14785,7 +14500,7 @@
         </p:nvSpPr>
         <p:spPr>
           <a:xfrm>
-            <a:off x="3008376" y="1883664"/>
+            <a:off x="3145536" y="1761744"/>
             <a:ext cx="2011680" cy="320040"/>
           </a:xfrm>
           <a:prstGeom prst="rect">
@@ -14798,7 +14513,7 @@
           <a:bodyPr wrap="square" rtlCol="0" anchor="ctr"/>
           <a:lstStyle/>
           <a:p>
-            <a:pPr indent="0" marL="0">
+            <a:pPr marL="0" indent="0">
               <a:buNone/>
             </a:pPr>
             <a:r>
@@ -14821,7 +14536,7 @@
         </p:nvSpPr>
         <p:spPr>
           <a:xfrm>
-            <a:off x="5102352" y="1883664"/>
+            <a:off x="5239512" y="1761744"/>
             <a:ext cx="914400" cy="320040"/>
           </a:xfrm>
           <a:prstGeom prst="rect">
@@ -14846,7 +14561,7 @@
         </p:nvSpPr>
         <p:spPr>
           <a:xfrm>
-            <a:off x="5148072" y="1883664"/>
+            <a:off x="5285232" y="1761744"/>
             <a:ext cx="822960" cy="320040"/>
           </a:xfrm>
           <a:prstGeom prst="rect">
@@ -14859,7 +14574,7 @@
           <a:bodyPr wrap="square" rtlCol="0" anchor="ctr"/>
           <a:lstStyle/>
           <a:p>
-            <a:pPr indent="0" marL="0">
+            <a:pPr marL="0" indent="0">
               <a:buNone/>
             </a:pPr>
             <a:r>
@@ -14882,7 +14597,7 @@
         </p:nvSpPr>
         <p:spPr>
           <a:xfrm>
-            <a:off x="6053328" y="1883664"/>
+            <a:off x="6190488" y="1761744"/>
             <a:ext cx="822960" cy="320040"/>
           </a:xfrm>
           <a:prstGeom prst="rect">
@@ -14907,7 +14622,7 @@
         </p:nvSpPr>
         <p:spPr>
           <a:xfrm>
-            <a:off x="6099048" y="1883664"/>
+            <a:off x="6236208" y="1761744"/>
             <a:ext cx="731520" cy="320040"/>
           </a:xfrm>
           <a:prstGeom prst="rect">
@@ -14920,7 +14635,7 @@
           <a:bodyPr wrap="square" rtlCol="0" anchor="ctr"/>
           <a:lstStyle/>
           <a:p>
-            <a:pPr indent="0" marL="0">
+            <a:pPr marL="0" indent="0">
               <a:buNone/>
             </a:pPr>
             <a:r>
@@ -14943,7 +14658,7 @@
         </p:nvSpPr>
         <p:spPr>
           <a:xfrm>
-            <a:off x="6912864" y="1883664"/>
+            <a:off x="7050024" y="1761744"/>
             <a:ext cx="1554480" cy="320040"/>
           </a:xfrm>
           <a:prstGeom prst="rect">
@@ -14968,7 +14683,7 @@
         </p:nvSpPr>
         <p:spPr>
           <a:xfrm>
-            <a:off x="6958584" y="1883664"/>
+            <a:off x="7095744" y="1761744"/>
             <a:ext cx="1463040" cy="320040"/>
           </a:xfrm>
           <a:prstGeom prst="rect">
@@ -14981,7 +14696,7 @@
           <a:bodyPr wrap="square" rtlCol="0" anchor="ctr"/>
           <a:lstStyle/>
           <a:p>
-            <a:pPr indent="0" marL="0">
+            <a:pPr marL="0" indent="0">
               <a:buNone/>
             </a:pPr>
             <a:r>
@@ -15004,7 +14719,7 @@
         </p:nvSpPr>
         <p:spPr>
           <a:xfrm>
-            <a:off x="182880" y="2221992"/>
+            <a:off x="320040" y="2100072"/>
             <a:ext cx="2743200" cy="320040"/>
           </a:xfrm>
           <a:prstGeom prst="rect">
@@ -15029,7 +14744,7 @@
         </p:nvSpPr>
         <p:spPr>
           <a:xfrm>
-            <a:off x="228600" y="2221992"/>
+            <a:off x="365760" y="2100072"/>
             <a:ext cx="2651760" cy="320040"/>
           </a:xfrm>
           <a:prstGeom prst="rect">
@@ -15042,7 +14757,7 @@
           <a:bodyPr wrap="square" rtlCol="0" anchor="ctr"/>
           <a:lstStyle/>
           <a:p>
-            <a:pPr indent="0" marL="0">
+            <a:pPr marL="0" indent="0">
               <a:buNone/>
             </a:pPr>
             <a:r>
@@ -15065,7 +14780,7 @@
         </p:nvSpPr>
         <p:spPr>
           <a:xfrm>
-            <a:off x="2962656" y="2221992"/>
+            <a:off x="3099816" y="2100072"/>
             <a:ext cx="2103120" cy="320040"/>
           </a:xfrm>
           <a:prstGeom prst="rect">
@@ -15090,7 +14805,7 @@
         </p:nvSpPr>
         <p:spPr>
           <a:xfrm>
-            <a:off x="3008376" y="2221992"/>
+            <a:off x="3145536" y="2100072"/>
             <a:ext cx="2011680" cy="320040"/>
           </a:xfrm>
           <a:prstGeom prst="rect">
@@ -15103,7 +14818,7 @@
           <a:bodyPr wrap="square" rtlCol="0" anchor="ctr"/>
           <a:lstStyle/>
           <a:p>
-            <a:pPr indent="0" marL="0">
+            <a:pPr marL="0" indent="0">
               <a:buNone/>
             </a:pPr>
             <a:r>
@@ -15126,7 +14841,7 @@
         </p:nvSpPr>
         <p:spPr>
           <a:xfrm>
-            <a:off x="5102352" y="2221992"/>
+            <a:off x="5239512" y="2100072"/>
             <a:ext cx="914400" cy="320040"/>
           </a:xfrm>
           <a:prstGeom prst="rect">
@@ -15151,7 +14866,7 @@
         </p:nvSpPr>
         <p:spPr>
           <a:xfrm>
-            <a:off x="5148072" y="2221992"/>
+            <a:off x="5285232" y="2100072"/>
             <a:ext cx="822960" cy="320040"/>
           </a:xfrm>
           <a:prstGeom prst="rect">
@@ -15164,7 +14879,7 @@
           <a:bodyPr wrap="square" rtlCol="0" anchor="ctr"/>
           <a:lstStyle/>
           <a:p>
-            <a:pPr indent="0" marL="0">
+            <a:pPr marL="0" indent="0">
               <a:buNone/>
             </a:pPr>
             <a:r>
@@ -15187,7 +14902,7 @@
         </p:nvSpPr>
         <p:spPr>
           <a:xfrm>
-            <a:off x="6053328" y="2221992"/>
+            <a:off x="6190488" y="2100072"/>
             <a:ext cx="822960" cy="320040"/>
           </a:xfrm>
           <a:prstGeom prst="rect">
@@ -15212,7 +14927,7 @@
         </p:nvSpPr>
         <p:spPr>
           <a:xfrm>
-            <a:off x="6099048" y="2221992"/>
+            <a:off x="6236208" y="2100072"/>
             <a:ext cx="731520" cy="320040"/>
           </a:xfrm>
           <a:prstGeom prst="rect">
@@ -15225,7 +14940,7 @@
           <a:bodyPr wrap="square" rtlCol="0" anchor="ctr"/>
           <a:lstStyle/>
           <a:p>
-            <a:pPr indent="0" marL="0">
+            <a:pPr marL="0" indent="0">
               <a:buNone/>
             </a:pPr>
             <a:r>
@@ -15248,7 +14963,7 @@
         </p:nvSpPr>
         <p:spPr>
           <a:xfrm>
-            <a:off x="6912864" y="2221992"/>
+            <a:off x="7050024" y="2100072"/>
             <a:ext cx="1554480" cy="320040"/>
           </a:xfrm>
           <a:prstGeom prst="rect">
@@ -15273,7 +14988,7 @@
         </p:nvSpPr>
         <p:spPr>
           <a:xfrm>
-            <a:off x="6958584" y="2221992"/>
+            <a:off x="7095744" y="2100072"/>
             <a:ext cx="1463040" cy="320040"/>
           </a:xfrm>
           <a:prstGeom prst="rect">
@@ -15286,7 +15001,7 @@
           <a:bodyPr wrap="square" rtlCol="0" anchor="ctr"/>
           <a:lstStyle/>
           <a:p>
-            <a:pPr indent="0" marL="0">
+            <a:pPr marL="0" indent="0">
               <a:buNone/>
             </a:pPr>
             <a:r>
@@ -15309,7 +15024,7 @@
         </p:nvSpPr>
         <p:spPr>
           <a:xfrm>
-            <a:off x="182880" y="2560320"/>
+            <a:off x="320040" y="2438400"/>
             <a:ext cx="2743200" cy="320040"/>
           </a:xfrm>
           <a:prstGeom prst="rect">
@@ -15334,7 +15049,7 @@
         </p:nvSpPr>
         <p:spPr>
           <a:xfrm>
-            <a:off x="228600" y="2560320"/>
+            <a:off x="365760" y="2438400"/>
             <a:ext cx="2651760" cy="320040"/>
           </a:xfrm>
           <a:prstGeom prst="rect">
@@ -15347,7 +15062,7 @@
           <a:bodyPr wrap="square" rtlCol="0" anchor="ctr"/>
           <a:lstStyle/>
           <a:p>
-            <a:pPr indent="0" marL="0">
+            <a:pPr marL="0" indent="0">
               <a:buNone/>
             </a:pPr>
             <a:r>
@@ -15370,7 +15085,7 @@
         </p:nvSpPr>
         <p:spPr>
           <a:xfrm>
-            <a:off x="2962656" y="2560320"/>
+            <a:off x="3099816" y="2438400"/>
             <a:ext cx="2103120" cy="320040"/>
           </a:xfrm>
           <a:prstGeom prst="rect">
@@ -15395,7 +15110,7 @@
         </p:nvSpPr>
         <p:spPr>
           <a:xfrm>
-            <a:off x="3008376" y="2560320"/>
+            <a:off x="3145536" y="2438400"/>
             <a:ext cx="2011680" cy="320040"/>
           </a:xfrm>
           <a:prstGeom prst="rect">
@@ -15408,7 +15123,7 @@
           <a:bodyPr wrap="square" rtlCol="0" anchor="ctr"/>
           <a:lstStyle/>
           <a:p>
-            <a:pPr indent="0" marL="0">
+            <a:pPr marL="0" indent="0">
               <a:buNone/>
             </a:pPr>
             <a:r>
@@ -15431,7 +15146,7 @@
         </p:nvSpPr>
         <p:spPr>
           <a:xfrm>
-            <a:off x="5102352" y="2560320"/>
+            <a:off x="5239512" y="2438400"/>
             <a:ext cx="914400" cy="320040"/>
           </a:xfrm>
           <a:prstGeom prst="rect">
@@ -15456,7 +15171,7 @@
         </p:nvSpPr>
         <p:spPr>
           <a:xfrm>
-            <a:off x="5148072" y="2560320"/>
+            <a:off x="5285232" y="2438400"/>
             <a:ext cx="822960" cy="320040"/>
           </a:xfrm>
           <a:prstGeom prst="rect">
@@ -15469,7 +15184,7 @@
           <a:bodyPr wrap="square" rtlCol="0" anchor="ctr"/>
           <a:lstStyle/>
           <a:p>
-            <a:pPr indent="0" marL="0">
+            <a:pPr marL="0" indent="0">
               <a:buNone/>
             </a:pPr>
             <a:r>
@@ -15492,7 +15207,7 @@
         </p:nvSpPr>
         <p:spPr>
           <a:xfrm>
-            <a:off x="6053328" y="2560320"/>
+            <a:off x="6190488" y="2438400"/>
             <a:ext cx="822960" cy="320040"/>
           </a:xfrm>
           <a:prstGeom prst="rect">
@@ -15517,7 +15232,7 @@
         </p:nvSpPr>
         <p:spPr>
           <a:xfrm>
-            <a:off x="6099048" y="2560320"/>
+            <a:off x="6236208" y="2438400"/>
             <a:ext cx="731520" cy="320040"/>
           </a:xfrm>
           <a:prstGeom prst="rect">
@@ -15530,7 +15245,7 @@
           <a:bodyPr wrap="square" rtlCol="0" anchor="ctr"/>
           <a:lstStyle/>
           <a:p>
-            <a:pPr indent="0" marL="0">
+            <a:pPr marL="0" indent="0">
               <a:buNone/>
             </a:pPr>
             <a:r>
@@ -15553,7 +15268,7 @@
         </p:nvSpPr>
         <p:spPr>
           <a:xfrm>
-            <a:off x="6912864" y="2560320"/>
+            <a:off x="7050024" y="2438400"/>
             <a:ext cx="1554480" cy="320040"/>
           </a:xfrm>
           <a:prstGeom prst="rect">
@@ -15578,7 +15293,7 @@
         </p:nvSpPr>
         <p:spPr>
           <a:xfrm>
-            <a:off x="6958584" y="2560320"/>
+            <a:off x="7095744" y="2438400"/>
             <a:ext cx="1463040" cy="320040"/>
           </a:xfrm>
           <a:prstGeom prst="rect">
@@ -15591,7 +15306,7 @@
           <a:bodyPr wrap="square" rtlCol="0" anchor="ctr"/>
           <a:lstStyle/>
           <a:p>
-            <a:pPr indent="0" marL="0">
+            <a:pPr marL="0" indent="0">
               <a:buNone/>
             </a:pPr>
             <a:r>
@@ -15614,7 +15329,7 @@
         </p:nvSpPr>
         <p:spPr>
           <a:xfrm>
-            <a:off x="182880" y="2898648"/>
+            <a:off x="320040" y="2776728"/>
             <a:ext cx="2743200" cy="320040"/>
           </a:xfrm>
           <a:prstGeom prst="rect">
@@ -15639,7 +15354,7 @@
         </p:nvSpPr>
         <p:spPr>
           <a:xfrm>
-            <a:off x="228600" y="2898648"/>
+            <a:off x="365760" y="2776728"/>
             <a:ext cx="2651760" cy="320040"/>
           </a:xfrm>
           <a:prstGeom prst="rect">
@@ -15652,7 +15367,7 @@
           <a:bodyPr wrap="square" rtlCol="0" anchor="ctr"/>
           <a:lstStyle/>
           <a:p>
-            <a:pPr indent="0" marL="0">
+            <a:pPr marL="0" indent="0">
               <a:buNone/>
             </a:pPr>
             <a:r>
@@ -15675,7 +15390,7 @@
         </p:nvSpPr>
         <p:spPr>
           <a:xfrm>
-            <a:off x="2962656" y="2898648"/>
+            <a:off x="3099816" y="2776728"/>
             <a:ext cx="2103120" cy="320040"/>
           </a:xfrm>
           <a:prstGeom prst="rect">
@@ -15700,7 +15415,7 @@
         </p:nvSpPr>
         <p:spPr>
           <a:xfrm>
-            <a:off x="3008376" y="2898648"/>
+            <a:off x="3145536" y="2776728"/>
             <a:ext cx="2011680" cy="320040"/>
           </a:xfrm>
           <a:prstGeom prst="rect">
@@ -15713,7 +15428,7 @@
           <a:bodyPr wrap="square" rtlCol="0" anchor="ctr"/>
           <a:lstStyle/>
           <a:p>
-            <a:pPr indent="0" marL="0">
+            <a:pPr marL="0" indent="0">
               <a:buNone/>
             </a:pPr>
             <a:r>
@@ -15736,7 +15451,7 @@
         </p:nvSpPr>
         <p:spPr>
           <a:xfrm>
-            <a:off x="5102352" y="2898648"/>
+            <a:off x="5239512" y="2776728"/>
             <a:ext cx="914400" cy="320040"/>
           </a:xfrm>
           <a:prstGeom prst="rect">
@@ -15761,7 +15476,7 @@
         </p:nvSpPr>
         <p:spPr>
           <a:xfrm>
-            <a:off x="5148072" y="2898648"/>
+            <a:off x="5285232" y="2776728"/>
             <a:ext cx="822960" cy="320040"/>
           </a:xfrm>
           <a:prstGeom prst="rect">
@@ -15774,7 +15489,7 @@
           <a:bodyPr wrap="square" rtlCol="0" anchor="ctr"/>
           <a:lstStyle/>
           <a:p>
-            <a:pPr indent="0" marL="0">
+            <a:pPr marL="0" indent="0">
               <a:buNone/>
             </a:pPr>
             <a:r>
@@ -15797,7 +15512,7 @@
         </p:nvSpPr>
         <p:spPr>
           <a:xfrm>
-            <a:off x="6053328" y="2898648"/>
+            <a:off x="6190488" y="2776728"/>
             <a:ext cx="822960" cy="320040"/>
           </a:xfrm>
           <a:prstGeom prst="rect">
@@ -15822,7 +15537,7 @@
         </p:nvSpPr>
         <p:spPr>
           <a:xfrm>
-            <a:off x="6099048" y="2898648"/>
+            <a:off x="6236208" y="2776728"/>
             <a:ext cx="731520" cy="320040"/>
           </a:xfrm>
           <a:prstGeom prst="rect">
@@ -15835,7 +15550,7 @@
           <a:bodyPr wrap="square" rtlCol="0" anchor="ctr"/>
           <a:lstStyle/>
           <a:p>
-            <a:pPr indent="0" marL="0">
+            <a:pPr marL="0" indent="0">
               <a:buNone/>
             </a:pPr>
             <a:r>
@@ -15858,7 +15573,7 @@
         </p:nvSpPr>
         <p:spPr>
           <a:xfrm>
-            <a:off x="6912864" y="2898648"/>
+            <a:off x="7050024" y="2776728"/>
             <a:ext cx="1554480" cy="320040"/>
           </a:xfrm>
           <a:prstGeom prst="rect">
@@ -15883,7 +15598,7 @@
         </p:nvSpPr>
         <p:spPr>
           <a:xfrm>
-            <a:off x="6958584" y="2898648"/>
+            <a:off x="7095744" y="2776728"/>
             <a:ext cx="1463040" cy="320040"/>
           </a:xfrm>
           <a:prstGeom prst="rect">
@@ -15896,7 +15611,7 @@
           <a:bodyPr wrap="square" rtlCol="0" anchor="ctr"/>
           <a:lstStyle/>
           <a:p>
-            <a:pPr indent="0" marL="0">
+            <a:pPr marL="0" indent="0">
               <a:buNone/>
             </a:pPr>
             <a:r>
@@ -15919,7 +15634,7 @@
         </p:nvSpPr>
         <p:spPr>
           <a:xfrm>
-            <a:off x="182880" y="3236976"/>
+            <a:off x="320040" y="3115056"/>
             <a:ext cx="2743200" cy="320040"/>
           </a:xfrm>
           <a:prstGeom prst="rect">
@@ -15944,7 +15659,7 @@
         </p:nvSpPr>
         <p:spPr>
           <a:xfrm>
-            <a:off x="228600" y="3236976"/>
+            <a:off x="365760" y="3115056"/>
             <a:ext cx="2651760" cy="320040"/>
           </a:xfrm>
           <a:prstGeom prst="rect">
@@ -15957,7 +15672,7 @@
           <a:bodyPr wrap="square" rtlCol="0" anchor="ctr"/>
           <a:lstStyle/>
           <a:p>
-            <a:pPr indent="0" marL="0">
+            <a:pPr marL="0" indent="0">
               <a:buNone/>
             </a:pPr>
             <a:r>
@@ -15980,7 +15695,7 @@
         </p:nvSpPr>
         <p:spPr>
           <a:xfrm>
-            <a:off x="2962656" y="3236976"/>
+            <a:off x="3099816" y="3115056"/>
             <a:ext cx="2103120" cy="320040"/>
           </a:xfrm>
           <a:prstGeom prst="rect">
@@ -16005,7 +15720,7 @@
         </p:nvSpPr>
         <p:spPr>
           <a:xfrm>
-            <a:off x="3008376" y="3236976"/>
+            <a:off x="3145536" y="3115056"/>
             <a:ext cx="2011680" cy="320040"/>
           </a:xfrm>
           <a:prstGeom prst="rect">
@@ -16018,7 +15733,7 @@
           <a:bodyPr wrap="square" rtlCol="0" anchor="ctr"/>
           <a:lstStyle/>
           <a:p>
-            <a:pPr indent="0" marL="0">
+            <a:pPr marL="0" indent="0">
               <a:buNone/>
             </a:pPr>
             <a:r>
@@ -16041,7 +15756,7 @@
         </p:nvSpPr>
         <p:spPr>
           <a:xfrm>
-            <a:off x="5102352" y="3236976"/>
+            <a:off x="5239512" y="3115056"/>
             <a:ext cx="914400" cy="320040"/>
           </a:xfrm>
           <a:prstGeom prst="rect">
@@ -16066,7 +15781,7 @@
         </p:nvSpPr>
         <p:spPr>
           <a:xfrm>
-            <a:off x="5148072" y="3236976"/>
+            <a:off x="5285232" y="3115056"/>
             <a:ext cx="822960" cy="320040"/>
           </a:xfrm>
           <a:prstGeom prst="rect">
@@ -16079,7 +15794,7 @@
           <a:bodyPr wrap="square" rtlCol="0" anchor="ctr"/>
           <a:lstStyle/>
           <a:p>
-            <a:pPr indent="0" marL="0">
+            <a:pPr marL="0" indent="0">
               <a:buNone/>
             </a:pPr>
             <a:r>
@@ -16102,7 +15817,7 @@
         </p:nvSpPr>
         <p:spPr>
           <a:xfrm>
-            <a:off x="6053328" y="3236976"/>
+            <a:off x="6190488" y="3115056"/>
             <a:ext cx="822960" cy="320040"/>
           </a:xfrm>
           <a:prstGeom prst="rect">
@@ -16127,7 +15842,7 @@
         </p:nvSpPr>
         <p:spPr>
           <a:xfrm>
-            <a:off x="6099048" y="3236976"/>
+            <a:off x="6236208" y="3115056"/>
             <a:ext cx="731520" cy="320040"/>
           </a:xfrm>
           <a:prstGeom prst="rect">
@@ -16140,7 +15855,7 @@
           <a:bodyPr wrap="square" rtlCol="0" anchor="ctr"/>
           <a:lstStyle/>
           <a:p>
-            <a:pPr indent="0" marL="0">
+            <a:pPr marL="0" indent="0">
               <a:buNone/>
             </a:pPr>
             <a:r>
@@ -16163,7 +15878,7 @@
         </p:nvSpPr>
         <p:spPr>
           <a:xfrm>
-            <a:off x="6912864" y="3236976"/>
+            <a:off x="7050024" y="3115056"/>
             <a:ext cx="1554480" cy="320040"/>
           </a:xfrm>
           <a:prstGeom prst="rect">
@@ -16188,7 +15903,7 @@
         </p:nvSpPr>
         <p:spPr>
           <a:xfrm>
-            <a:off x="6958584" y="3236976"/>
+            <a:off x="7095744" y="3115056"/>
             <a:ext cx="1463040" cy="320040"/>
           </a:xfrm>
           <a:prstGeom prst="rect">
@@ -16201,7 +15916,7 @@
           <a:bodyPr wrap="square" rtlCol="0" anchor="ctr"/>
           <a:lstStyle/>
           <a:p>
-            <a:pPr indent="0" marL="0">
+            <a:pPr marL="0" indent="0">
               <a:buNone/>
             </a:pPr>
             <a:r>
@@ -16224,7 +15939,7 @@
         </p:nvSpPr>
         <p:spPr>
           <a:xfrm>
-            <a:off x="182880" y="3575304"/>
+            <a:off x="320040" y="3453384"/>
             <a:ext cx="2743200" cy="320040"/>
           </a:xfrm>
           <a:prstGeom prst="rect">
@@ -16249,7 +15964,7 @@
         </p:nvSpPr>
         <p:spPr>
           <a:xfrm>
-            <a:off x="228600" y="3575304"/>
+            <a:off x="365760" y="3453384"/>
             <a:ext cx="2651760" cy="320040"/>
           </a:xfrm>
           <a:prstGeom prst="rect">
@@ -16262,7 +15977,7 @@
           <a:bodyPr wrap="square" rtlCol="0" anchor="ctr"/>
           <a:lstStyle/>
           <a:p>
-            <a:pPr indent="0" marL="0">
+            <a:pPr marL="0" indent="0">
               <a:buNone/>
             </a:pPr>
             <a:r>
@@ -16285,7 +16000,7 @@
         </p:nvSpPr>
         <p:spPr>
           <a:xfrm>
-            <a:off x="2962656" y="3575304"/>
+            <a:off x="3099816" y="3453384"/>
             <a:ext cx="2103120" cy="320040"/>
           </a:xfrm>
           <a:prstGeom prst="rect">
@@ -16310,7 +16025,7 @@
         </p:nvSpPr>
         <p:spPr>
           <a:xfrm>
-            <a:off x="3008376" y="3575304"/>
+            <a:off x="3145536" y="3453384"/>
             <a:ext cx="2011680" cy="320040"/>
           </a:xfrm>
           <a:prstGeom prst="rect">
@@ -16323,7 +16038,7 @@
           <a:bodyPr wrap="square" rtlCol="0" anchor="ctr"/>
           <a:lstStyle/>
           <a:p>
-            <a:pPr indent="0" marL="0">
+            <a:pPr marL="0" indent="0">
               <a:buNone/>
             </a:pPr>
             <a:r>
@@ -16346,7 +16061,7 @@
         </p:nvSpPr>
         <p:spPr>
           <a:xfrm>
-            <a:off x="5102352" y="3575304"/>
+            <a:off x="5239512" y="3453384"/>
             <a:ext cx="914400" cy="320040"/>
           </a:xfrm>
           <a:prstGeom prst="rect">
@@ -16371,7 +16086,7 @@
         </p:nvSpPr>
         <p:spPr>
           <a:xfrm>
-            <a:off x="5148072" y="3575304"/>
+            <a:off x="5285232" y="3453384"/>
             <a:ext cx="822960" cy="320040"/>
           </a:xfrm>
           <a:prstGeom prst="rect">
@@ -16384,7 +16099,7 @@
           <a:bodyPr wrap="square" rtlCol="0" anchor="ctr"/>
           <a:lstStyle/>
           <a:p>
-            <a:pPr indent="0" marL="0">
+            <a:pPr marL="0" indent="0">
               <a:buNone/>
             </a:pPr>
             <a:r>
@@ -16407,7 +16122,7 @@
         </p:nvSpPr>
         <p:spPr>
           <a:xfrm>
-            <a:off x="6053328" y="3575304"/>
+            <a:off x="6190488" y="3453384"/>
             <a:ext cx="822960" cy="320040"/>
           </a:xfrm>
           <a:prstGeom prst="rect">
@@ -16432,7 +16147,7 @@
         </p:nvSpPr>
         <p:spPr>
           <a:xfrm>
-            <a:off x="6099048" y="3575304"/>
+            <a:off x="6236208" y="3453384"/>
             <a:ext cx="731520" cy="320040"/>
           </a:xfrm>
           <a:prstGeom prst="rect">
@@ -16445,7 +16160,7 @@
           <a:bodyPr wrap="square" rtlCol="0" anchor="ctr"/>
           <a:lstStyle/>
           <a:p>
-            <a:pPr indent="0" marL="0">
+            <a:pPr marL="0" indent="0">
               <a:buNone/>
             </a:pPr>
             <a:r>
@@ -16468,7 +16183,7 @@
         </p:nvSpPr>
         <p:spPr>
           <a:xfrm>
-            <a:off x="6912864" y="3575304"/>
+            <a:off x="7050024" y="3453384"/>
             <a:ext cx="1554480" cy="320040"/>
           </a:xfrm>
           <a:prstGeom prst="rect">
@@ -16493,7 +16208,7 @@
         </p:nvSpPr>
         <p:spPr>
           <a:xfrm>
-            <a:off x="6958584" y="3575304"/>
+            <a:off x="7095744" y="3453384"/>
             <a:ext cx="1463040" cy="320040"/>
           </a:xfrm>
           <a:prstGeom prst="rect">
@@ -16506,7 +16221,7 @@
           <a:bodyPr wrap="square" rtlCol="0" anchor="ctr"/>
           <a:lstStyle/>
           <a:p>
-            <a:pPr indent="0" marL="0">
+            <a:pPr marL="0" indent="0">
               <a:buNone/>
             </a:pPr>
             <a:r>
@@ -16529,7 +16244,7 @@
         </p:nvSpPr>
         <p:spPr>
           <a:xfrm>
-            <a:off x="182880" y="3913632"/>
+            <a:off x="320040" y="3791712"/>
             <a:ext cx="2743200" cy="320040"/>
           </a:xfrm>
           <a:prstGeom prst="rect">
@@ -16554,7 +16269,7 @@
         </p:nvSpPr>
         <p:spPr>
           <a:xfrm>
-            <a:off x="228600" y="3913632"/>
+            <a:off x="365760" y="3791712"/>
             <a:ext cx="2651760" cy="320040"/>
           </a:xfrm>
           <a:prstGeom prst="rect">
@@ -16567,7 +16282,7 @@
           <a:bodyPr wrap="square" rtlCol="0" anchor="ctr"/>
           <a:lstStyle/>
           <a:p>
-            <a:pPr indent="0" marL="0">
+            <a:pPr marL="0" indent="0">
               <a:buNone/>
             </a:pPr>
             <a:r>
@@ -16590,7 +16305,7 @@
         </p:nvSpPr>
         <p:spPr>
           <a:xfrm>
-            <a:off x="2962656" y="3913632"/>
+            <a:off x="3099816" y="3791712"/>
             <a:ext cx="2103120" cy="320040"/>
           </a:xfrm>
           <a:prstGeom prst="rect">
@@ -16615,7 +16330,7 @@
         </p:nvSpPr>
         <p:spPr>
           <a:xfrm>
-            <a:off x="3008376" y="3913632"/>
+            <a:off x="3145536" y="3791712"/>
             <a:ext cx="2011680" cy="320040"/>
           </a:xfrm>
           <a:prstGeom prst="rect">
@@ -16628,7 +16343,7 @@
           <a:bodyPr wrap="square" rtlCol="0" anchor="ctr"/>
           <a:lstStyle/>
           <a:p>
-            <a:pPr indent="0" marL="0">
+            <a:pPr marL="0" indent="0">
               <a:buNone/>
             </a:pPr>
             <a:r>
@@ -16651,7 +16366,7 @@
         </p:nvSpPr>
         <p:spPr>
           <a:xfrm>
-            <a:off x="5102352" y="3913632"/>
+            <a:off x="5239512" y="3791712"/>
             <a:ext cx="914400" cy="320040"/>
           </a:xfrm>
           <a:prstGeom prst="rect">
@@ -16676,7 +16391,7 @@
         </p:nvSpPr>
         <p:spPr>
           <a:xfrm>
-            <a:off x="5148072" y="3913632"/>
+            <a:off x="5285232" y="3791712"/>
             <a:ext cx="822960" cy="320040"/>
           </a:xfrm>
           <a:prstGeom prst="rect">
@@ -16689,7 +16404,7 @@
           <a:bodyPr wrap="square" rtlCol="0" anchor="ctr"/>
           <a:lstStyle/>
           <a:p>
-            <a:pPr indent="0" marL="0">
+            <a:pPr marL="0" indent="0">
               <a:buNone/>
             </a:pPr>
             <a:r>
@@ -16712,7 +16427,7 @@
         </p:nvSpPr>
         <p:spPr>
           <a:xfrm>
-            <a:off x="6053328" y="3913632"/>
+            <a:off x="6190488" y="3791712"/>
             <a:ext cx="822960" cy="320040"/>
           </a:xfrm>
           <a:prstGeom prst="rect">
@@ -16737,7 +16452,7 @@
         </p:nvSpPr>
         <p:spPr>
           <a:xfrm>
-            <a:off x="6099048" y="3913632"/>
+            <a:off x="6236208" y="3791712"/>
             <a:ext cx="731520" cy="320040"/>
           </a:xfrm>
           <a:prstGeom prst="rect">
@@ -16750,7 +16465,7 @@
           <a:bodyPr wrap="square" rtlCol="0" anchor="ctr"/>
           <a:lstStyle/>
           <a:p>
-            <a:pPr indent="0" marL="0">
+            <a:pPr marL="0" indent="0">
               <a:buNone/>
             </a:pPr>
             <a:r>
@@ -16773,7 +16488,7 @@
         </p:nvSpPr>
         <p:spPr>
           <a:xfrm>
-            <a:off x="6912864" y="3913632"/>
+            <a:off x="7050024" y="3791712"/>
             <a:ext cx="1554480" cy="320040"/>
           </a:xfrm>
           <a:prstGeom prst="rect">
@@ -16798,7 +16513,7 @@
         </p:nvSpPr>
         <p:spPr>
           <a:xfrm>
-            <a:off x="6958584" y="3913632"/>
+            <a:off x="7095744" y="3791712"/>
             <a:ext cx="1463040" cy="320040"/>
           </a:xfrm>
           <a:prstGeom prst="rect">
@@ -16811,7 +16526,7 @@
           <a:bodyPr wrap="square" rtlCol="0" anchor="ctr"/>
           <a:lstStyle/>
           <a:p>
-            <a:pPr indent="0" marL="0">
+            <a:pPr marL="0" indent="0">
               <a:buNone/>
             </a:pPr>
             <a:r>
@@ -16834,7 +16549,7 @@
         </p:nvSpPr>
         <p:spPr>
           <a:xfrm>
-            <a:off x="182880" y="4251960"/>
+            <a:off x="320040" y="4130040"/>
             <a:ext cx="2743200" cy="320040"/>
           </a:xfrm>
           <a:prstGeom prst="rect">
@@ -16859,7 +16574,7 @@
         </p:nvSpPr>
         <p:spPr>
           <a:xfrm>
-            <a:off x="228600" y="4251960"/>
+            <a:off x="365760" y="4130040"/>
             <a:ext cx="2651760" cy="320040"/>
           </a:xfrm>
           <a:prstGeom prst="rect">
@@ -16872,7 +16587,7 @@
           <a:bodyPr wrap="square" rtlCol="0" anchor="ctr"/>
           <a:lstStyle/>
           <a:p>
-            <a:pPr indent="0" marL="0">
+            <a:pPr marL="0" indent="0">
               <a:buNone/>
             </a:pPr>
             <a:r>
@@ -16895,7 +16610,7 @@
         </p:nvSpPr>
         <p:spPr>
           <a:xfrm>
-            <a:off x="2962656" y="4251960"/>
+            <a:off x="3099816" y="4130040"/>
             <a:ext cx="2103120" cy="320040"/>
           </a:xfrm>
           <a:prstGeom prst="rect">
@@ -16920,7 +16635,7 @@
         </p:nvSpPr>
         <p:spPr>
           <a:xfrm>
-            <a:off x="3008376" y="4251960"/>
+            <a:off x="3145536" y="4130040"/>
             <a:ext cx="2011680" cy="320040"/>
           </a:xfrm>
           <a:prstGeom prst="rect">
@@ -16933,7 +16648,7 @@
           <a:bodyPr wrap="square" rtlCol="0" anchor="ctr"/>
           <a:lstStyle/>
           <a:p>
-            <a:pPr indent="0" marL="0">
+            <a:pPr marL="0" indent="0">
               <a:buNone/>
             </a:pPr>
             <a:r>
@@ -16956,7 +16671,7 @@
         </p:nvSpPr>
         <p:spPr>
           <a:xfrm>
-            <a:off x="5102352" y="4251960"/>
+            <a:off x="5239512" y="4130040"/>
             <a:ext cx="914400" cy="320040"/>
           </a:xfrm>
           <a:prstGeom prst="rect">
@@ -16981,7 +16696,7 @@
         </p:nvSpPr>
         <p:spPr>
           <a:xfrm>
-            <a:off x="5148072" y="4251960"/>
+            <a:off x="5285232" y="4130040"/>
             <a:ext cx="822960" cy="320040"/>
           </a:xfrm>
           <a:prstGeom prst="rect">
@@ -16994,7 +16709,7 @@
           <a:bodyPr wrap="square" rtlCol="0" anchor="ctr"/>
           <a:lstStyle/>
           <a:p>
-            <a:pPr indent="0" marL="0">
+            <a:pPr marL="0" indent="0">
               <a:buNone/>
             </a:pPr>
             <a:r>
@@ -17017,7 +16732,7 @@
         </p:nvSpPr>
         <p:spPr>
           <a:xfrm>
-            <a:off x="6053328" y="4251960"/>
+            <a:off x="6190488" y="4130040"/>
             <a:ext cx="822960" cy="320040"/>
           </a:xfrm>
           <a:prstGeom prst="rect">
@@ -17042,7 +16757,7 @@
         </p:nvSpPr>
         <p:spPr>
           <a:xfrm>
-            <a:off x="6099048" y="4251960"/>
+            <a:off x="6236208" y="4130040"/>
             <a:ext cx="731520" cy="320040"/>
           </a:xfrm>
           <a:prstGeom prst="rect">
@@ -17055,7 +16770,7 @@
           <a:bodyPr wrap="square" rtlCol="0" anchor="ctr"/>
           <a:lstStyle/>
           <a:p>
-            <a:pPr indent="0" marL="0">
+            <a:pPr marL="0" indent="0">
               <a:buNone/>
             </a:pPr>
             <a:r>
@@ -17078,7 +16793,7 @@
         </p:nvSpPr>
         <p:spPr>
           <a:xfrm>
-            <a:off x="6912864" y="4251960"/>
+            <a:off x="7050024" y="4130040"/>
             <a:ext cx="1554480" cy="320040"/>
           </a:xfrm>
           <a:prstGeom prst="rect">
@@ -17103,7 +16818,7 @@
         </p:nvSpPr>
         <p:spPr>
           <a:xfrm>
-            <a:off x="6958584" y="4251960"/>
+            <a:off x="7095744" y="4130040"/>
             <a:ext cx="1463040" cy="320040"/>
           </a:xfrm>
           <a:prstGeom prst="rect">
@@ -17116,7 +16831,7 @@
           <a:bodyPr wrap="square" rtlCol="0" anchor="ctr"/>
           <a:lstStyle/>
           <a:p>
-            <a:pPr indent="0" marL="0">
+            <a:pPr marL="0" indent="0">
               <a:buNone/>
             </a:pPr>
             <a:r>
@@ -17139,7 +16854,7 @@
         </p:nvSpPr>
         <p:spPr>
           <a:xfrm>
-            <a:off x="182880" y="4590288"/>
+            <a:off x="320040" y="4468368"/>
             <a:ext cx="2743200" cy="320040"/>
           </a:xfrm>
           <a:prstGeom prst="rect">
@@ -17164,7 +16879,7 @@
         </p:nvSpPr>
         <p:spPr>
           <a:xfrm>
-            <a:off x="228600" y="4590288"/>
+            <a:off x="365760" y="4468368"/>
             <a:ext cx="2651760" cy="320040"/>
           </a:xfrm>
           <a:prstGeom prst="rect">
@@ -17177,7 +16892,7 @@
           <a:bodyPr wrap="square" rtlCol="0" anchor="ctr"/>
           <a:lstStyle/>
           <a:p>
-            <a:pPr indent="0" marL="0">
+            <a:pPr marL="0" indent="0">
               <a:buNone/>
             </a:pPr>
             <a:r>
@@ -17200,7 +16915,7 @@
         </p:nvSpPr>
         <p:spPr>
           <a:xfrm>
-            <a:off x="2962656" y="4590288"/>
+            <a:off x="3099816" y="4468368"/>
             <a:ext cx="2103120" cy="320040"/>
           </a:xfrm>
           <a:prstGeom prst="rect">
@@ -17225,7 +16940,7 @@
         </p:nvSpPr>
         <p:spPr>
           <a:xfrm>
-            <a:off x="3008376" y="4590288"/>
+            <a:off x="3145536" y="4468368"/>
             <a:ext cx="2011680" cy="320040"/>
           </a:xfrm>
           <a:prstGeom prst="rect">
@@ -17238,7 +16953,7 @@
           <a:bodyPr wrap="square" rtlCol="0" anchor="ctr"/>
           <a:lstStyle/>
           <a:p>
-            <a:pPr indent="0" marL="0">
+            <a:pPr marL="0" indent="0">
               <a:buNone/>
             </a:pPr>
             <a:r>
@@ -17261,7 +16976,7 @@
         </p:nvSpPr>
         <p:spPr>
           <a:xfrm>
-            <a:off x="5102352" y="4590288"/>
+            <a:off x="5239512" y="4468368"/>
             <a:ext cx="914400" cy="320040"/>
           </a:xfrm>
           <a:prstGeom prst="rect">
@@ -17286,7 +17001,7 @@
         </p:nvSpPr>
         <p:spPr>
           <a:xfrm>
-            <a:off x="5148072" y="4590288"/>
+            <a:off x="5285232" y="4468368"/>
             <a:ext cx="822960" cy="320040"/>
           </a:xfrm>
           <a:prstGeom prst="rect">
@@ -17299,7 +17014,7 @@
           <a:bodyPr wrap="square" rtlCol="0" anchor="ctr"/>
           <a:lstStyle/>
           <a:p>
-            <a:pPr indent="0" marL="0">
+            <a:pPr marL="0" indent="0">
               <a:buNone/>
             </a:pPr>
             <a:r>
@@ -17322,7 +17037,7 @@
         </p:nvSpPr>
         <p:spPr>
           <a:xfrm>
-            <a:off x="6053328" y="4590288"/>
+            <a:off x="6190488" y="4468368"/>
             <a:ext cx="822960" cy="320040"/>
           </a:xfrm>
           <a:prstGeom prst="rect">
@@ -17347,7 +17062,7 @@
         </p:nvSpPr>
         <p:spPr>
           <a:xfrm>
-            <a:off x="6099048" y="4590288"/>
+            <a:off x="6236208" y="4468368"/>
             <a:ext cx="731520" cy="320040"/>
           </a:xfrm>
           <a:prstGeom prst="rect">
@@ -17360,16 +17075,13 @@
           <a:bodyPr wrap="square" rtlCol="0" anchor="ctr"/>
           <a:lstStyle/>
           <a:p>
-            <a:pPr indent="0" marL="0">
-              <a:buNone/>
-            </a:pPr>
             <a:r>
               <a:rPr lang="en-US" sz="950" dirty="0">
                 <a:solidFill>
                   <a:srgbClr val="0F172A"/>
                 </a:solidFill>
               </a:rPr>
-              <a:t>✓</a:t>
+              <a:t>Color Jitter</a:t>
             </a:r>
             <a:endParaRPr lang="en-US" sz="950" dirty="0"/>
           </a:p>
@@ -17383,7 +17095,7 @@
         </p:nvSpPr>
         <p:spPr>
           <a:xfrm>
-            <a:off x="6912864" y="4590288"/>
+            <a:off x="7050024" y="4468368"/>
             <a:ext cx="1554480" cy="320040"/>
           </a:xfrm>
           <a:prstGeom prst="rect">
@@ -17408,7 +17120,7 @@
         </p:nvSpPr>
         <p:spPr>
           <a:xfrm>
-            <a:off x="6958584" y="4590288"/>
+            <a:off x="7095744" y="4468368"/>
             <a:ext cx="1463040" cy="320040"/>
           </a:xfrm>
           <a:prstGeom prst="rect">
@@ -17421,7 +17133,7 @@
           <a:bodyPr wrap="square" rtlCol="0" anchor="ctr"/>
           <a:lstStyle/>
           <a:p>
-            <a:pPr indent="0" marL="0">
+            <a:pPr marL="0" indent="0">
               <a:buNone/>
             </a:pPr>
             <a:r>
@@ -17444,7 +17156,7 @@
         </p:nvSpPr>
         <p:spPr>
           <a:xfrm>
-            <a:off x="182880" y="4928616"/>
+            <a:off x="320040" y="4806696"/>
             <a:ext cx="2743200" cy="320040"/>
           </a:xfrm>
           <a:prstGeom prst="rect">
@@ -17469,7 +17181,7 @@
         </p:nvSpPr>
         <p:spPr>
           <a:xfrm>
-            <a:off x="228600" y="4928616"/>
+            <a:off x="365760" y="4806696"/>
             <a:ext cx="2651760" cy="320040"/>
           </a:xfrm>
           <a:prstGeom prst="rect">
@@ -17482,7 +17194,7 @@
           <a:bodyPr wrap="square" rtlCol="0" anchor="ctr"/>
           <a:lstStyle/>
           <a:p>
-            <a:pPr indent="0" marL="0">
+            <a:pPr marL="0" indent="0">
               <a:buNone/>
             </a:pPr>
             <a:r>
@@ -17505,7 +17217,7 @@
         </p:nvSpPr>
         <p:spPr>
           <a:xfrm>
-            <a:off x="2962656" y="4928616"/>
+            <a:off x="3099816" y="4806696"/>
             <a:ext cx="2103120" cy="320040"/>
           </a:xfrm>
           <a:prstGeom prst="rect">
@@ -17530,7 +17242,7 @@
         </p:nvSpPr>
         <p:spPr>
           <a:xfrm>
-            <a:off x="3008376" y="4928616"/>
+            <a:off x="3145536" y="4806696"/>
             <a:ext cx="2011680" cy="320040"/>
           </a:xfrm>
           <a:prstGeom prst="rect">
@@ -17543,7 +17255,7 @@
           <a:bodyPr wrap="square" rtlCol="0" anchor="ctr"/>
           <a:lstStyle/>
           <a:p>
-            <a:pPr indent="0" marL="0">
+            <a:pPr marL="0" indent="0">
               <a:buNone/>
             </a:pPr>
             <a:r>
@@ -17566,7 +17278,7 @@
         </p:nvSpPr>
         <p:spPr>
           <a:xfrm>
-            <a:off x="5102352" y="4928616"/>
+            <a:off x="5239512" y="4806696"/>
             <a:ext cx="914400" cy="320040"/>
           </a:xfrm>
           <a:prstGeom prst="rect">
@@ -17591,7 +17303,7 @@
         </p:nvSpPr>
         <p:spPr>
           <a:xfrm>
-            <a:off x="5148072" y="4928616"/>
+            <a:off x="5285232" y="4806696"/>
             <a:ext cx="822960" cy="320040"/>
           </a:xfrm>
           <a:prstGeom prst="rect">
@@ -17604,7 +17316,7 @@
           <a:bodyPr wrap="square" rtlCol="0" anchor="ctr"/>
           <a:lstStyle/>
           <a:p>
-            <a:pPr indent="0" marL="0">
+            <a:pPr marL="0" indent="0">
               <a:buNone/>
             </a:pPr>
             <a:r>
@@ -17627,7 +17339,7 @@
         </p:nvSpPr>
         <p:spPr>
           <a:xfrm>
-            <a:off x="6053328" y="4928616"/>
+            <a:off x="6190488" y="4806696"/>
             <a:ext cx="822960" cy="320040"/>
           </a:xfrm>
           <a:prstGeom prst="rect">
@@ -17652,7 +17364,7 @@
         </p:nvSpPr>
         <p:spPr>
           <a:xfrm>
-            <a:off x="6099048" y="4928616"/>
+            <a:off x="6236208" y="4806696"/>
             <a:ext cx="731520" cy="320040"/>
           </a:xfrm>
           <a:prstGeom prst="rect">
@@ -17665,16 +17377,13 @@
           <a:bodyPr wrap="square" rtlCol="0" anchor="ctr"/>
           <a:lstStyle/>
           <a:p>
-            <a:pPr indent="0" marL="0">
-              <a:buNone/>
-            </a:pPr>
             <a:r>
               <a:rPr lang="en-US" sz="950" dirty="0">
                 <a:solidFill>
                   <a:srgbClr val="0F172A"/>
                 </a:solidFill>
               </a:rPr>
-              <a:t>✓</a:t>
+              <a:t>Color Jitter</a:t>
             </a:r>
             <a:endParaRPr lang="en-US" sz="950" dirty="0"/>
           </a:p>
@@ -17688,7 +17397,7 @@
         </p:nvSpPr>
         <p:spPr>
           <a:xfrm>
-            <a:off x="6912864" y="4928616"/>
+            <a:off x="7050024" y="4806696"/>
             <a:ext cx="1554480" cy="320040"/>
           </a:xfrm>
           <a:prstGeom prst="rect">
@@ -17713,7 +17422,7 @@
         </p:nvSpPr>
         <p:spPr>
           <a:xfrm>
-            <a:off x="6958584" y="4928616"/>
+            <a:off x="7095744" y="4806696"/>
             <a:ext cx="1463040" cy="320040"/>
           </a:xfrm>
           <a:prstGeom prst="rect">
@@ -17726,7 +17435,7 @@
           <a:bodyPr wrap="square" rtlCol="0" anchor="ctr"/>
           <a:lstStyle/>
           <a:p>
-            <a:pPr indent="0" marL="0">
+            <a:pPr marL="0" indent="0">
               <a:buNone/>
             </a:pPr>
             <a:r>
@@ -17757,6 +17466,7 @@
         <a:solidFill>
           <a:srgbClr val="F1F5F9"/>
         </a:solidFill>
+        <a:effectLst/>
       </p:bgPr>
     </p:bg>
     <p:spTree>
@@ -17819,7 +17529,7 @@
           <a:bodyPr wrap="square" lIns="0" tIns="0" rIns="0" bIns="0" rtlCol="0" anchor="ctr"/>
           <a:lstStyle/>
           <a:p>
-            <a:pPr indent="0" marL="0">
+            <a:pPr marL="0" indent="0">
               <a:buNone/>
             </a:pPr>
             <a:r>
@@ -17855,7 +17565,7 @@
           <a:bodyPr wrap="square" lIns="0" tIns="0" rIns="0" bIns="0" rtlCol="0" anchor="ctr"/>
           <a:lstStyle/>
           <a:p>
-            <a:pPr algn="r" indent="0" marL="0">
+            <a:pPr marL="0" indent="0" algn="r">
               <a:buNone/>
             </a:pPr>
             <a:r>
@@ -17894,7 +17604,7 @@
             <a:prstDash val="solid"/>
           </a:ln>
           <a:effectLst>
-            <a:outerShdw sx="100000" sy="100000" kx="0" ky="0" algn="bl" rotWithShape="0" blurRad="101600" dist="38100" dir="8100000">
+            <a:outerShdw blurRad="101600" dist="38100" dir="8100000" algn="bl" rotWithShape="0">
               <a:srgbClr val="000000">
                 <a:alpha val="12000"/>
               </a:srgbClr>
@@ -17948,7 +17658,7 @@
           <a:bodyPr wrap="square" rtlCol="0" anchor="ctr"/>
           <a:lstStyle/>
           <a:p>
-            <a:pPr indent="0" marL="0">
+            <a:pPr marL="0" indent="0">
               <a:buNone/>
             </a:pPr>
             <a:r>
@@ -17987,7 +17697,7 @@
             <a:prstDash val="solid"/>
           </a:ln>
           <a:effectLst>
-            <a:outerShdw sx="100000" sy="100000" kx="0" ky="0" algn="bl" rotWithShape="0" blurRad="101600" dist="38100" dir="8100000">
+            <a:outerShdw blurRad="101600" dist="38100" dir="8100000" algn="bl" rotWithShape="0">
               <a:srgbClr val="000000">
                 <a:alpha val="12000"/>
               </a:srgbClr>
@@ -18016,7 +17726,7 @@
           <a:bodyPr wrap="square" rtlCol="0" anchor="ctr"/>
           <a:lstStyle/>
           <a:p>
-            <a:pPr algn="ctr" indent="0" marL="0">
+            <a:pPr marL="0" indent="0" algn="ctr">
               <a:buNone/>
             </a:pPr>
             <a:r>
@@ -18030,7 +17740,7 @@
             <a:endParaRPr lang="en-US" sz="900" dirty="0"/>
           </a:p>
           <a:p>
-            <a:pPr algn="ctr" indent="0" marL="0">
+            <a:pPr marL="0" indent="0" algn="ctr">
               <a:buNone/>
             </a:pPr>
             <a:r>
@@ -18066,7 +17776,7 @@
           <a:bodyPr wrap="square" rtlCol="0" anchor="ctr"/>
           <a:lstStyle/>
           <a:p>
-            <a:pPr algn="ctr" indent="0" marL="0">
+            <a:pPr marL="0" indent="0" algn="ctr">
               <a:buNone/>
             </a:pPr>
             <a:r>
@@ -18080,7 +17790,7 @@
             <a:endParaRPr lang="en-US" sz="850" dirty="0"/>
           </a:p>
           <a:p>
-            <a:pPr algn="ctr" indent="0" marL="0">
+            <a:pPr marL="0" indent="0" algn="ctr">
               <a:buNone/>
             </a:pPr>
             <a:r>
@@ -18116,7 +17826,7 @@
           <a:bodyPr wrap="square" rtlCol="0" anchor="ctr"/>
           <a:lstStyle/>
           <a:p>
-            <a:pPr algn="ctr" indent="0" marL="0">
+            <a:pPr marL="0" indent="0" algn="ctr">
               <a:buNone/>
             </a:pPr>
             <a:r>
@@ -18155,7 +17865,7 @@
             <a:prstDash val="solid"/>
           </a:ln>
           <a:effectLst>
-            <a:outerShdw sx="100000" sy="100000" kx="0" ky="0" algn="bl" rotWithShape="0" blurRad="101600" dist="38100" dir="8100000">
+            <a:outerShdw blurRad="101600" dist="38100" dir="8100000" algn="bl" rotWithShape="0">
               <a:srgbClr val="000000">
                 <a:alpha val="12000"/>
               </a:srgbClr>
@@ -18184,7 +17894,7 @@
           <a:bodyPr wrap="square" rtlCol="0" anchor="ctr"/>
           <a:lstStyle/>
           <a:p>
-            <a:pPr algn="ctr" indent="0" marL="0">
+            <a:pPr marL="0" indent="0" algn="ctr">
               <a:buNone/>
             </a:pPr>
             <a:r>
@@ -18198,7 +17908,7 @@
             <a:endParaRPr lang="en-US" sz="900" dirty="0"/>
           </a:p>
           <a:p>
-            <a:pPr algn="ctr" indent="0" marL="0">
+            <a:pPr marL="0" indent="0" algn="ctr">
               <a:buNone/>
             </a:pPr>
             <a:r>
@@ -18234,7 +17944,7 @@
           <a:bodyPr wrap="square" rtlCol="0" anchor="ctr"/>
           <a:lstStyle/>
           <a:p>
-            <a:pPr algn="ctr" indent="0" marL="0">
+            <a:pPr marL="0" indent="0" algn="ctr">
               <a:buNone/>
             </a:pPr>
             <a:r>
@@ -18248,7 +17958,7 @@
             <a:endParaRPr lang="en-US" sz="850" dirty="0"/>
           </a:p>
           <a:p>
-            <a:pPr algn="ctr" indent="0" marL="0">
+            <a:pPr marL="0" indent="0" algn="ctr">
               <a:buNone/>
             </a:pPr>
             <a:r>
@@ -18284,7 +17994,7 @@
           <a:bodyPr wrap="square" rtlCol="0" anchor="ctr"/>
           <a:lstStyle/>
           <a:p>
-            <a:pPr algn="ctr" indent="0" marL="0">
+            <a:pPr marL="0" indent="0" algn="ctr">
               <a:buNone/>
             </a:pPr>
             <a:r>
@@ -18323,7 +18033,7 @@
             <a:prstDash val="solid"/>
           </a:ln>
           <a:effectLst>
-            <a:outerShdw sx="100000" sy="100000" kx="0" ky="0" algn="bl" rotWithShape="0" blurRad="101600" dist="38100" dir="8100000">
+            <a:outerShdw blurRad="101600" dist="38100" dir="8100000" algn="bl" rotWithShape="0">
               <a:srgbClr val="000000">
                 <a:alpha val="12000"/>
               </a:srgbClr>
@@ -18352,7 +18062,7 @@
           <a:bodyPr wrap="square" rtlCol="0" anchor="ctr"/>
           <a:lstStyle/>
           <a:p>
-            <a:pPr algn="ctr" indent="0" marL="0">
+            <a:pPr marL="0" indent="0" algn="ctr">
               <a:buNone/>
             </a:pPr>
             <a:r>
@@ -18388,7 +18098,7 @@
           <a:bodyPr wrap="square" rtlCol="0" anchor="ctr"/>
           <a:lstStyle/>
           <a:p>
-            <a:pPr algn="ctr" indent="0" marL="0">
+            <a:pPr marL="0" indent="0" algn="ctr">
               <a:buNone/>
             </a:pPr>
             <a:r>
@@ -18402,7 +18112,7 @@
             <a:endParaRPr lang="en-US" sz="850" dirty="0"/>
           </a:p>
           <a:p>
-            <a:pPr algn="ctr" indent="0" marL="0">
+            <a:pPr marL="0" indent="0" algn="ctr">
               <a:buNone/>
             </a:pPr>
             <a:r>
@@ -18438,7 +18148,7 @@
           <a:bodyPr wrap="square" rtlCol="0" anchor="ctr"/>
           <a:lstStyle/>
           <a:p>
-            <a:pPr algn="ctr" indent="0" marL="0">
+            <a:pPr marL="0" indent="0" algn="ctr">
               <a:buNone/>
             </a:pPr>
             <a:r>
@@ -18477,7 +18187,7 @@
             <a:prstDash val="solid"/>
           </a:ln>
           <a:effectLst>
-            <a:outerShdw sx="100000" sy="100000" kx="0" ky="0" algn="bl" rotWithShape="0" blurRad="101600" dist="38100" dir="8100000">
+            <a:outerShdw blurRad="101600" dist="38100" dir="8100000" algn="bl" rotWithShape="0">
               <a:srgbClr val="000000">
                 <a:alpha val="12000"/>
               </a:srgbClr>
@@ -18506,7 +18216,7 @@
           <a:bodyPr wrap="square" rtlCol="0" anchor="ctr"/>
           <a:lstStyle/>
           <a:p>
-            <a:pPr algn="ctr" indent="0" marL="0">
+            <a:pPr marL="0" indent="0" algn="ctr">
               <a:buNone/>
             </a:pPr>
             <a:r>
@@ -18520,7 +18230,7 @@
             <a:endParaRPr lang="en-US" sz="900" dirty="0"/>
           </a:p>
           <a:p>
-            <a:pPr algn="ctr" indent="0" marL="0">
+            <a:pPr marL="0" indent="0" algn="ctr">
               <a:buNone/>
             </a:pPr>
             <a:r>
@@ -18556,7 +18266,7 @@
           <a:bodyPr wrap="square" rtlCol="0" anchor="ctr"/>
           <a:lstStyle/>
           <a:p>
-            <a:pPr algn="ctr" indent="0" marL="0">
+            <a:pPr marL="0" indent="0" algn="ctr">
               <a:buNone/>
             </a:pPr>
             <a:r>
@@ -18570,7 +18280,7 @@
             <a:endParaRPr lang="en-US" sz="850" dirty="0"/>
           </a:p>
           <a:p>
-            <a:pPr algn="ctr" indent="0" marL="0">
+            <a:pPr marL="0" indent="0" algn="ctr">
               <a:buNone/>
             </a:pPr>
             <a:r>
@@ -18606,7 +18316,7 @@
           <a:bodyPr wrap="square" rtlCol="0" anchor="ctr"/>
           <a:lstStyle/>
           <a:p>
-            <a:pPr indent="0" marL="0">
+            <a:pPr marL="0" indent="0">
               <a:buNone/>
             </a:pPr>
             <a:r>
@@ -18642,7 +18352,7 @@
           <a:bodyPr wrap="square" rtlCol="0" anchor="ctr"/>
           <a:lstStyle/>
           <a:p>
-            <a:pPr indent="0" marL="0">
+            <a:pPr marL="0" indent="0">
               <a:buNone/>
             </a:pPr>
             <a:r>
@@ -18653,9 +18363,6 @@
               </a:rPr>
               <a:t>Phase 1:</a:t>
             </a:r>
-            <a:pPr indent="0" marL="0">
-              <a:buNone/>
-            </a:pPr>
             <a:r>
               <a:rPr lang="en-US" sz="1000" dirty="0">
                 <a:solidFill>
@@ -18689,7 +18396,7 @@
           <a:bodyPr wrap="square" rtlCol="0" anchor="ctr"/>
           <a:lstStyle/>
           <a:p>
-            <a:pPr indent="0" marL="0">
+            <a:pPr marL="0" indent="0">
               <a:buNone/>
             </a:pPr>
             <a:r>
@@ -18700,9 +18407,6 @@
               </a:rPr>
               <a:t>Phase 2+:</a:t>
             </a:r>
-            <a:pPr indent="0" marL="0">
-              <a:buNone/>
-            </a:pPr>
             <a:r>
               <a:rPr lang="en-US" sz="1000" dirty="0">
                 <a:solidFill>
@@ -18736,7 +18440,7 @@
           <a:bodyPr wrap="square" rtlCol="0" anchor="ctr"/>
           <a:lstStyle/>
           <a:p>
-            <a:pPr indent="0" marL="0">
+            <a:pPr marL="0" indent="0">
               <a:buNone/>
             </a:pPr>
             <a:r>
@@ -18797,7 +18501,7 @@
           <a:bodyPr wrap="square" rtlCol="0" anchor="ctr"/>
           <a:lstStyle/>
           <a:p>
-            <a:pPr indent="0" marL="0">
+            <a:pPr marL="0" indent="0">
               <a:buNone/>
             </a:pPr>
             <a:r>
@@ -18858,7 +18562,7 @@
           <a:bodyPr wrap="square" rtlCol="0" anchor="ctr"/>
           <a:lstStyle/>
           <a:p>
-            <a:pPr indent="0" marL="0">
+            <a:pPr marL="0" indent="0">
               <a:buNone/>
             </a:pPr>
             <a:r>
@@ -18919,7 +18623,7 @@
           <a:bodyPr wrap="square" rtlCol="0" anchor="ctr"/>
           <a:lstStyle/>
           <a:p>
-            <a:pPr indent="0" marL="0">
+            <a:pPr marL="0" indent="0">
               <a:buNone/>
             </a:pPr>
             <a:r>
@@ -18980,7 +18684,7 @@
           <a:bodyPr wrap="square" rtlCol="0" anchor="ctr"/>
           <a:lstStyle/>
           <a:p>
-            <a:pPr indent="0" marL="0">
+            <a:pPr marL="0" indent="0">
               <a:buNone/>
             </a:pPr>
             <a:r>
@@ -19019,7 +18723,7 @@
             <a:prstDash val="solid"/>
           </a:ln>
           <a:effectLst>
-            <a:outerShdw sx="100000" sy="100000" kx="0" ky="0" algn="bl" rotWithShape="0" blurRad="101600" dist="38100" dir="8100000">
+            <a:outerShdw blurRad="101600" dist="38100" dir="8100000" algn="bl" rotWithShape="0">
               <a:srgbClr val="000000">
                 <a:alpha val="12000"/>
               </a:srgbClr>
@@ -19073,7 +18777,7 @@
           <a:bodyPr wrap="square" rtlCol="0" anchor="ctr"/>
           <a:lstStyle/>
           <a:p>
-            <a:pPr indent="0" marL="0">
+            <a:pPr marL="0" indent="0">
               <a:buNone/>
             </a:pPr>
             <a:r>
@@ -19134,7 +18838,7 @@
           <a:bodyPr wrap="square" rtlCol="0" anchor="ctr"/>
           <a:lstStyle/>
           <a:p>
-            <a:pPr indent="0" marL="0">
+            <a:pPr marL="0" indent="0">
               <a:buNone/>
             </a:pPr>
             <a:r>
@@ -19170,7 +18874,7 @@
           <a:bodyPr wrap="square" rtlCol="0" anchor="ctr"/>
           <a:lstStyle/>
           <a:p>
-            <a:pPr indent="0" marL="0">
+            <a:pPr marL="0" indent="0">
               <a:lnSpc>
                 <a:spcPct val="120000"/>
               </a:lnSpc>
@@ -19234,7 +18938,7 @@
           <a:bodyPr wrap="square" rtlCol="0" anchor="ctr"/>
           <a:lstStyle/>
           <a:p>
-            <a:pPr indent="0" marL="0">
+            <a:pPr marL="0" indent="0">
               <a:buNone/>
             </a:pPr>
             <a:r>
@@ -19270,7 +18974,7 @@
           <a:bodyPr wrap="square" rtlCol="0" anchor="ctr"/>
           <a:lstStyle/>
           <a:p>
-            <a:pPr indent="0" marL="0">
+            <a:pPr marL="0" indent="0">
               <a:lnSpc>
                 <a:spcPct val="120000"/>
               </a:lnSpc>
@@ -19334,7 +19038,7 @@
           <a:bodyPr wrap="square" rtlCol="0" anchor="ctr"/>
           <a:lstStyle/>
           <a:p>
-            <a:pPr indent="0" marL="0">
+            <a:pPr marL="0" indent="0">
               <a:buNone/>
             </a:pPr>
             <a:r>
@@ -19370,7 +19074,7 @@
           <a:bodyPr wrap="square" rtlCol="0" anchor="ctr"/>
           <a:lstStyle/>
           <a:p>
-            <a:pPr indent="0" marL="0">
+            <a:pPr marL="0" indent="0">
               <a:lnSpc>
                 <a:spcPct val="120000"/>
               </a:lnSpc>
@@ -19434,7 +19138,7 @@
           <a:bodyPr wrap="square" rtlCol="0" anchor="ctr"/>
           <a:lstStyle/>
           <a:p>
-            <a:pPr indent="0" marL="0">
+            <a:pPr marL="0" indent="0">
               <a:buNone/>
             </a:pPr>
             <a:r>
@@ -19470,7 +19174,7 @@
           <a:bodyPr wrap="square" rtlCol="0" anchor="ctr"/>
           <a:lstStyle/>
           <a:p>
-            <a:pPr indent="0" marL="0">
+            <a:pPr marL="0" indent="0">
               <a:lnSpc>
                 <a:spcPct val="120000"/>
               </a:lnSpc>
@@ -19504,6 +19208,7 @@
         <a:solidFill>
           <a:srgbClr val="F1F5F9"/>
         </a:solidFill>
+        <a:effectLst/>
       </p:bgPr>
     </p:bg>
     <p:spTree>
@@ -19566,7 +19271,7 @@
           <a:bodyPr wrap="square" lIns="0" tIns="0" rIns="0" bIns="0" rtlCol="0" anchor="ctr"/>
           <a:lstStyle/>
           <a:p>
-            <a:pPr indent="0" marL="0">
+            <a:pPr marL="0" indent="0">
               <a:buNone/>
             </a:pPr>
             <a:r>
@@ -19602,7 +19307,7 @@
           <a:bodyPr wrap="square" lIns="0" tIns="0" rIns="0" bIns="0" rtlCol="0" anchor="ctr"/>
           <a:lstStyle/>
           <a:p>
-            <a:pPr algn="r" indent="0" marL="0">
+            <a:pPr marL="0" indent="0" algn="r">
               <a:buNone/>
             </a:pPr>
             <a:r>
@@ -19619,7 +19324,7 @@
       </p:sp>
       <p:graphicFrame>
         <p:nvGraphicFramePr>
-          <p:cNvPr id="5" name="Chart 0" descr=""/>
+          <p:cNvPr id="5" name="Chart 0"/>
           <p:cNvGraphicFramePr/>
           <p:nvPr/>
         </p:nvGraphicFramePr>
@@ -19627,9 +19332,9 @@
           <a:off x="182880" y="804672"/>
           <a:ext cx="5943600" cy="4069080"/>
         </p:xfrm>
-        <a:graphic xmlns:a="http://schemas.openxmlformats.org/drawingml/2006/main">
+        <a:graphic>
           <a:graphicData uri="http://schemas.openxmlformats.org/drawingml/2006/chart">
-            <c:chart xmlns:c="http://schemas.openxmlformats.org/drawingml/2006/chart" r:id="rId1"/>
+            <c:chart xmlns:c="http://schemas.openxmlformats.org/drawingml/2006/chart" xmlns:r="http://schemas.openxmlformats.org/officeDocument/2006/relationships" r:id="rId3"/>
           </a:graphicData>
         </a:graphic>
       </p:graphicFrame>
@@ -19657,7 +19362,7 @@
             <a:prstDash val="solid"/>
           </a:ln>
           <a:effectLst>
-            <a:outerShdw sx="100000" sy="100000" kx="0" ky="0" algn="bl" rotWithShape="0" blurRad="101600" dist="38100" dir="8100000">
+            <a:outerShdw blurRad="101600" dist="38100" dir="8100000" algn="bl" rotWithShape="0">
               <a:srgbClr val="000000">
                 <a:alpha val="12000"/>
               </a:srgbClr>
@@ -19711,7 +19416,7 @@
           <a:bodyPr wrap="square" rtlCol="0" anchor="ctr"/>
           <a:lstStyle/>
           <a:p>
-            <a:pPr indent="0" marL="0">
+            <a:pPr marL="0" indent="0">
               <a:buNone/>
             </a:pPr>
             <a:r>
@@ -19772,7 +19477,7 @@
           <a:bodyPr wrap="square" rtlCol="0" anchor="ctr"/>
           <a:lstStyle/>
           <a:p>
-            <a:pPr indent="0" marL="0">
+            <a:pPr marL="0" indent="0">
               <a:buNone/>
             </a:pPr>
             <a:r>
@@ -19808,7 +19513,7 @@
           <a:bodyPr wrap="square" rtlCol="0" anchor="ctr"/>
           <a:lstStyle/>
           <a:p>
-            <a:pPr algn="r" indent="0" marL="0">
+            <a:pPr marL="0" indent="0" algn="r">
               <a:buNone/>
             </a:pPr>
             <a:r>
@@ -19869,7 +19574,7 @@
           <a:bodyPr wrap="square" rtlCol="0" anchor="ctr"/>
           <a:lstStyle/>
           <a:p>
-            <a:pPr indent="0" marL="0">
+            <a:pPr marL="0" indent="0">
               <a:buNone/>
             </a:pPr>
             <a:r>
@@ -19905,7 +19610,7 @@
           <a:bodyPr wrap="square" rtlCol="0" anchor="ctr"/>
           <a:lstStyle/>
           <a:p>
-            <a:pPr algn="r" indent="0" marL="0">
+            <a:pPr marL="0" indent="0" algn="r">
               <a:buNone/>
             </a:pPr>
             <a:r>
@@ -19919,7 +19624,7 @@
             <a:endParaRPr lang="en-US" sz="1000" dirty="0"/>
           </a:p>
           <a:p>
-            <a:pPr algn="r" indent="0" marL="0">
+            <a:pPr marL="0" indent="0" algn="r">
               <a:buNone/>
             </a:pPr>
             <a:r>
@@ -19980,7 +19685,7 @@
           <a:bodyPr wrap="square" rtlCol="0" anchor="ctr"/>
           <a:lstStyle/>
           <a:p>
-            <a:pPr indent="0" marL="0">
+            <a:pPr marL="0" indent="0">
               <a:buNone/>
             </a:pPr>
             <a:r>
@@ -20016,7 +19721,7 @@
           <a:bodyPr wrap="square" rtlCol="0" anchor="ctr"/>
           <a:lstStyle/>
           <a:p>
-            <a:pPr algn="r" indent="0" marL="0">
+            <a:pPr marL="0" indent="0" algn="r">
               <a:buNone/>
             </a:pPr>
             <a:r>
@@ -20077,7 +19782,7 @@
           <a:bodyPr wrap="square" rtlCol="0" anchor="ctr"/>
           <a:lstStyle/>
           <a:p>
-            <a:pPr indent="0" marL="0">
+            <a:pPr marL="0" indent="0">
               <a:buNone/>
             </a:pPr>
             <a:r>
@@ -20113,7 +19818,7 @@
           <a:bodyPr wrap="square" rtlCol="0" anchor="ctr"/>
           <a:lstStyle/>
           <a:p>
-            <a:pPr algn="r" indent="0" marL="0">
+            <a:pPr marL="0" indent="0" algn="r">
               <a:buNone/>
             </a:pPr>
             <a:r>
@@ -20174,7 +19879,7 @@
           <a:bodyPr wrap="square" rtlCol="0" anchor="ctr"/>
           <a:lstStyle/>
           <a:p>
-            <a:pPr indent="0" marL="0">
+            <a:pPr marL="0" indent="0">
               <a:buNone/>
             </a:pPr>
             <a:r>
@@ -20210,7 +19915,7 @@
           <a:bodyPr wrap="square" rtlCol="0" anchor="ctr"/>
           <a:lstStyle/>
           <a:p>
-            <a:pPr algn="r" indent="0" marL="0">
+            <a:pPr marL="0" indent="0" algn="r">
               <a:buNone/>
             </a:pPr>
             <a:r>
@@ -20271,7 +19976,7 @@
           <a:bodyPr wrap="square" rtlCol="0" anchor="ctr"/>
           <a:lstStyle/>
           <a:p>
-            <a:pPr indent="0" marL="0">
+            <a:pPr marL="0" indent="0">
               <a:buNone/>
             </a:pPr>
             <a:r>
@@ -20307,7 +20012,7 @@
           <a:bodyPr wrap="square" rtlCol="0" anchor="ctr"/>
           <a:lstStyle/>
           <a:p>
-            <a:pPr algn="r" indent="0" marL="0">
+            <a:pPr marL="0" indent="0" algn="r">
               <a:buNone/>
             </a:pPr>
             <a:r>
@@ -20368,7 +20073,7 @@
           <a:bodyPr wrap="square" rtlCol="0" anchor="ctr"/>
           <a:lstStyle/>
           <a:p>
-            <a:pPr indent="0" marL="0">
+            <a:pPr marL="0" indent="0">
               <a:buNone/>
             </a:pPr>
             <a:r>
@@ -20404,7 +20109,7 @@
           <a:bodyPr wrap="square" rtlCol="0" anchor="ctr"/>
           <a:lstStyle/>
           <a:p>
-            <a:pPr algn="r" indent="0" marL="0">
+            <a:pPr marL="0" indent="0" algn="r">
               <a:buNone/>
             </a:pPr>
             <a:r>
@@ -20465,7 +20170,7 @@
           <a:bodyPr wrap="square" rtlCol="0" anchor="ctr"/>
           <a:lstStyle/>
           <a:p>
-            <a:pPr indent="0" marL="0">
+            <a:pPr marL="0" indent="0">
               <a:buNone/>
             </a:pPr>
             <a:r>
@@ -20501,7 +20206,7 @@
           <a:bodyPr wrap="square" rtlCol="0" anchor="ctr"/>
           <a:lstStyle/>
           <a:p>
-            <a:pPr algn="r" indent="0" marL="0">
+            <a:pPr marL="0" indent="0" algn="r">
               <a:buNone/>
             </a:pPr>
             <a:r>
@@ -20532,6 +20237,7 @@
         <a:solidFill>
           <a:srgbClr val="F1F5F9"/>
         </a:solidFill>
+        <a:effectLst/>
       </p:bgPr>
     </p:bg>
     <p:spTree>
@@ -20594,7 +20300,7 @@
           <a:bodyPr wrap="square" lIns="0" tIns="0" rIns="0" bIns="0" rtlCol="0" anchor="ctr"/>
           <a:lstStyle/>
           <a:p>
-            <a:pPr indent="0" marL="0">
+            <a:pPr marL="0" indent="0">
               <a:buNone/>
             </a:pPr>
             <a:r>
@@ -20630,7 +20336,7 @@
           <a:bodyPr wrap="square" lIns="0" tIns="0" rIns="0" bIns="0" rtlCol="0" anchor="ctr"/>
           <a:lstStyle/>
           <a:p>
-            <a:pPr algn="r" indent="0" marL="0">
+            <a:pPr marL="0" indent="0" algn="r">
               <a:buNone/>
             </a:pPr>
             <a:r>
@@ -20647,7 +20353,7 @@
       </p:sp>
       <p:graphicFrame>
         <p:nvGraphicFramePr>
-          <p:cNvPr id="5" name="Chart 0" descr=""/>
+          <p:cNvPr id="5" name="Chart 0"/>
           <p:cNvGraphicFramePr/>
           <p:nvPr/>
         </p:nvGraphicFramePr>
@@ -20655,15 +20361,15 @@
           <a:off x="182880" y="804672"/>
           <a:ext cx="6035040" cy="2926080"/>
         </p:xfrm>
-        <a:graphic xmlns:a="http://schemas.openxmlformats.org/drawingml/2006/main">
+        <a:graphic>
           <a:graphicData uri="http://schemas.openxmlformats.org/drawingml/2006/chart">
-            <c:chart xmlns:c="http://schemas.openxmlformats.org/drawingml/2006/chart" r:id="rId1"/>
+            <c:chart xmlns:c="http://schemas.openxmlformats.org/drawingml/2006/chart" xmlns:r="http://schemas.openxmlformats.org/officeDocument/2006/relationships" r:id="rId3"/>
           </a:graphicData>
         </a:graphic>
       </p:graphicFrame>
       <p:graphicFrame>
         <p:nvGraphicFramePr>
-          <p:cNvPr id="6" name="Chart 1" descr=""/>
+          <p:cNvPr id="6" name="Chart 1"/>
           <p:cNvGraphicFramePr/>
           <p:nvPr/>
         </p:nvGraphicFramePr>
@@ -20671,9 +20377,9 @@
           <a:off x="182880" y="3840480"/>
           <a:ext cx="6035040" cy="1051560"/>
         </p:xfrm>
-        <a:graphic xmlns:a="http://schemas.openxmlformats.org/drawingml/2006/main">
+        <a:graphic>
           <a:graphicData uri="http://schemas.openxmlformats.org/drawingml/2006/chart">
-            <c:chart xmlns:c="http://schemas.openxmlformats.org/drawingml/2006/chart" r:id="rId2"/>
+            <c:chart xmlns:c="http://schemas.openxmlformats.org/drawingml/2006/chart" xmlns:r="http://schemas.openxmlformats.org/officeDocument/2006/relationships" r:id="rId4"/>
           </a:graphicData>
         </a:graphic>
       </p:graphicFrame>
@@ -20701,7 +20407,7 @@
             <a:prstDash val="solid"/>
           </a:ln>
           <a:effectLst>
-            <a:outerShdw sx="100000" sy="100000" kx="0" ky="0" algn="bl" rotWithShape="0" blurRad="101600" dist="38100" dir="8100000">
+            <a:outerShdw blurRad="101600" dist="38100" dir="8100000" algn="bl" rotWithShape="0">
               <a:srgbClr val="000000">
                 <a:alpha val="12000"/>
               </a:srgbClr>
@@ -20755,7 +20461,7 @@
           <a:bodyPr wrap="square" rtlCol="0" anchor="ctr"/>
           <a:lstStyle/>
           <a:p>
-            <a:pPr indent="0" marL="0">
+            <a:pPr marL="0" indent="0">
               <a:buNone/>
             </a:pPr>
             <a:r>
@@ -20816,7 +20522,7 @@
           <a:bodyPr wrap="square" rtlCol="0" anchor="ctr"/>
           <a:lstStyle/>
           <a:p>
-            <a:pPr indent="0" marL="0">
+            <a:pPr marL="0" indent="0">
               <a:buNone/>
             </a:pPr>
             <a:r>
@@ -20852,7 +20558,7 @@
           <a:bodyPr wrap="square" rtlCol="0" anchor="ctr"/>
           <a:lstStyle/>
           <a:p>
-            <a:pPr algn="r" indent="0" marL="0">
+            <a:pPr marL="0" indent="0" algn="r">
               <a:buNone/>
             </a:pPr>
             <a:r>
@@ -20913,7 +20619,7 @@
           <a:bodyPr wrap="square" rtlCol="0" anchor="ctr"/>
           <a:lstStyle/>
           <a:p>
-            <a:pPr indent="0" marL="0">
+            <a:pPr marL="0" indent="0">
               <a:buNone/>
             </a:pPr>
             <a:r>
@@ -20949,7 +20655,7 @@
           <a:bodyPr wrap="square" rtlCol="0" anchor="ctr"/>
           <a:lstStyle/>
           <a:p>
-            <a:pPr algn="r" indent="0" marL="0">
+            <a:pPr marL="0" indent="0" algn="r">
               <a:buNone/>
             </a:pPr>
             <a:r>
@@ -20963,7 +20669,7 @@
             <a:endParaRPr lang="en-US" sz="1000" dirty="0"/>
           </a:p>
           <a:p>
-            <a:pPr algn="r" indent="0" marL="0">
+            <a:pPr marL="0" indent="0" algn="r">
               <a:buNone/>
             </a:pPr>
             <a:r>
@@ -21024,7 +20730,7 @@
           <a:bodyPr wrap="square" rtlCol="0" anchor="ctr"/>
           <a:lstStyle/>
           <a:p>
-            <a:pPr indent="0" marL="0">
+            <a:pPr marL="0" indent="0">
               <a:buNone/>
             </a:pPr>
             <a:r>
@@ -21060,7 +20766,7 @@
           <a:bodyPr wrap="square" rtlCol="0" anchor="ctr"/>
           <a:lstStyle/>
           <a:p>
-            <a:pPr algn="r" indent="0" marL="0">
+            <a:pPr marL="0" indent="0" algn="r">
               <a:buNone/>
             </a:pPr>
             <a:r>
@@ -21121,7 +20827,7 @@
           <a:bodyPr wrap="square" rtlCol="0" anchor="ctr"/>
           <a:lstStyle/>
           <a:p>
-            <a:pPr indent="0" marL="0">
+            <a:pPr marL="0" indent="0">
               <a:buNone/>
             </a:pPr>
             <a:r>
@@ -21157,7 +20863,7 @@
           <a:bodyPr wrap="square" rtlCol="0" anchor="ctr"/>
           <a:lstStyle/>
           <a:p>
-            <a:pPr algn="r" indent="0" marL="0">
+            <a:pPr marL="0" indent="0" algn="r">
               <a:buNone/>
             </a:pPr>
             <a:r>
@@ -21218,7 +20924,7 @@
           <a:bodyPr wrap="square" rtlCol="0" anchor="ctr"/>
           <a:lstStyle/>
           <a:p>
-            <a:pPr indent="0" marL="0">
+            <a:pPr marL="0" indent="0">
               <a:buNone/>
             </a:pPr>
             <a:r>
@@ -21254,7 +20960,7 @@
           <a:bodyPr wrap="square" rtlCol="0" anchor="ctr"/>
           <a:lstStyle/>
           <a:p>
-            <a:pPr algn="r" indent="0" marL="0">
+            <a:pPr marL="0" indent="0" algn="r">
               <a:buNone/>
             </a:pPr>
             <a:r>
@@ -21315,7 +21021,7 @@
           <a:bodyPr wrap="square" rtlCol="0" anchor="ctr"/>
           <a:lstStyle/>
           <a:p>
-            <a:pPr indent="0" marL="0">
+            <a:pPr marL="0" indent="0">
               <a:buNone/>
             </a:pPr>
             <a:r>
@@ -21351,7 +21057,7 @@
           <a:bodyPr wrap="square" rtlCol="0" anchor="ctr"/>
           <a:lstStyle/>
           <a:p>
-            <a:pPr algn="r" indent="0" marL="0">
+            <a:pPr marL="0" indent="0" algn="r">
               <a:buNone/>
             </a:pPr>
             <a:r>
@@ -21412,7 +21118,7 @@
           <a:bodyPr wrap="square" rtlCol="0" anchor="ctr"/>
           <a:lstStyle/>
           <a:p>
-            <a:pPr indent="0" marL="0">
+            <a:pPr marL="0" indent="0">
               <a:buNone/>
             </a:pPr>
             <a:r>
@@ -21448,7 +21154,7 @@
           <a:bodyPr wrap="square" rtlCol="0" anchor="ctr"/>
           <a:lstStyle/>
           <a:p>
-            <a:pPr algn="r" indent="0" marL="0">
+            <a:pPr marL="0" indent="0" algn="r">
               <a:buNone/>
             </a:pPr>
             <a:r>
@@ -21509,7 +21215,7 @@
           <a:bodyPr wrap="square" rtlCol="0" anchor="ctr"/>
           <a:lstStyle/>
           <a:p>
-            <a:pPr indent="0" marL="0">
+            <a:pPr marL="0" indent="0">
               <a:buNone/>
             </a:pPr>
             <a:r>
@@ -21545,7 +21251,7 @@
           <a:bodyPr wrap="square" rtlCol="0" anchor="ctr"/>
           <a:lstStyle/>
           <a:p>
-            <a:pPr algn="r" indent="0" marL="0">
+            <a:pPr marL="0" indent="0" algn="r">
               <a:buNone/>
             </a:pPr>
             <a:r>
@@ -21576,6 +21282,7 @@
         <a:solidFill>
           <a:srgbClr val="F1F5F9"/>
         </a:solidFill>
+        <a:effectLst/>
       </p:bgPr>
     </p:bg>
     <p:spTree>
@@ -21638,7 +21345,7 @@
           <a:bodyPr wrap="square" lIns="0" tIns="0" rIns="0" bIns="0" rtlCol="0" anchor="ctr"/>
           <a:lstStyle/>
           <a:p>
-            <a:pPr indent="0" marL="0">
+            <a:pPr marL="0" indent="0">
               <a:buNone/>
             </a:pPr>
             <a:r>
@@ -21674,7 +21381,7 @@
           <a:bodyPr wrap="square" lIns="0" tIns="0" rIns="0" bIns="0" rtlCol="0" anchor="ctr"/>
           <a:lstStyle/>
           <a:p>
-            <a:pPr algn="r" indent="0" marL="0">
+            <a:pPr marL="0" indent="0" algn="r">
               <a:buNone/>
             </a:pPr>
             <a:r>
@@ -21691,7 +21398,7 @@
       </p:sp>
       <p:graphicFrame>
         <p:nvGraphicFramePr>
-          <p:cNvPr id="5" name="Chart 0" descr=""/>
+          <p:cNvPr id="5" name="Chart 0"/>
           <p:cNvGraphicFramePr/>
           <p:nvPr/>
         </p:nvGraphicFramePr>
@@ -21699,15 +21406,15 @@
           <a:off x="182880" y="804672"/>
           <a:ext cx="3931920" cy="2286000"/>
         </p:xfrm>
-        <a:graphic xmlns:a="http://schemas.openxmlformats.org/drawingml/2006/main">
+        <a:graphic>
           <a:graphicData uri="http://schemas.openxmlformats.org/drawingml/2006/chart">
-            <c:chart xmlns:c="http://schemas.openxmlformats.org/drawingml/2006/chart" r:id="rId1"/>
+            <c:chart xmlns:c="http://schemas.openxmlformats.org/drawingml/2006/chart" xmlns:r="http://schemas.openxmlformats.org/officeDocument/2006/relationships" r:id="rId3"/>
           </a:graphicData>
         </a:graphic>
       </p:graphicFrame>
       <p:graphicFrame>
         <p:nvGraphicFramePr>
-          <p:cNvPr id="6" name="Chart 1" descr=""/>
+          <p:cNvPr id="6" name="Chart 1"/>
           <p:cNvGraphicFramePr/>
           <p:nvPr/>
         </p:nvGraphicFramePr>
@@ -21715,9 +21422,9 @@
           <a:off x="182880" y="3200400"/>
           <a:ext cx="3931920" cy="1691640"/>
         </p:xfrm>
-        <a:graphic xmlns:a="http://schemas.openxmlformats.org/drawingml/2006/main">
+        <a:graphic>
           <a:graphicData uri="http://schemas.openxmlformats.org/drawingml/2006/chart">
-            <c:chart xmlns:c="http://schemas.openxmlformats.org/drawingml/2006/chart" r:id="rId2"/>
+            <c:chart xmlns:c="http://schemas.openxmlformats.org/drawingml/2006/chart" xmlns:r="http://schemas.openxmlformats.org/officeDocument/2006/relationships" r:id="rId4"/>
           </a:graphicData>
         </a:graphic>
       </p:graphicFrame>
@@ -21745,7 +21452,7 @@
             <a:prstDash val="solid"/>
           </a:ln>
           <a:effectLst>
-            <a:outerShdw sx="100000" sy="100000" kx="0" ky="0" algn="bl" rotWithShape="0" blurRad="101600" dist="38100" dir="8100000">
+            <a:outerShdw blurRad="101600" dist="38100" dir="8100000" algn="bl" rotWithShape="0">
               <a:srgbClr val="000000">
                 <a:alpha val="12000"/>
               </a:srgbClr>
@@ -21799,7 +21506,7 @@
           <a:bodyPr wrap="square" rtlCol="0" anchor="ctr"/>
           <a:lstStyle/>
           <a:p>
-            <a:pPr indent="0" marL="0">
+            <a:pPr marL="0" indent="0">
               <a:buNone/>
             </a:pPr>
             <a:r>
@@ -21860,7 +21567,7 @@
           <a:bodyPr wrap="square" rtlCol="0" anchor="ctr"/>
           <a:lstStyle/>
           <a:p>
-            <a:pPr indent="0" marL="0">
+            <a:pPr marL="0" indent="0">
               <a:buNone/>
             </a:pPr>
             <a:r>
@@ -21896,7 +21603,7 @@
           <a:bodyPr wrap="square" rtlCol="0" anchor="ctr"/>
           <a:lstStyle/>
           <a:p>
-            <a:pPr algn="r" indent="0" marL="0">
+            <a:pPr marL="0" indent="0" algn="r">
               <a:buNone/>
             </a:pPr>
             <a:r>
@@ -21957,7 +21664,7 @@
           <a:bodyPr wrap="square" rtlCol="0" anchor="ctr"/>
           <a:lstStyle/>
           <a:p>
-            <a:pPr indent="0" marL="0">
+            <a:pPr marL="0" indent="0">
               <a:buNone/>
             </a:pPr>
             <a:r>
@@ -21993,7 +21700,7 @@
           <a:bodyPr wrap="square" rtlCol="0" anchor="ctr"/>
           <a:lstStyle/>
           <a:p>
-            <a:pPr algn="r" indent="0" marL="0">
+            <a:pPr marL="0" indent="0" algn="r">
               <a:buNone/>
             </a:pPr>
             <a:r>
@@ -22054,7 +21761,7 @@
           <a:bodyPr wrap="square" rtlCol="0" anchor="ctr"/>
           <a:lstStyle/>
           <a:p>
-            <a:pPr indent="0" marL="0">
+            <a:pPr marL="0" indent="0">
               <a:buNone/>
             </a:pPr>
             <a:r>
@@ -22090,7 +21797,7 @@
           <a:bodyPr wrap="square" rtlCol="0" anchor="ctr"/>
           <a:lstStyle/>
           <a:p>
-            <a:pPr algn="r" indent="0" marL="0">
+            <a:pPr marL="0" indent="0" algn="r">
               <a:buNone/>
             </a:pPr>
             <a:r>
@@ -22151,7 +21858,7 @@
           <a:bodyPr wrap="square" rtlCol="0" anchor="ctr"/>
           <a:lstStyle/>
           <a:p>
-            <a:pPr indent="0" marL="0">
+            <a:pPr marL="0" indent="0">
               <a:buNone/>
             </a:pPr>
             <a:r>
@@ -22187,7 +21894,7 @@
           <a:bodyPr wrap="square" rtlCol="0" anchor="ctr"/>
           <a:lstStyle/>
           <a:p>
-            <a:pPr algn="r" indent="0" marL="0">
+            <a:pPr marL="0" indent="0" algn="r">
               <a:buNone/>
             </a:pPr>
             <a:r>
@@ -22248,7 +21955,7 @@
           <a:bodyPr wrap="square" rtlCol="0" anchor="ctr"/>
           <a:lstStyle/>
           <a:p>
-            <a:pPr indent="0" marL="0">
+            <a:pPr marL="0" indent="0">
               <a:buNone/>
             </a:pPr>
             <a:r>
@@ -22284,7 +21991,7 @@
           <a:bodyPr wrap="square" rtlCol="0" anchor="ctr"/>
           <a:lstStyle/>
           <a:p>
-            <a:pPr algn="r" indent="0" marL="0">
+            <a:pPr marL="0" indent="0" algn="r">
               <a:buNone/>
             </a:pPr>
             <a:r>
@@ -22345,7 +22052,7 @@
           <a:bodyPr wrap="square" rtlCol="0" anchor="ctr"/>
           <a:lstStyle/>
           <a:p>
-            <a:pPr indent="0" marL="0">
+            <a:pPr marL="0" indent="0">
               <a:buNone/>
             </a:pPr>
             <a:r>
@@ -22381,7 +22088,7 @@
           <a:bodyPr wrap="square" rtlCol="0" anchor="ctr"/>
           <a:lstStyle/>
           <a:p>
-            <a:pPr algn="r" indent="0" marL="0">
+            <a:pPr marL="0" indent="0" algn="r">
               <a:buNone/>
             </a:pPr>
             <a:r>
@@ -22442,7 +22149,7 @@
           <a:bodyPr wrap="square" rtlCol="0" anchor="ctr"/>
           <a:lstStyle/>
           <a:p>
-            <a:pPr indent="0" marL="0">
+            <a:pPr marL="0" indent="0">
               <a:buNone/>
             </a:pPr>
             <a:r>
@@ -22478,7 +22185,7 @@
           <a:bodyPr wrap="square" rtlCol="0" anchor="ctr"/>
           <a:lstStyle/>
           <a:p>
-            <a:pPr algn="r" indent="0" marL="0">
+            <a:pPr marL="0" indent="0" algn="r">
               <a:buNone/>
             </a:pPr>
             <a:r>
@@ -22539,7 +22246,7 @@
           <a:bodyPr wrap="square" rtlCol="0" anchor="ctr"/>
           <a:lstStyle/>
           <a:p>
-            <a:pPr indent="0" marL="0">
+            <a:pPr marL="0" indent="0">
               <a:buNone/>
             </a:pPr>
             <a:r>
@@ -22575,7 +22282,7 @@
           <a:bodyPr wrap="square" rtlCol="0" anchor="ctr"/>
           <a:lstStyle/>
           <a:p>
-            <a:pPr algn="r" indent="0" marL="0">
+            <a:pPr marL="0" indent="0" algn="r">
               <a:buNone/>
             </a:pPr>
             <a:r>
@@ -22891,4 +22598,299 @@
     </a:ext>
   </a:extLst>
 </a:theme>
+</file>
+
+<file path=ppt/theme/theme2.xml><?xml version="1.0" encoding="utf-8"?>
+<a:theme xmlns:a="http://schemas.openxmlformats.org/drawingml/2006/main" name="Office Theme">
+  <a:themeElements>
+    <a:clrScheme name="Office">
+      <a:dk1>
+        <a:sysClr val="windowText" lastClr="000000"/>
+      </a:dk1>
+      <a:lt1>
+        <a:sysClr val="window" lastClr="FFFFFF"/>
+      </a:lt1>
+      <a:dk2>
+        <a:srgbClr val="44546A"/>
+      </a:dk2>
+      <a:lt2>
+        <a:srgbClr val="E7E6E6"/>
+      </a:lt2>
+      <a:accent1>
+        <a:srgbClr val="4472C4"/>
+      </a:accent1>
+      <a:accent2>
+        <a:srgbClr val="ED7D31"/>
+      </a:accent2>
+      <a:accent3>
+        <a:srgbClr val="A5A5A5"/>
+      </a:accent3>
+      <a:accent4>
+        <a:srgbClr val="FFC000"/>
+      </a:accent4>
+      <a:accent5>
+        <a:srgbClr val="5B9BD5"/>
+      </a:accent5>
+      <a:accent6>
+        <a:srgbClr val="70AD47"/>
+      </a:accent6>
+      <a:hlink>
+        <a:srgbClr val="0563C1"/>
+      </a:hlink>
+      <a:folHlink>
+        <a:srgbClr val="954F72"/>
+      </a:folHlink>
+    </a:clrScheme>
+    <a:fontScheme name="Office">
+      <a:majorFont>
+        <a:latin typeface="Calibri Light" panose="020F0302020204030204"/>
+        <a:ea typeface=""/>
+        <a:cs typeface=""/>
+        <a:font script="Jpan" typeface="游ゴシック Light"/>
+        <a:font script="Hang" typeface="맑은 고딕"/>
+        <a:font script="Hans" typeface="等线 Light"/>
+        <a:font script="Hant" typeface="新細明體"/>
+        <a:font script="Arab" typeface="Times New Roman"/>
+        <a:font script="Hebr" typeface="Times New Roman"/>
+        <a:font script="Thai" typeface="Angsana New"/>
+        <a:font script="Ethi" typeface="Nyala"/>
+        <a:font script="Beng" typeface="Vrinda"/>
+        <a:font script="Gujr" typeface="Shruti"/>
+        <a:font script="Khmr" typeface="MoolBoran"/>
+        <a:font script="Knda" typeface="Tunga"/>
+        <a:font script="Guru" typeface="Raavi"/>
+        <a:font script="Cans" typeface="Euphemia"/>
+        <a:font script="Cher" typeface="Plantagenet Cherokee"/>
+        <a:font script="Yiii" typeface="Microsoft Yi Baiti"/>
+        <a:font script="Tibt" typeface="Microsoft Himalaya"/>
+        <a:font script="Thaa" typeface="MV Boli"/>
+        <a:font script="Deva" typeface="Mangal"/>
+        <a:font script="Telu" typeface="Gautami"/>
+        <a:font script="Taml" typeface="Latha"/>
+        <a:font script="Syrc" typeface="Estrangelo Edessa"/>
+        <a:font script="Orya" typeface="Kalinga"/>
+        <a:font script="Mlym" typeface="Kartika"/>
+        <a:font script="Laoo" typeface="DokChampa"/>
+        <a:font script="Sinh" typeface="Iskoola Pota"/>
+        <a:font script="Mong" typeface="Mongolian Baiti"/>
+        <a:font script="Viet" typeface="Times New Roman"/>
+        <a:font script="Uigh" typeface="Microsoft Uighur"/>
+        <a:font script="Geor" typeface="Sylfaen"/>
+        <a:font script="Armn" typeface="Arial"/>
+        <a:font script="Bugi" typeface="Leelawadee UI"/>
+        <a:font script="Bopo" typeface="Microsoft JhengHei"/>
+        <a:font script="Java" typeface="Javanese Text"/>
+        <a:font script="Lisu" typeface="Segoe UI"/>
+        <a:font script="Mymr" typeface="Myanmar Text"/>
+        <a:font script="Nkoo" typeface="Ebrima"/>
+        <a:font script="Olck" typeface="Nirmala UI"/>
+        <a:font script="Osma" typeface="Ebrima"/>
+        <a:font script="Phag" typeface="Phagspa"/>
+        <a:font script="Syrn" typeface="Estrangelo Edessa"/>
+        <a:font script="Syrj" typeface="Estrangelo Edessa"/>
+        <a:font script="Syre" typeface="Estrangelo Edessa"/>
+        <a:font script="Sora" typeface="Nirmala UI"/>
+        <a:font script="Tale" typeface="Microsoft Tai Le"/>
+        <a:font script="Talu" typeface="Microsoft New Tai Lue"/>
+        <a:font script="Tfng" typeface="Ebrima"/>
+      </a:majorFont>
+      <a:minorFont>
+        <a:latin typeface="Calibri" panose="020F0502020204030204"/>
+        <a:ea typeface=""/>
+        <a:cs typeface=""/>
+        <a:font script="Jpan" typeface="游ゴシック"/>
+        <a:font script="Hang" typeface="맑은 고딕"/>
+        <a:font script="Hans" typeface="等线"/>
+        <a:font script="Hant" typeface="新細明體"/>
+        <a:font script="Arab" typeface="Arial"/>
+        <a:font script="Hebr" typeface="Arial"/>
+        <a:font script="Thai" typeface="Cordia New"/>
+        <a:font script="Ethi" typeface="Nyala"/>
+        <a:font script="Beng" typeface="Vrinda"/>
+        <a:font script="Gujr" typeface="Shruti"/>
+        <a:font script="Khmr" typeface="DaunPenh"/>
+        <a:font script="Knda" typeface="Tunga"/>
+        <a:font script="Guru" typeface="Raavi"/>
+        <a:font script="Cans" typeface="Euphemia"/>
+        <a:font script="Cher" typeface="Plantagenet Cherokee"/>
+        <a:font script="Yiii" typeface="Microsoft Yi Baiti"/>
+        <a:font script="Tibt" typeface="Microsoft Himalaya"/>
+        <a:font script="Thaa" typeface="MV Boli"/>
+        <a:font script="Deva" typeface="Mangal"/>
+        <a:font script="Telu" typeface="Gautami"/>
+        <a:font script="Taml" typeface="Latha"/>
+        <a:font script="Syrc" typeface="Estrangelo Edessa"/>
+        <a:font script="Orya" typeface="Kalinga"/>
+        <a:font script="Mlym" typeface="Kartika"/>
+        <a:font script="Laoo" typeface="DokChampa"/>
+        <a:font script="Sinh" typeface="Iskoola Pota"/>
+        <a:font script="Mong" typeface="Mongolian Baiti"/>
+        <a:font script="Viet" typeface="Arial"/>
+        <a:font script="Uigh" typeface="Microsoft Uighur"/>
+        <a:font script="Geor" typeface="Sylfaen"/>
+        <a:font script="Armn" typeface="Arial"/>
+        <a:font script="Bugi" typeface="Leelawadee UI"/>
+        <a:font script="Bopo" typeface="Microsoft JhengHei"/>
+        <a:font script="Java" typeface="Javanese Text"/>
+        <a:font script="Lisu" typeface="Segoe UI"/>
+        <a:font script="Mymr" typeface="Myanmar Text"/>
+        <a:font script="Nkoo" typeface="Ebrima"/>
+        <a:font script="Olck" typeface="Nirmala UI"/>
+        <a:font script="Osma" typeface="Ebrima"/>
+        <a:font script="Phag" typeface="Phagspa"/>
+        <a:font script="Syrn" typeface="Estrangelo Edessa"/>
+        <a:font script="Syrj" typeface="Estrangelo Edessa"/>
+        <a:font script="Syre" typeface="Estrangelo Edessa"/>
+        <a:font script="Sora" typeface="Nirmala UI"/>
+        <a:font script="Tale" typeface="Microsoft Tai Le"/>
+        <a:font script="Talu" typeface="Microsoft New Tai Lue"/>
+        <a:font script="Tfng" typeface="Ebrima"/>
+      </a:minorFont>
+    </a:fontScheme>
+    <a:fmtScheme name="Office">
+      <a:fillStyleLst>
+        <a:solidFill>
+          <a:schemeClr val="phClr"/>
+        </a:solidFill>
+        <a:gradFill rotWithShape="1">
+          <a:gsLst>
+            <a:gs pos="0">
+              <a:schemeClr val="phClr">
+                <a:lumMod val="110000"/>
+                <a:satMod val="105000"/>
+                <a:tint val="67000"/>
+              </a:schemeClr>
+            </a:gs>
+            <a:gs pos="50000">
+              <a:schemeClr val="phClr">
+                <a:lumMod val="105000"/>
+                <a:satMod val="103000"/>
+                <a:tint val="73000"/>
+              </a:schemeClr>
+            </a:gs>
+            <a:gs pos="100000">
+              <a:schemeClr val="phClr">
+                <a:lumMod val="105000"/>
+                <a:satMod val="109000"/>
+                <a:tint val="81000"/>
+              </a:schemeClr>
+            </a:gs>
+          </a:gsLst>
+          <a:lin ang="5400000" scaled="0"/>
+        </a:gradFill>
+        <a:gradFill rotWithShape="1">
+          <a:gsLst>
+            <a:gs pos="0">
+              <a:schemeClr val="phClr">
+                <a:satMod val="103000"/>
+                <a:lumMod val="102000"/>
+                <a:tint val="94000"/>
+              </a:schemeClr>
+            </a:gs>
+            <a:gs pos="50000">
+              <a:schemeClr val="phClr">
+                <a:satMod val="110000"/>
+                <a:lumMod val="100000"/>
+                <a:shade val="100000"/>
+              </a:schemeClr>
+            </a:gs>
+            <a:gs pos="100000">
+              <a:schemeClr val="phClr">
+                <a:lumMod val="99000"/>
+                <a:satMod val="120000"/>
+                <a:shade val="78000"/>
+              </a:schemeClr>
+            </a:gs>
+          </a:gsLst>
+          <a:lin ang="5400000" scaled="0"/>
+        </a:gradFill>
+      </a:fillStyleLst>
+      <a:lnStyleLst>
+        <a:ln w="6350" cap="flat" cmpd="sng" algn="ctr">
+          <a:solidFill>
+            <a:schemeClr val="phClr"/>
+          </a:solidFill>
+          <a:prstDash val="solid"/>
+          <a:miter lim="800000"/>
+        </a:ln>
+        <a:ln w="12700" cap="flat" cmpd="sng" algn="ctr">
+          <a:solidFill>
+            <a:schemeClr val="phClr"/>
+          </a:solidFill>
+          <a:prstDash val="solid"/>
+          <a:miter lim="800000"/>
+        </a:ln>
+        <a:ln w="19050" cap="flat" cmpd="sng" algn="ctr">
+          <a:solidFill>
+            <a:schemeClr val="phClr"/>
+          </a:solidFill>
+          <a:prstDash val="solid"/>
+          <a:miter lim="800000"/>
+        </a:ln>
+      </a:lnStyleLst>
+      <a:effectStyleLst>
+        <a:effectStyle>
+          <a:effectLst/>
+        </a:effectStyle>
+        <a:effectStyle>
+          <a:effectLst/>
+        </a:effectStyle>
+        <a:effectStyle>
+          <a:effectLst>
+            <a:outerShdw blurRad="57150" dist="19050" dir="5400000" algn="ctr" rotWithShape="0">
+              <a:srgbClr val="000000">
+                <a:alpha val="63000"/>
+              </a:srgbClr>
+            </a:outerShdw>
+          </a:effectLst>
+        </a:effectStyle>
+      </a:effectStyleLst>
+      <a:bgFillStyleLst>
+        <a:solidFill>
+          <a:schemeClr val="phClr"/>
+        </a:solidFill>
+        <a:solidFill>
+          <a:schemeClr val="phClr">
+            <a:tint val="95000"/>
+            <a:satMod val="170000"/>
+          </a:schemeClr>
+        </a:solidFill>
+        <a:gradFill rotWithShape="1">
+          <a:gsLst>
+            <a:gs pos="0">
+              <a:schemeClr val="phClr">
+                <a:tint val="93000"/>
+                <a:satMod val="150000"/>
+                <a:shade val="98000"/>
+                <a:lumMod val="102000"/>
+              </a:schemeClr>
+            </a:gs>
+            <a:gs pos="50000">
+              <a:schemeClr val="phClr">
+                <a:tint val="98000"/>
+                <a:satMod val="130000"/>
+                <a:shade val="90000"/>
+                <a:lumMod val="103000"/>
+              </a:schemeClr>
+            </a:gs>
+            <a:gs pos="100000">
+              <a:schemeClr val="phClr">
+                <a:shade val="63000"/>
+                <a:satMod val="120000"/>
+              </a:schemeClr>
+            </a:gs>
+          </a:gsLst>
+          <a:lin ang="5400000" scaled="0"/>
+        </a:gradFill>
+      </a:bgFillStyleLst>
+    </a:fmtScheme>
+  </a:themeElements>
+  <a:objectDefaults/>
+  <a:extraClrSchemeLst/>
+  <a:extLst>
+    <a:ext uri="{05A4C25C-085E-4340-85A3-A5531E510DB2}">
+      <thm15:themeFamily xmlns:thm15="http://schemas.microsoft.com/office/thememl/2012/main" name="Office Theme" id="{62F939B6-93AF-4DB8-9C6B-D6C7DFDC589F}" vid="{4A3C46E8-61CC-4603-A589-7422A47A8E4A}"/>
+    </a:ext>
+  </a:extLst>
+</a:theme>
 </file>